--- a/docs/presentation/cohort-pnc-2026-main.pptx
+++ b/docs/presentation/cohort-pnc-2026-main.pptx
@@ -6920,7 +6920,7 @@
               <a:rPr>
                 <a:ea typeface="Microsoft JhengHei"/>
               </a:rPr>
-              <a:t>² Humanistic-AI lab, College of Liberal Arts, National Taiwan University, Taipei, Taiwan</a:t>
+              <a:t>² Co-Intelligence Humanities AI Future Lab</a:t>
             </a:r>
           </a:p>
         </p:txBody>

--- a/docs/presentation/cohort-pnc-2026-main.pptx
+++ b/docs/presentation/cohort-pnc-2026-main.pptx
@@ -15549,7 +15549,7 @@
               </a:defRPr>
             </a:pPr>
             <a:r>
-              <a:rPr>
+              <a:rPr dirty="0">
                 <a:ea typeface="Microsoft JhengHei"/>
               </a:rPr>
               <a:t>Acknowledgement</a:t>
@@ -15566,7 +15566,7 @@
         <p:spPr>
           <a:xfrm>
             <a:off x="523874" y="1809750"/>
-            <a:ext cx="11049000" cy="523220"/>
+            <a:ext cx="11049000" cy="457882"/>
           </a:xfrm>
           <a:prstGeom prst="rect">
             <a:avLst/>
@@ -15597,24 +15597,24 @@
               </a:defRPr>
             </a:pPr>
             <a:r>
-              <a:rPr lang="en-US" sz="3200" dirty="0">
-                <a:ea typeface="Microsoft JhengHei"/>
-              </a:rPr>
-              <a:t>Data provided by </a:t>
-            </a:r>
-            <a:r>
-              <a:rPr sz="3200" dirty="0">
+              <a:rPr lang="en-US" sz="2800" dirty="0">
+                <a:ea typeface="Microsoft JhengHei"/>
+              </a:rPr>
+              <a:t>Data provided by Prof. </a:t>
+            </a:r>
+            <a:r>
+              <a:rPr sz="2800" dirty="0">
                 <a:ea typeface="Microsoft JhengHei"/>
               </a:rPr>
               <a:t>Michael Radich</a:t>
             </a:r>
             <a:r>
-              <a:rPr lang="en-US" sz="3200" dirty="0">
+              <a:rPr lang="en-US" sz="2800" dirty="0">
                 <a:ea typeface="Microsoft JhengHei"/>
               </a:rPr>
               <a:t> of Heidelberg University</a:t>
             </a:r>
-            <a:endParaRPr sz="3200" dirty="0">
+            <a:endParaRPr sz="2800" dirty="0">
               <a:ea typeface="Microsoft JhengHei"/>
             </a:endParaRPr>
           </a:p>
@@ -16860,7 +16860,7 @@
         <p:spPr>
           <a:xfrm>
             <a:off x="495299" y="742950"/>
-            <a:ext cx="11144250" cy="952500"/>
+            <a:ext cx="11144250" cy="523220"/>
           </a:xfrm>
           <a:prstGeom prst="rect">
             <a:avLst/>
@@ -16891,11 +16891,14 @@
               </a:defRPr>
             </a:pPr>
             <a:r>
-              <a:rPr>
-                <a:ea typeface="Microsoft JhengHei"/>
-              </a:rPr>
-              <a:t>Why we built Cohort</a:t>
-            </a:r>
+              <a:rPr lang="en-US" dirty="0">
+                <a:ea typeface="Microsoft JhengHei"/>
+              </a:rPr>
+              <a:t>Cohort’s purpose</a:t>
+            </a:r>
+            <a:endParaRPr dirty="0">
+              <a:ea typeface="Microsoft JhengHei"/>
+            </a:endParaRPr>
           </a:p>
         </p:txBody>
       </p:sp>
@@ -16908,7 +16911,7 @@
         <p:spPr>
           <a:xfrm>
             <a:off x="523874" y="1952624"/>
-            <a:ext cx="10953750" cy="1238250"/>
+            <a:ext cx="10953750" cy="1104277"/>
           </a:xfrm>
           <a:prstGeom prst="rect">
             <a:avLst/>
@@ -16942,33 +16945,29 @@
               <a:rPr dirty="0">
                 <a:ea typeface="Microsoft JhengHei"/>
               </a:rPr>
-              <a:t>Let researchers direct agents and inspect</a:t>
-            </a:r>
-          </a:p>
-          <a:p>
-            <a:pPr>
-              <a:lnSpc>
-                <a:spcPct val="118000"/>
-              </a:lnSpc>
-              <a:spcBef>
-                <a:spcPts val="0"/>
-              </a:spcBef>
-              <a:spcAft>
-                <a:spcPts val="0"/>
-              </a:spcAft>
-              <a:defRPr sz="3200" b="0">
-                <a:solidFill>
-                  <a:srgbClr val="24384A"/>
-                </a:solidFill>
-                <a:latin typeface="Lato"/>
-              </a:defRPr>
-            </a:pPr>
+              <a:t>Let researchers</a:t>
+            </a:r>
+            <a:r>
+              <a:rPr lang="en-US" dirty="0">
+                <a:ea typeface="Microsoft JhengHei"/>
+              </a:rPr>
+              <a:t> leverage</a:t>
+            </a:r>
             <a:r>
               <a:rPr dirty="0">
                 <a:ea typeface="Microsoft JhengHei"/>
               </a:rPr>
-              <a:t>the evidence behind their proposals.</a:t>
-            </a:r>
+              <a:t> agents </a:t>
+            </a:r>
+            <a:r>
+              <a:rPr lang="en-US" dirty="0">
+                <a:ea typeface="Microsoft JhengHei"/>
+              </a:rPr>
+              <a:t>to explore new possibilities and directions while ensuring data provenance</a:t>
+            </a:r>
+            <a:endParaRPr dirty="0">
+              <a:ea typeface="Microsoft JhengHei"/>
+            </a:endParaRPr>
           </a:p>
         </p:txBody>
       </p:sp>
@@ -17340,8 +17339,8 @@
         </p:nvSpPr>
         <p:spPr>
           <a:xfrm>
-            <a:off x="676275" y="2981325"/>
-            <a:ext cx="2266950" cy="495299"/>
+            <a:off x="666750" y="2857500"/>
+            <a:ext cx="3381375" cy="857250"/>
           </a:xfrm>
           <a:prstGeom prst="rect">
             <a:avLst/>
@@ -17364,7 +17363,7 @@
               <a:spcAft>
                 <a:spcPts val="0"/>
               </a:spcAft>
-              <a:defRPr sz="2000" b="1">
+              <a:defRPr sz="2300" b="1">
                 <a:solidFill>
                   <a:srgbClr val="155F88"/>
                 </a:solidFill>
@@ -17375,7 +17374,32 @@
               <a:rPr>
                 <a:ea typeface="Microsoft JhengHei"/>
               </a:rPr>
-              <a:t>Exact search</a:t>
+              <a:t>Find and compare</a:t>
+            </a:r>
+          </a:p>
+          <a:p>
+            <a:pPr>
+              <a:lnSpc>
+                <a:spcPct val="118000"/>
+              </a:lnSpc>
+              <a:spcBef>
+                <a:spcPts val="0"/>
+              </a:spcBef>
+              <a:spcAft>
+                <a:spcPts val="0"/>
+              </a:spcAft>
+              <a:defRPr sz="2300" b="1">
+                <a:solidFill>
+                  <a:srgbClr val="155F88"/>
+                </a:solidFill>
+                <a:latin typeface="Lato"/>
+              </a:defRPr>
+            </a:pPr>
+            <a:r>
+              <a:rPr>
+                <a:ea typeface="Microsoft JhengHei"/>
+              </a:rPr>
+              <a:t>passages</a:t>
             </a:r>
           </a:p>
         </p:txBody>
@@ -17388,8 +17412,8 @@
         </p:nvSpPr>
         <p:spPr>
           <a:xfrm>
-            <a:off x="676275" y="3657600"/>
-            <a:ext cx="2266950" cy="723900"/>
+            <a:off x="4429125" y="2857500"/>
+            <a:ext cx="7143750" cy="952500"/>
           </a:xfrm>
           <a:prstGeom prst="rect">
             <a:avLst/>
@@ -17412,7 +17436,7 @@
               <a:spcAft>
                 <a:spcPts val="0"/>
               </a:spcAft>
-              <a:defRPr sz="1900" b="0">
+              <a:defRPr sz="2300" b="0">
                 <a:solidFill>
                   <a:srgbClr val="24384A"/>
                 </a:solidFill>
@@ -17423,21 +17447,21 @@
               <a:rPr>
                 <a:ea typeface="Microsoft JhengHei"/>
               </a:rPr>
-              <a:t>Find a phrase</a:t>
-            </a:r>
-          </a:p>
-          <a:p>
-            <a:pPr>
-              <a:lnSpc>
-                <a:spcPct val="118000"/>
-              </a:lnSpc>
-              <a:spcBef>
-                <a:spcPts val="0"/>
-              </a:spcBef>
-              <a:spcAft>
-                <a:spcPts val="0"/>
-              </a:spcAft>
-              <a:defRPr sz="1900" b="0">
+              <a:t>Search exact phrases, retrieve related passages,</a:t>
+            </a:r>
+          </a:p>
+          <a:p>
+            <a:pPr>
+              <a:lnSpc>
+                <a:spcPct val="118000"/>
+              </a:lnSpc>
+              <a:spcBef>
+                <a:spcPts val="0"/>
+              </a:spcBef>
+              <a:spcAft>
+                <a:spcPts val="0"/>
+              </a:spcAft>
+              <a:defRPr sz="2300" b="0">
                 <a:solidFill>
                   <a:srgbClr val="24384A"/>
                 </a:solidFill>
@@ -17448,7 +17472,7 @@
               <a:rPr>
                 <a:ea typeface="Microsoft JhengHei"/>
               </a:rPr>
-              <a:t>and open its source.</a:t>
+              <a:t>and inspect shared wording.</a:t>
             </a:r>
           </a:p>
         </p:txBody>
@@ -17461,8 +17485,8 @@
         </p:nvSpPr>
         <p:spPr>
           <a:xfrm>
-            <a:off x="3533775" y="2981325"/>
-            <a:ext cx="2266950" cy="495299"/>
+            <a:off x="666750" y="4048125"/>
+            <a:ext cx="3381375" cy="857250"/>
           </a:xfrm>
           <a:prstGeom prst="rect">
             <a:avLst/>
@@ -17485,7 +17509,7 @@
               <a:spcAft>
                 <a:spcPts val="0"/>
               </a:spcAft>
-              <a:defRPr sz="2000" b="1">
+              <a:defRPr sz="2300" b="1">
                 <a:solidFill>
                   <a:srgbClr val="155F88"/>
                 </a:solidFill>
@@ -17496,7 +17520,32 @@
               <a:rPr>
                 <a:ea typeface="Microsoft JhengHei"/>
               </a:rPr>
-              <a:t>Related passages</a:t>
+              <a:t>Develop research</a:t>
+            </a:r>
+          </a:p>
+          <a:p>
+            <a:pPr>
+              <a:lnSpc>
+                <a:spcPct val="118000"/>
+              </a:lnSpc>
+              <a:spcBef>
+                <a:spcPts val="0"/>
+              </a:spcBef>
+              <a:spcAft>
+                <a:spcPts val="0"/>
+              </a:spcAft>
+              <a:defRPr sz="2300" b="1">
+                <a:solidFill>
+                  <a:srgbClr val="155F88"/>
+                </a:solidFill>
+                <a:latin typeface="Lato"/>
+              </a:defRPr>
+            </a:pPr>
+            <a:r>
+              <a:rPr>
+                <a:ea typeface="Microsoft JhengHei"/>
+              </a:rPr>
+              <a:t>proposals</a:t>
             </a:r>
           </a:p>
         </p:txBody>
@@ -17509,8 +17558,8 @@
         </p:nvSpPr>
         <p:spPr>
           <a:xfrm>
-            <a:off x="3533775" y="3657600"/>
-            <a:ext cx="2266950" cy="723900"/>
+            <a:off x="4429125" y="4048125"/>
+            <a:ext cx="7143750" cy="952500"/>
           </a:xfrm>
           <a:prstGeom prst="rect">
             <a:avLst/>
@@ -17533,7 +17582,7 @@
               <a:spcAft>
                 <a:spcPts val="0"/>
               </a:spcAft>
-              <a:defRPr sz="1900" b="0">
+              <a:defRPr sz="2300" b="0">
                 <a:solidFill>
                   <a:srgbClr val="24384A"/>
                 </a:solidFill>
@@ -17544,21 +17593,21 @@
               <a:rPr>
                 <a:ea typeface="Microsoft JhengHei"/>
               </a:rPr>
-              <a:t>Retrieve candidates</a:t>
-            </a:r>
-          </a:p>
-          <a:p>
-            <a:pPr>
-              <a:lnSpc>
-                <a:spcPct val="118000"/>
-              </a:lnSpc>
-              <a:spcBef>
-                <a:spcPts val="0"/>
-              </a:spcBef>
-              <a:spcAft>
-                <a:spcPts val="0"/>
-              </a:spcAft>
-              <a:defRPr sz="1900" b="0">
+              <a:t>Suggest explanations, alternatives</a:t>
+            </a:r>
+          </a:p>
+          <a:p>
+            <a:pPr>
+              <a:lnSpc>
+                <a:spcPct val="118000"/>
+              </a:lnSpc>
+              <a:spcBef>
+                <a:spcPts val="0"/>
+              </a:spcBef>
+              <a:spcAft>
+                <a:spcPts val="0"/>
+              </a:spcAft>
+              <a:defRPr sz="2300" b="0">
                 <a:solidFill>
                   <a:srgbClr val="24384A"/>
                 </a:solidFill>
@@ -17569,7 +17618,7 @@
               <a:rPr>
                 <a:ea typeface="Microsoft JhengHei"/>
               </a:rPr>
-              <a:t>using embeddings.</a:t>
+              <a:t>and follow-up searches.</a:t>
             </a:r>
           </a:p>
         </p:txBody>
@@ -17582,8 +17631,8 @@
         </p:nvSpPr>
         <p:spPr>
           <a:xfrm>
-            <a:off x="6391275" y="2981325"/>
-            <a:ext cx="2266950" cy="495299"/>
+            <a:off x="666750" y="5238750"/>
+            <a:ext cx="3381375" cy="857250"/>
           </a:xfrm>
           <a:prstGeom prst="rect">
             <a:avLst/>
@@ -17606,7 +17655,7 @@
               <a:spcAft>
                 <a:spcPts val="0"/>
               </a:spcAft>
-              <a:defRPr sz="2000" b="1">
+              <a:defRPr sz="2300" b="1">
                 <a:solidFill>
                   <a:srgbClr val="80511B"/>
                 </a:solidFill>
@@ -17617,7 +17666,32 @@
               <a:rPr>
                 <a:ea typeface="Microsoft JhengHei"/>
               </a:rPr>
-              <a:t>Shared wording</a:t>
+              <a:t>Inspect sources,</a:t>
+            </a:r>
+          </a:p>
+          <a:p>
+            <a:pPr>
+              <a:lnSpc>
+                <a:spcPct val="118000"/>
+              </a:lnSpc>
+              <a:spcBef>
+                <a:spcPts val="0"/>
+              </a:spcBef>
+              <a:spcAft>
+                <a:spcPts val="0"/>
+              </a:spcAft>
+              <a:defRPr sz="2300" b="1">
+                <a:solidFill>
+                  <a:srgbClr val="80511B"/>
+                </a:solidFill>
+                <a:latin typeface="Lato"/>
+              </a:defRPr>
+            </a:pPr>
+            <a:r>
+              <a:rPr>
+                <a:ea typeface="Microsoft JhengHei"/>
+              </a:rPr>
+              <a:t>checks and decisions</a:t>
             </a:r>
           </a:p>
         </p:txBody>
@@ -17630,8 +17704,8 @@
         </p:nvSpPr>
         <p:spPr>
           <a:xfrm>
-            <a:off x="6391275" y="3657600"/>
-            <a:ext cx="2266950" cy="723900"/>
+            <a:off x="4429125" y="5238750"/>
+            <a:ext cx="7143750" cy="952500"/>
           </a:xfrm>
           <a:prstGeom prst="rect">
             <a:avLst/>
@@ -17654,7 +17728,7 @@
               <a:spcAft>
                 <a:spcPts val="0"/>
               </a:spcAft>
-              <a:defRPr sz="1800" b="0">
+              <a:defRPr sz="2300" b="0">
                 <a:solidFill>
                   <a:srgbClr val="24384A"/>
                 </a:solidFill>
@@ -17665,21 +17739,21 @@
               <a:rPr>
                 <a:ea typeface="Microsoft JhengHei"/>
               </a:rPr>
-              <a:t>Locate matching spans</a:t>
-            </a:r>
-          </a:p>
-          <a:p>
-            <a:pPr>
-              <a:lnSpc>
-                <a:spcPct val="118000"/>
-              </a:lnSpc>
-              <a:spcBef>
-                <a:spcPts val="0"/>
-              </a:spcBef>
-              <a:spcAft>
-                <a:spcPts val="0"/>
-              </a:spcAft>
-              <a:defRPr sz="1800" b="0">
+              <a:t>Trace proposals to evidence.</a:t>
+            </a:r>
+          </a:p>
+          <a:p>
+            <a:pPr>
+              <a:lnSpc>
+                <a:spcPct val="118000"/>
+              </a:lnSpc>
+              <a:spcBef>
+                <a:spcPts val="0"/>
+              </a:spcBef>
+              <a:spcAft>
+                <a:spcPts val="0"/>
+              </a:spcAft>
+              <a:defRPr sz="2300" b="0">
                 <a:solidFill>
                   <a:srgbClr val="24384A"/>
                 </a:solidFill>
@@ -17690,320 +17764,7 @@
               <a:rPr>
                 <a:ea typeface="Microsoft JhengHei"/>
               </a:rPr>
-              <a:t>and source positions.</a:t>
-            </a:r>
-          </a:p>
-        </p:txBody>
-      </p:sp>
-      <p:sp>
-        <p:nvSpPr>
-          <p:cNvPr id="11" name="TextBox 10"/>
-          <p:cNvSpPr txBox="1"/>
-          <p:nvPr/>
-        </p:nvSpPr>
-        <p:spPr>
-          <a:xfrm>
-            <a:off x="9248775" y="2981325"/>
-            <a:ext cx="2266950" cy="495299"/>
-          </a:xfrm>
-          <a:prstGeom prst="rect">
-            <a:avLst/>
-          </a:prstGeom>
-          <a:noFill/>
-        </p:spPr>
-        <p:txBody>
-          <a:bodyPr wrap="square" lIns="0" tIns="0" rIns="0" bIns="0">
-            <a:spAutoFit/>
-          </a:bodyPr>
-          <a:lstStyle/>
-          <a:p>
-            <a:pPr>
-              <a:lnSpc>
-                <a:spcPct val="118000"/>
-              </a:lnSpc>
-              <a:spcBef>
-                <a:spcPts val="0"/>
-              </a:spcBef>
-              <a:spcAft>
-                <a:spcPts val="0"/>
-              </a:spcAft>
-              <a:defRPr sz="2000" b="1">
-                <a:solidFill>
-                  <a:srgbClr val="65439A"/>
-                </a:solidFill>
-                <a:latin typeface="Lato"/>
-              </a:defRPr>
-            </a:pPr>
-            <a:r>
-              <a:rPr>
-                <a:ea typeface="Microsoft JhengHei"/>
-              </a:rPr>
-              <a:t>Agent proposals</a:t>
-            </a:r>
-          </a:p>
-        </p:txBody>
-      </p:sp>
-      <p:sp>
-        <p:nvSpPr>
-          <p:cNvPr id="12" name="TextBox 11"/>
-          <p:cNvSpPr txBox="1"/>
-          <p:nvPr/>
-        </p:nvSpPr>
-        <p:spPr>
-          <a:xfrm>
-            <a:off x="9248775" y="3657600"/>
-            <a:ext cx="2266950" cy="723900"/>
-          </a:xfrm>
-          <a:prstGeom prst="rect">
-            <a:avLst/>
-          </a:prstGeom>
-          <a:noFill/>
-        </p:spPr>
-        <p:txBody>
-          <a:bodyPr wrap="square" lIns="0" tIns="0" rIns="0" bIns="0">
-            <a:spAutoFit/>
-          </a:bodyPr>
-          <a:lstStyle/>
-          <a:p>
-            <a:pPr>
-              <a:lnSpc>
-                <a:spcPct val="118000"/>
-              </a:lnSpc>
-              <a:spcBef>
-                <a:spcPts val="0"/>
-              </a:spcBef>
-              <a:spcAft>
-                <a:spcPts val="0"/>
-              </a:spcAft>
-              <a:defRPr sz="1900" b="0">
-                <a:solidFill>
-                  <a:srgbClr val="24384A"/>
-                </a:solidFill>
-                <a:latin typeface="Lato"/>
-              </a:defRPr>
-            </a:pPr>
-            <a:r>
-              <a:rPr>
-                <a:ea typeface="Microsoft JhengHei"/>
-              </a:rPr>
-              <a:t>Propose explanations</a:t>
-            </a:r>
-          </a:p>
-          <a:p>
-            <a:pPr>
-              <a:lnSpc>
-                <a:spcPct val="118000"/>
-              </a:lnSpc>
-              <a:spcBef>
-                <a:spcPts val="0"/>
-              </a:spcBef>
-              <a:spcAft>
-                <a:spcPts val="0"/>
-              </a:spcAft>
-              <a:defRPr sz="1900" b="0">
-                <a:solidFill>
-                  <a:srgbClr val="24384A"/>
-                </a:solidFill>
-                <a:latin typeface="Lato"/>
-              </a:defRPr>
-            </a:pPr>
-            <a:r>
-              <a:rPr>
-                <a:ea typeface="Microsoft JhengHei"/>
-              </a:rPr>
-              <a:t>and alternatives.</a:t>
-            </a:r>
-          </a:p>
-        </p:txBody>
-      </p:sp>
-      <p:sp>
-        <p:nvSpPr>
-          <p:cNvPr id="13" name="TextBox 12"/>
-          <p:cNvSpPr txBox="1"/>
-          <p:nvPr/>
-        </p:nvSpPr>
-        <p:spPr>
-          <a:xfrm>
-            <a:off x="723900" y="5143500"/>
-            <a:ext cx="2762250" cy="428625"/>
-          </a:xfrm>
-          <a:prstGeom prst="rect">
-            <a:avLst/>
-          </a:prstGeom>
-          <a:noFill/>
-        </p:spPr>
-        <p:txBody>
-          <a:bodyPr wrap="square" lIns="0" tIns="0" rIns="0" bIns="0">
-            <a:spAutoFit/>
-          </a:bodyPr>
-          <a:lstStyle/>
-          <a:p>
-            <a:pPr>
-              <a:lnSpc>
-                <a:spcPct val="118000"/>
-              </a:lnSpc>
-              <a:spcBef>
-                <a:spcPts val="0"/>
-              </a:spcBef>
-              <a:spcAft>
-                <a:spcPts val="0"/>
-              </a:spcAft>
-              <a:defRPr sz="2300" b="1">
-                <a:solidFill>
-                  <a:srgbClr val="146C68"/>
-                </a:solidFill>
-                <a:latin typeface="Lato"/>
-              </a:defRPr>
-            </a:pPr>
-            <a:r>
-              <a:rPr>
-                <a:ea typeface="Microsoft JhengHei"/>
-              </a:rPr>
-              <a:t>Provenance</a:t>
-            </a:r>
-          </a:p>
-        </p:txBody>
-      </p:sp>
-      <p:sp>
-        <p:nvSpPr>
-          <p:cNvPr id="14" name="TextBox 13"/>
-          <p:cNvSpPr txBox="1"/>
-          <p:nvPr/>
-        </p:nvSpPr>
-        <p:spPr>
-          <a:xfrm>
-            <a:off x="3810000" y="5143500"/>
-            <a:ext cx="7524749" cy="457200"/>
-          </a:xfrm>
-          <a:prstGeom prst="rect">
-            <a:avLst/>
-          </a:prstGeom>
-          <a:noFill/>
-        </p:spPr>
-        <p:txBody>
-          <a:bodyPr wrap="square" lIns="0" tIns="0" rIns="0" bIns="0">
-            <a:spAutoFit/>
-          </a:bodyPr>
-          <a:lstStyle/>
-          <a:p>
-            <a:pPr>
-              <a:lnSpc>
-                <a:spcPct val="118000"/>
-              </a:lnSpc>
-              <a:spcBef>
-                <a:spcPts val="0"/>
-              </a:spcBef>
-              <a:spcAft>
-                <a:spcPts val="0"/>
-              </a:spcAft>
-              <a:defRPr sz="2300" b="0">
-                <a:solidFill>
-                  <a:srgbClr val="24384A"/>
-                </a:solidFill>
-                <a:latin typeface="Lato"/>
-              </a:defRPr>
-            </a:pPr>
-            <a:r>
-              <a:rPr>
-                <a:ea typeface="Microsoft JhengHei"/>
-              </a:rPr>
-              <a:t>Keep sources and checks attached to proposals.</a:t>
-            </a:r>
-          </a:p>
-        </p:txBody>
-      </p:sp>
-      <p:sp>
-        <p:nvSpPr>
-          <p:cNvPr id="15" name="TextBox 14"/>
-          <p:cNvSpPr txBox="1"/>
-          <p:nvPr/>
-        </p:nvSpPr>
-        <p:spPr>
-          <a:xfrm>
-            <a:off x="723900" y="5610225"/>
-            <a:ext cx="2952750" cy="381000"/>
-          </a:xfrm>
-          <a:prstGeom prst="rect">
-            <a:avLst/>
-          </a:prstGeom>
-          <a:noFill/>
-        </p:spPr>
-        <p:txBody>
-          <a:bodyPr wrap="square" lIns="0" tIns="0" rIns="0" bIns="0">
-            <a:spAutoFit/>
-          </a:bodyPr>
-          <a:lstStyle/>
-          <a:p>
-            <a:pPr>
-              <a:lnSpc>
-                <a:spcPct val="118000"/>
-              </a:lnSpc>
-              <a:spcBef>
-                <a:spcPts val="0"/>
-              </a:spcBef>
-              <a:spcAft>
-                <a:spcPts val="0"/>
-              </a:spcAft>
-              <a:defRPr sz="2100" b="1">
-                <a:solidFill>
-                  <a:srgbClr val="146C68"/>
-                </a:solidFill>
-                <a:latin typeface="Lato"/>
-              </a:defRPr>
-            </a:pPr>
-            <a:r>
-              <a:rPr>
-                <a:ea typeface="Microsoft JhengHei"/>
-              </a:rPr>
-              <a:t>Researcher decisions</a:t>
-            </a:r>
-          </a:p>
-        </p:txBody>
-      </p:sp>
-      <p:sp>
-        <p:nvSpPr>
-          <p:cNvPr id="16" name="TextBox 15"/>
-          <p:cNvSpPr txBox="1"/>
-          <p:nvPr/>
-        </p:nvSpPr>
-        <p:spPr>
-          <a:xfrm>
-            <a:off x="3810000" y="5610225"/>
-            <a:ext cx="7524749" cy="400050"/>
-          </a:xfrm>
-          <a:prstGeom prst="rect">
-            <a:avLst/>
-          </a:prstGeom>
-          <a:noFill/>
-        </p:spPr>
-        <p:txBody>
-          <a:bodyPr wrap="square" lIns="0" tIns="0" rIns="0" bIns="0">
-            <a:spAutoFit/>
-          </a:bodyPr>
-          <a:lstStyle/>
-          <a:p>
-            <a:pPr>
-              <a:lnSpc>
-                <a:spcPct val="118000"/>
-              </a:lnSpc>
-              <a:spcBef>
-                <a:spcPts val="0"/>
-              </a:spcBef>
-              <a:spcAft>
-                <a:spcPts val="0"/>
-              </a:spcAft>
-              <a:defRPr sz="2200" b="0">
-                <a:solidFill>
-                  <a:srgbClr val="24384A"/>
-                </a:solidFill>
-                <a:latin typeface="Lato"/>
-              </a:defRPr>
-            </a:pPr>
-            <a:r>
-              <a:rPr>
-                <a:ea typeface="Microsoft JhengHei"/>
-              </a:rPr>
-              <a:t>Inspect the evidence; accept or reject proposals.</a:t>
+              <a:t>The researcher decides what to accept.</a:t>
             </a:r>
           </a:p>
         </p:txBody>
@@ -22314,7 +22075,9 @@
   <we:alternateReferences>
     <we:reference id="wa200010001" version="1.0.0.1" store="wa200010001" storeType="OMEX"/>
   </we:alternateReferences>
-  <we:properties/>
+  <we:properties>
+    <we:property name="claude.fileId" value="&quot;ef803f54-82cd-4662-a865-ae21f3d93cba&quot;"/>
+  </we:properties>
   <we:bindings/>
   <we:snapshot xmlns:r="http://schemas.openxmlformats.org/officeDocument/2006/relationships"/>
 </we:webextension>

--- a/docs/presentation/cohort-pnc-2026-main.pptx
+++ b/docs/presentation/cohort-pnc-2026-main.pptx
@@ -22,10 +22,10 @@
     <p:sldId id="267" r:id="rId13"/>
     <p:sldId id="268" r:id="rId14"/>
     <p:sldId id="269" r:id="rId15"/>
-    <p:sldId id="270" r:id="rId16"/>
     <p:sldId id="271" r:id="rId17"/>
     <p:sldId id="272" r:id="rId18"/>
     <p:sldId id="273" r:id="rId19"/>
+    <p:sldId id="270" r:id="rId16"/>
     <p:sldId id="274" r:id="rId20"/>
     <p:sldId id="275" r:id="rId21"/>
   </p:sldIdLst>
@@ -2168,7 +2168,7 @@
           </a:p>
           <a:p>
             <a:r>
-              <a:t>APPLICATION: Corpus → Lotus related passages and shared wording (3 min). Vocabulary comparison → T0603, exclude T1694 (3 min). Inquiry → saved action; Findings → one proposal; Graph → its sources and checks (4 min). Then return to the final slide (20). Do not accept a weak scholarly proposal to demonstrate a button.</a:t>
+              <a:t>APPLICATION: Corpus → Lotus related passages and shared wording (3 min). Vocabulary comparison → T0603, exclude T1694 (3 min). Inquiry → saved action; Graph → sources and checks; Findings → one proposal (4 min). Then return to the final slide (20). Do not accept a weak scholarly proposal to demonstrate a button.</a:t>
             </a:r>
           </a:p>
         </p:txBody>
@@ -11499,7 +11499,7 @@
               <a:rPr>
                 <a:ea typeface="Microsoft JhengHei"/>
               </a:rPr>
-              <a:t>15</a:t>
+              <a:t>18</a:t>
             </a:r>
           </a:p>
         </p:txBody>
@@ -12405,7 +12405,7 @@
               <a:rPr>
                 <a:ea typeface="Microsoft JhengHei"/>
               </a:rPr>
-              <a:t>16</a:t>
+              <a:t>15</a:t>
             </a:r>
           </a:p>
         </p:txBody>
@@ -14233,7 +14233,7 @@
               <a:rPr>
                 <a:ea typeface="Microsoft JhengHei"/>
               </a:rPr>
-              <a:t>17</a:t>
+              <a:t>16</a:t>
             </a:r>
           </a:p>
         </p:txBody>
@@ -14832,7 +14832,7 @@
               <a:rPr>
                 <a:ea typeface="Microsoft JhengHei"/>
               </a:rPr>
-              <a:t>18</a:t>
+              <a:t>17</a:t>
             </a:r>
           </a:p>
         </p:txBody>
@@ -15385,7 +15385,7 @@
               <a:rPr>
                 <a:ea typeface="Microsoft JhengHei"/>
               </a:rPr>
-              <a:t>Saved actions, proposal, citations and checks</a:t>
+              <a:t>Inquiry → Graph → Findings</a:t>
             </a:r>
           </a:p>
         </p:txBody>
@@ -16894,7 +16894,7 @@
               <a:rPr lang="en-US" dirty="0">
                 <a:ea typeface="Microsoft JhengHei"/>
               </a:rPr>
-              <a:t>Cohort’s purpose</a:t>
+              <a:t>Cohort’s goal</a:t>
             </a:r>
             <a:endParaRPr dirty="0">
               <a:ea typeface="Microsoft JhengHei"/>
@@ -18326,7 +18326,7 @@
         </p:nvSpPr>
         <p:spPr>
           <a:xfrm>
-            <a:off x="685800" y="4514850"/>
+            <a:off x="685800" y="5343525"/>
             <a:ext cx="2971800" cy="561975"/>
           </a:xfrm>
           <a:prstGeom prst="rect">
@@ -18374,7 +18374,7 @@
         </p:nvSpPr>
         <p:spPr>
           <a:xfrm>
-            <a:off x="4095750" y="4514850"/>
+            <a:off x="4095750" y="5343525"/>
             <a:ext cx="7505700" cy="609600"/>
           </a:xfrm>
           <a:prstGeom prst="rect">
@@ -18406,7 +18406,7 @@
               </a:defRPr>
             </a:pPr>
             <a:r>
-              <a:rPr>
+              <a:rPr dirty="0">
                 <a:ea typeface="Microsoft JhengHei"/>
               </a:rPr>
               <a:t>Read the agents’ proposals, citations and checks.</a:t>
@@ -18422,7 +18422,7 @@
         </p:nvSpPr>
         <p:spPr>
           <a:xfrm>
-            <a:off x="685800" y="5343525"/>
+            <a:off x="685800" y="4514850"/>
             <a:ext cx="2971800" cy="561975"/>
           </a:xfrm>
           <a:prstGeom prst="rect">
@@ -18470,7 +18470,7 @@
         </p:nvSpPr>
         <p:spPr>
           <a:xfrm>
-            <a:off x="4095750" y="5343525"/>
+            <a:off x="4095750" y="4514850"/>
             <a:ext cx="7505700" cy="609600"/>
           </a:xfrm>
           <a:prstGeom prst="rect">

--- a/docs/presentation/cohort-pnc-2026-main.pptx
+++ b/docs/presentation/cohort-pnc-2026-main.pptx
@@ -22,10 +22,10 @@
     <p:sldId id="267" r:id="rId13"/>
     <p:sldId id="268" r:id="rId14"/>
     <p:sldId id="269" r:id="rId15"/>
-    <p:sldId id="271" r:id="rId17"/>
-    <p:sldId id="272" r:id="rId18"/>
-    <p:sldId id="273" r:id="rId19"/>
-    <p:sldId id="270" r:id="rId16"/>
+    <p:sldId id="271" r:id="rId16"/>
+    <p:sldId id="272" r:id="rId17"/>
+    <p:sldId id="273" r:id="rId18"/>
+    <p:sldId id="270" r:id="rId19"/>
     <p:sldId id="274" r:id="rId20"/>
     <p:sldId id="275" r:id="rId21"/>
   </p:sldIdLst>
@@ -1427,7 +1427,7 @@
           <a:lstStyle/>
           <a:p>
             <a:r>
-              <a:t>SAY: Read the agents’ proposals, citations and checks.</a:t>
+              <a:t>SAY: Follow links between sources, proposals and decisions.</a:t>
             </a:r>
           </a:p>
           <a:p>
@@ -1435,7 +1435,7 @@
           </a:p>
           <a:p>
             <a:r>
-              <a:t>SAY: Findings is a readable view of saved proposals. A conjecture adds an explanation, limits and a proposed test; it is not a container made of claims.</a:t>
+              <a:t>SAY: The graph is already populated by saved work. It is not a display of every corpus text. Selecting a node shows its author, model and records.</a:t>
             </a:r>
           </a:p>
           <a:p>
@@ -1448,8 +1448,82 @@
           </a:p>
           <a:p>
             <a:r>
-              <a:t>These are saved proposals, not established conclusions. The conjecture review found weaknesses; do not imply attested means correct. No proposal was accepted for the screenshot. </a:t>
-            </a:r>
+              <a:t>Follow records and their relationships. Source-passage labels and query phrases are hidden in this screenshot; graph records and topology are otherwise unchanged. </a:t>
+            </a:r>
+          </a:p>
+          <a:p>
+            <a:endParaRPr/>
+          </a:p>
+          <a:p>
+            <a:r>
+              <a:t>### Why a query can point straight to a proposal</a:t>
+            </a:r>
+          </a:p>
+          <a:p>
+            <a:endParaRPr/>
+          </a:p>
+          <a:p>
+            <a:r>
+              <a:t>There is no required Query → Witness → Passage → Hypothesis chain. The graph records different relationships:</a:t>
+            </a:r>
+          </a:p>
+          <a:p>
+            <a:endParaRPr/>
+          </a:p>
+          <a:p>
+            <a:r>
+              <a:t>- Witness → Passage, labelled **contains**: where the passage comes from. Internally, this is stored in the reverse direction as `part_of`.</a:t>
+            </a:r>
+          </a:p>
+          <a:p>
+            <a:r>
+              <a:t>- Passage → Claim or conjecture, labelled **attests**: the passage is cited as support.</a:t>
+            </a:r>
+          </a:p>
+          <a:p>
+            <a:r>
+              <a:t>- Query → Claim or conjecture, labelled **searched for**: a search ran while preparing that proposal.</a:t>
+            </a:r>
+          </a:p>
+          <a:p>
+            <a:r>
+              <a:t>- Query → Conjecture, labelled **tests**: the author recorded a query and an expected result for a later test. This link alone does not mean the test ran or passed.</a:t>
+            </a:r>
+          </a:p>
+          <a:p>
+            <a:r>
+              <a:t>- Claim or conjecture → Research question, labelled **addresses**: which question the proposal concerns.</a:t>
+            </a:r>
+          </a:p>
+          <a:p>
+            <a:endParaRPr/>
+          </a:p>
+          <a:p>
+            <a:r>
+              <a:t>For a claim, the proposal tool runs a grounding search and saves its phrase and hit count. It refuses the claim if there are no hits. It does not automatically save each hit as a witness or passage, or link the query to those hits. Citation gathering is a separate operation. A hit therefore shows that wording was found; it does not establish that the proposed interpretation follows from it.</a:t>
+            </a:r>
+          </a:p>
+          <a:p>
+            <a:endParaRPr/>
+          </a:p>
+          <a:p>
+            <a:r>
+              <a:t>For a conjecture, the tool records an earlier search under “prior art” and a separate proposed test. Here “prior art” means a corpus search made before proposing the conjecture, not a search of published scholarship.</a:t>
+            </a:r>
+          </a:p>
+          <a:p>
+            <a:endParaRPr/>
+          </a:p>
+          <a:p>
+            <a:r>
+              <a:t>The UI uses “hypothesis” as a heading for claims and conjectures. A conjecture is not a container assembled from claim nodes. Read its own citations, explanation and proposed test.</a:t>
+            </a:r>
+          </a:p>
+          <a:p>
+            <a:endParaRPr/>
+          </a:p>
+          <a:p>
+            <a:endParaRPr/>
           </a:p>
           <a:p>
             <a:endParaRPr/>
@@ -1526,7 +1600,7 @@
           <a:lstStyle/>
           <a:p>
             <a:r>
-              <a:t>SAY: Follow links between sources, proposals and decisions.</a:t>
+              <a:t>SAY: Supporting passages and investigation records are separate links. A grounding search saves a query and hit count but does not automatically make nodes for every result. A tests arrow records a planned test; check whether it ran.</a:t>
             </a:r>
           </a:p>
           <a:p>
@@ -1534,7 +1608,12 @@
           </a:p>
           <a:p>
             <a:r>
-              <a:t>SAY: The graph is already populated by saved work. It is not a display of every corpus text. Selecting a node shows its author, model and records.</a:t>
+              <a:t>BACKGROUND</a:t>
+            </a:r>
+          </a:p>
+          <a:p>
+            <a:r>
+              <a:t>### Why a query can point straight to a proposal</a:t>
             </a:r>
           </a:p>
           <a:p>
@@ -1542,12 +1621,7 @@
           </a:p>
           <a:p>
             <a:r>
-              <a:t>BACKGROUND</a:t>
-            </a:r>
-          </a:p>
-          <a:p>
-            <a:r>
-              <a:t>Follow records and their relationships. Source-passage labels and query phrases are hidden in this screenshot; graph records and topology are otherwise unchanged. </a:t>
+              <a:t>There is no required Query → Witness → Passage → Hypothesis chain. The graph records different relationships:</a:t>
             </a:r>
           </a:p>
           <a:p>
@@ -1555,7 +1629,27 @@
           </a:p>
           <a:p>
             <a:r>
-              <a:t>### Why a query can point straight to a proposal</a:t>
+              <a:t>- Witness → Passage, labelled **contains**: where the passage comes from. Internally, this is stored in the reverse direction as `part_of`.</a:t>
+            </a:r>
+          </a:p>
+          <a:p>
+            <a:r>
+              <a:t>- Passage → Claim or conjecture, labelled **attests**: the passage is cited as support.</a:t>
+            </a:r>
+          </a:p>
+          <a:p>
+            <a:r>
+              <a:t>- Query → Claim or conjecture, labelled **searched for**: a search ran while preparing that proposal.</a:t>
+            </a:r>
+          </a:p>
+          <a:p>
+            <a:r>
+              <a:t>- Query → Conjecture, labelled **tests**: the author recorded a query and an expected result for a later test. This link alone does not mean the test ran or passed.</a:t>
+            </a:r>
+          </a:p>
+          <a:p>
+            <a:r>
+              <a:t>- Claim or conjecture → Research question, labelled **addresses**: which question the proposal concerns.</a:t>
             </a:r>
           </a:p>
           <a:p>
@@ -1563,7 +1657,7 @@
           </a:p>
           <a:p>
             <a:r>
-              <a:t>There is no required Query → Witness → Passage → Hypothesis chain. The graph records different relationships:</a:t>
+              <a:t>For a claim, the proposal tool runs a grounding search and saves its phrase and hit count. It refuses the claim if there are no hits. It does not automatically save each hit as a witness or passage, or link the query to those hits. Citation gathering is a separate operation. A hit therefore shows that wording was found; it does not establish that the proposed interpretation follows from it.</a:t>
             </a:r>
           </a:p>
           <a:p>
@@ -1571,27 +1665,7 @@
           </a:p>
           <a:p>
             <a:r>
-              <a:t>- Witness → Passage, labelled **contains**: where the passage comes from. Internally, this is stored in the reverse direction as `part_of`.</a:t>
-            </a:r>
-          </a:p>
-          <a:p>
-            <a:r>
-              <a:t>- Passage → Claim or conjecture, labelled **attests**: the passage is cited as support.</a:t>
-            </a:r>
-          </a:p>
-          <a:p>
-            <a:r>
-              <a:t>- Query → Claim or conjecture, labelled **searched for**: a search ran while preparing that proposal.</a:t>
-            </a:r>
-          </a:p>
-          <a:p>
-            <a:r>
-              <a:t>- Query → Conjecture, labelled **tests**: the author recorded a query and an expected result for a later test. This link alone does not mean the test ran or passed.</a:t>
-            </a:r>
-          </a:p>
-          <a:p>
-            <a:r>
-              <a:t>- Claim or conjecture → Research question, labelled **addresses**: which question the proposal concerns.</a:t>
+              <a:t>For a conjecture, the tool records an earlier search under “prior art” and a separate proposed test. Here “prior art” means a corpus search made before proposing the conjecture, not a search of published scholarship.</a:t>
             </a:r>
           </a:p>
           <a:p>
@@ -1599,37 +1673,124 @@
           </a:p>
           <a:p>
             <a:r>
-              <a:t>For a claim, the proposal tool runs a grounding search and saves its phrase and hit count. It refuses the claim if there are no hits. It does not automatically save each hit as a witness or passage, or link the query to those hits. Citation gathering is a separate operation. A hit therefore shows that wording was found; it does not establish that the proposed interpretation follows from it.</a:t>
+              <a:t>The UI uses “hypothesis” as a heading for claims and conjectures. A conjecture is not a container assembled from claim nodes. Read its own citations, explanation and proposed test.</a:t>
             </a:r>
           </a:p>
           <a:p>
             <a:endParaRPr/>
           </a:p>
           <a:p>
-            <a:r>
-              <a:t>For a conjecture, the tool records an earlier search under “prior art” and a separate proposed test. Here “prior art” means a corpus search made before proposing the conjecture, not a search of published scholarship.</a:t>
-            </a:r>
-          </a:p>
-          <a:p>
             <a:endParaRPr/>
           </a:p>
           <a:p>
-            <a:r>
-              <a:t>The UI uses “hypothesis” as a heading for claims and conjectures. A conjecture is not a container assembled from claim nodes. Read its own citations, explanation and proposed test.</a:t>
-            </a:r>
-          </a:p>
-          <a:p>
             <a:endParaRPr/>
           </a:p>
           <a:p>
+            <a:r>
+              <a:t>The arrows here follow schema direction: passage part_of source; passage attests proposal; proposal addresses question. Shapes are simplified but match node types. Use one selected record rather than narrating the entire graph.</a:t>
+            </a:r>
+          </a:p>
+          <a:p>
             <a:endParaRPr/>
           </a:p>
           <a:p>
+            <a:r>
+              <a:t>Diagram: Graph relationships](diagrams/graph.svg)</a:t>
+            </a:r>
+          </a:p>
+          <a:p>
             <a:endParaRPr/>
           </a:p>
           <a:p>
             <a:r>
-              <a:t>VISUAL: The screenshot orients the audience; the diagram explains the operation. Read the diagram first. Its arrows show UI workflow, not evidence-graph edge types. In Corpus the two top boxes are alternative search modes; in Vocabulary comparison and Inquiry they are inputs used together.</a:t>
+              <a:t>Use the question checkboxes to show the investigation you are discussing. Hiding a question changes the view; it does not delete its records. Several proposals can address one question. An older session can also contain earlier questions.</a:t>
+            </a:r>
+          </a:p>
+          <a:p>
+            <a:endParaRPr/>
+          </a:p>
+          <a:p>
+            <a:r>
+              <a:t>Select a single node. Its inspector shows the record’s type, status, worker, model, sources and relationships. New records can show the worker’s action reason. The historical model name describes the recorded call, not a later profile setting.</a:t>
+            </a:r>
+          </a:p>
+          <a:p>
+            <a:endParaRPr/>
+          </a:p>
+          <a:p>
+            <a:r>
+              <a:t>| Shape or link | Meaning |</a:t>
+            </a:r>
+          </a:p>
+          <a:p>
+            <a:r>
+              <a:t>|---|---|</a:t>
+            </a:r>
+          </a:p>
+          <a:p>
+            <a:r>
+              <a:t>| Star | A research question |</a:t>
+            </a:r>
+          </a:p>
+          <a:p>
+            <a:r>
+              <a:t>| Diamond | A claim or conjecture |</a:t>
+            </a:r>
+          </a:p>
+          <a:p>
+            <a:r>
+              <a:t>| Rectangle | A located passage |</a:t>
+            </a:r>
+          </a:p>
+          <a:p>
+            <a:r>
+              <a:t>| Ellipse | A source record, called a witness in the schema |</a:t>
+            </a:r>
+          </a:p>
+          <a:p>
+            <a:r>
+              <a:t>| Dot | A search query |</a:t>
+            </a:r>
+          </a:p>
+          <a:p>
+            <a:r>
+              <a:t>| `part_of` | A passage belongs to a source record |</a:t>
+            </a:r>
+          </a:p>
+          <a:p>
+            <a:r>
+              <a:t>| `attests` | A passage is offered as support for a proposal |</a:t>
+            </a:r>
+          </a:p>
+          <a:p>
+            <a:r>
+              <a:t>| `addresses` | A proposal addresses a question |</a:t>
+            </a:r>
+          </a:p>
+          <a:p>
+            <a:r>
+              <a:t>| `searched_for` | A recorded search used in proposing a claim or conjecture |</a:t>
+            </a:r>
+          </a:p>
+          <a:p>
+            <a:r>
+              <a:t>| `tests` | A query is offered as a test of a conjecture |</a:t>
+            </a:r>
+          </a:p>
+          <a:p>
+            <a:endParaRPr/>
+          </a:p>
+          <a:p>
+            <a:r>
+              <a:t>A search pointing to a claim records retrieval activity; it does not itself prove the claim. The **Show exploration** overlay adds works inspected in recorded tool activity, including some that were never attached as evidence. It is not a map of every source available in the corpus or every thought the model had.</a:t>
+            </a:r>
+          </a:p>
+          <a:p>
+            <a:endParaRPr/>
+          </a:p>
+          <a:p>
+            <a:r>
+              <a:t>**Verified with an exact span** means a recorded check found the quoted passage at its source location. Repeated verification attempts remain in the history but are not presented as multiple independent witnesses.</a:t>
             </a:r>
           </a:p>
         </p:txBody>
@@ -1699,7 +1860,7 @@
           <a:lstStyle/>
           <a:p>
             <a:r>
-              <a:t>SAY: Supporting passages and investigation records are separate links. A grounding search saves a query and hit count but does not automatically make nodes for every result. A tests arrow records a planned test; check whether it ran.</a:t>
+              <a:t>SAY: The graph helps us trace proposals back to sources, inspect recorded relationships between sources, and retain the history of checks and decisions. A possible next step is edge prediction: suggesting a relationship worth investigating. We have not implemented or evaluated that capability.</a:t>
             </a:r>
           </a:p>
           <a:p>
@@ -1707,12 +1868,57 @@
           </a:p>
           <a:p>
             <a:r>
+              <a:t>TERMINOLOGY: Cohort has typed nodes, typed edges and record metadata. These are familiar graph-data techniques. The project deliberately calls this an evidence graph because translator and historical assertions remain contested. This does not mean that all knowledge graphs must contain only certain facts; it explains the terminology and epistemic contract of this application. See docs/design.md principles 1–2 and section 10.</a:t>
+            </a:r>
+          </a:p>
+          <a:p>
+            <a:endParaRPr/>
+          </a:p>
+          <a:p>
+            <a:r>
+              <a:t>DEPENDENCIES: Recorded quotes, parallel_of and descends_from relationships help expose related material. A graph cannot display a dependency that nobody has recorded, and an independence flag is not proof that sources are historically independent. Repeated checks are not independent witnesses.</a:t>
+            </a:r>
+          </a:p>
+          <a:p>
+            <a:endParaRPr/>
+          </a:p>
+          <a:p>
+            <a:r>
+              <a:t>EDGE PREDICTION: In graph research, link prediction scores possible missing relationships between nodes. A future Cohort feature could propose a candidate quotation or textual parallel, retrieve the relevant passages and send it for review. A predicted link would be a proposal, not historical evidence by itself. Current semantic-neighbour retrieval compares passage vectors; it is not a trained graph link-prediction model. The source-grounded edge-proposal workflow would also need implementation and evaluation.</a:t>
+            </a:r>
+          </a:p>
+          <a:p>
+            <a:endParaRPr/>
+          </a:p>
+          <a:p>
+            <a:r>
+              <a:t>BACKGROUND READING: Hogan et al., Knowledge Graphs (2021), https://arxiv.org/abs/2003.02320; Daza et al., Inductive Entity Representations from Text via Link Prediction (2021), https://arxiv.org/abs/2010.03496.</a:t>
+            </a:r>
+          </a:p>
+          <a:p>
+            <a:endParaRPr/>
+          </a:p>
+          <a:p>
+            <a:r>
+              <a:t>EXISTING CHECKS AND DECISIONS</a:t>
+            </a:r>
+          </a:p>
+          <a:p>
+            <a:r>
+              <a:t>SAY: Finding a quotation at its source is one check. Whether it supports the interpretation requires reading. Accepting a passage does not accept every connected proposal.</a:t>
+            </a:r>
+          </a:p>
+          <a:p>
+            <a:endParaRPr/>
+          </a:p>
+          <a:p>
+            <a:r>
               <a:t>BACKGROUND</a:t>
             </a:r>
           </a:p>
           <a:p>
             <a:r>
-              <a:t>### Why a query can point straight to a proposal</a:t>
+              <a:t>Do not click Accept just to create an ending. Show available controls and explain their actual eligibility rules. The reviewer cannot be treated as a reliable semantic validator; explain the current limitation if asked.</a:t>
             </a:r>
           </a:p>
           <a:p>
@@ -1720,7 +1926,32 @@
           </a:p>
           <a:p>
             <a:r>
-              <a:t>There is no required Query → Witness → Passage → Hypothesis chain. The graph records different relationships:</a:t>
+              <a:t>| Status | Meaning |</a:t>
+            </a:r>
+          </a:p>
+          <a:p>
+            <a:r>
+              <a:t>|---|---|</a:t>
+            </a:r>
+          </a:p>
+          <a:p>
+            <a:r>
+              <a:t>| Proposed | Submitted for consideration |</a:t>
+            </a:r>
+          </a:p>
+          <a:p>
+            <a:r>
+              <a:t>| Attested | The required promotion checks for that record type passed |</a:t>
+            </a:r>
+          </a:p>
+          <a:p>
+            <a:r>
+              <a:t>| Accepted | The researcher approved this record under Cohort’s citation rules |</a:t>
+            </a:r>
+          </a:p>
+          <a:p>
+            <a:r>
+              <a:t>| Rejected | The researcher rejected this record with a reason |</a:t>
             </a:r>
           </a:p>
           <a:p>
@@ -1728,27 +1959,7 @@
           </a:p>
           <a:p>
             <a:r>
-              <a:t>- Witness → Passage, labelled **contains**: where the passage comes from. Internally, this is stored in the reverse direction as `part_of`.</a:t>
-            </a:r>
-          </a:p>
-          <a:p>
-            <a:r>
-              <a:t>- Passage → Claim or conjecture, labelled **attests**: the passage is cited as support.</a:t>
-            </a:r>
-          </a:p>
-          <a:p>
-            <a:r>
-              <a:t>- Query → Claim or conjecture, labelled **searched for**: a search ran while preparing that proposal.</a:t>
-            </a:r>
-          </a:p>
-          <a:p>
-            <a:r>
-              <a:t>- Query → Conjecture, labelled **tests**: the author recorded a query and an expected result for a later test. This link alone does not mean the test ran or passed.</a:t>
-            </a:r>
-          </a:p>
-          <a:p>
-            <a:r>
-              <a:t>- Claim or conjecture → Research question, labelled **addresses**: which question the proposal concerns.</a:t>
+              <a:t>A **contradiction** relationship is distinct from a researcher’s rejection. Colour alone is insufficient: some imported experiment records also have calculated assessment colours. Read the selected record’s status.</a:t>
             </a:r>
           </a:p>
           <a:p>
@@ -1756,7 +1967,7 @@
           </a:p>
           <a:p>
             <a:r>
-              <a:t>For a claim, the proposal tool runs a grounding search and saves its phrase and hit count. It refuses the claim if there are no hits. It does not automatically save each hit as a witness or passage, or link the query to those hits. Citation gathering is a separate operation. A hit therefore shows that wording was found; it does not establish that the proposed interpretation follows from it.</a:t>
+              <a:t>An eligible attested record can be accepted. Accepting a passage changes that passage’s status; it does not accept every connected claim. Rejecting a record preserves it and the reason rather than deleting a source text. Reopening a rejected record also requires a reason.</a:t>
             </a:r>
           </a:p>
           <a:p>
@@ -1764,7 +1975,7 @@
           </a:p>
           <a:p>
             <a:r>
-              <a:t>For a conjecture, the tool records an earlier search under “prior art” and a separate proposed test. Here “prior art” means a corpus search made before proposing the conjecture, not a search of published scholarship.</a:t>
+              <a:t>The reviewer is fallible. In the current implementation, its tool re-fetches cited passages and checks their spans, but the reviewer does not have a complete evidence-reading workflow before choosing its semantic verdict. A reviewer’s statement that it checked an interpretation or reproduced a calculation is not enough to establish that it did so. The researcher should inspect the passages and numerical output directly. This limitation remains open; do not say it has been repaired by changing model names.</a:t>
             </a:r>
           </a:p>
           <a:p>
@@ -1772,124 +1983,15 @@
           </a:p>
           <a:p>
             <a:r>
-              <a:t>The UI uses “hypothesis” as a heading for claims and conjectures. A conjecture is not a container assembled from claim nodes. Read its own citations, explanation and proposed test.</a:t>
+              <a:t>The Vocabulary comparison tab does not currently offer a grounded `quotes` or `parallel_of` edge proposal for later acceptance. Accepting a graph record also does not change Vocabulary comparison profiles. The exclusion above is a separate researcher-controlled calculation.</a:t>
             </a:r>
           </a:p>
           <a:p>
             <a:endParaRPr/>
           </a:p>
           <a:p>
-            <a:endParaRPr/>
-          </a:p>
-          <a:p>
-            <a:endParaRPr/>
-          </a:p>
-          <a:p>
-            <a:r>
-              <a:t>The arrows here follow schema direction: passage part_of source; passage attests proposal; proposal addresses question. Shapes are simplified but match node types. Use one selected record rather than narrating the entire graph.</a:t>
-            </a:r>
-          </a:p>
-          <a:p>
-            <a:endParaRPr/>
-          </a:p>
-          <a:p>
-            <a:r>
-              <a:t>Diagram: Graph relationships](diagrams/graph.svg)</a:t>
-            </a:r>
-          </a:p>
-          <a:p>
-            <a:endParaRPr/>
-          </a:p>
-          <a:p>
-            <a:r>
-              <a:t>Use the question checkboxes to show the investigation you are discussing. Hiding a question changes the view; it does not delete its records. Several proposals can address one question. An older session can also contain earlier questions.</a:t>
-            </a:r>
-          </a:p>
-          <a:p>
-            <a:endParaRPr/>
-          </a:p>
-          <a:p>
-            <a:r>
-              <a:t>Select a single node. Its inspector shows the record’s type, status, worker, model, sources and relationships. New records can show the worker’s action reason. The historical model name describes the recorded call, not a later profile setting.</a:t>
-            </a:r>
-          </a:p>
-          <a:p>
-            <a:endParaRPr/>
-          </a:p>
-          <a:p>
-            <a:r>
-              <a:t>| Shape or link | Meaning |</a:t>
-            </a:r>
-          </a:p>
-          <a:p>
-            <a:r>
-              <a:t>|---|---|</a:t>
-            </a:r>
-          </a:p>
-          <a:p>
-            <a:r>
-              <a:t>| Star | A research question |</a:t>
-            </a:r>
-          </a:p>
-          <a:p>
-            <a:r>
-              <a:t>| Diamond | A claim or conjecture |</a:t>
-            </a:r>
-          </a:p>
-          <a:p>
-            <a:r>
-              <a:t>| Rectangle | A located passage |</a:t>
-            </a:r>
-          </a:p>
-          <a:p>
-            <a:r>
-              <a:t>| Ellipse | A source record, called a witness in the schema |</a:t>
-            </a:r>
-          </a:p>
-          <a:p>
-            <a:r>
-              <a:t>| Dot | A search query |</a:t>
-            </a:r>
-          </a:p>
-          <a:p>
-            <a:r>
-              <a:t>| `part_of` | A passage belongs to a source record |</a:t>
-            </a:r>
-          </a:p>
-          <a:p>
-            <a:r>
-              <a:t>| `attests` | A passage is offered as support for a proposal |</a:t>
-            </a:r>
-          </a:p>
-          <a:p>
-            <a:r>
-              <a:t>| `addresses` | A proposal addresses a question |</a:t>
-            </a:r>
-          </a:p>
-          <a:p>
-            <a:r>
-              <a:t>| `searched_for` | A recorded search used in proposing a claim or conjecture |</a:t>
-            </a:r>
-          </a:p>
-          <a:p>
-            <a:r>
-              <a:t>| `tests` | A query is offered as a test of a conjecture |</a:t>
-            </a:r>
-          </a:p>
-          <a:p>
-            <a:endParaRPr/>
-          </a:p>
-          <a:p>
-            <a:r>
-              <a:t>A search pointing to a claim records retrieval activity; it does not itself prove the claim. The **Show exploration** overlay adds works inspected in recorded tool activity, including some that were never attached as evidence. It is not a map of every source available in the corpus or every thought the model had.</a:t>
-            </a:r>
-          </a:p>
-          <a:p>
-            <a:endParaRPr/>
-          </a:p>
-          <a:p>
-            <a:r>
-              <a:t>**Verified with an exact span** means a recorded check found the quoted passage at its source location. Repeated verification attempts remain in the history but are not presented as multiple independent witnesses.</a:t>
+            <a:r>
+              <a:t>Return to diachronic research through the distinction between supplied history and computed observations. The question asks how wording travels between texts produced at different times. Cohort locates and compares that wording; the current implementation does not date texts or reconstruct language change. Applying it to uncertain texts would require independent chronological and textual evidence.</a:t>
             </a:r>
           </a:p>
         </p:txBody>
@@ -1959,7 +2061,7 @@
           <a:lstStyle/>
           <a:p>
             <a:r>
-              <a:t>SAY: The graph helps us trace proposals back to sources, inspect recorded relationships between sources, and retain the history of checks and decisions. A possible next step is edge prediction: suggesting a relationship worth investigating. We have not implemented or evaluated that capability.</a:t>
+              <a:t>SAY: Read the agents’ proposals, citations and checks.</a:t>
             </a:r>
           </a:p>
           <a:p>
@@ -1967,7 +2069,7 @@
           </a:p>
           <a:p>
             <a:r>
-              <a:t>TERMINOLOGY: Cohort has typed nodes, typed edges and record metadata. These are familiar graph-data techniques. The project deliberately calls this an evidence graph because translator and historical assertions remain contested. This does not mean that all knowledge graphs must contain only certain facts; it explains the terminology and epistemic contract of this application. See docs/design.md principles 1–2 and section 10.</a:t>
+              <a:t>SAY: Findings is a readable view of saved proposals. A conjecture adds an explanation, limits and a proposed test; it is not a container made of claims.</a:t>
             </a:r>
           </a:p>
           <a:p>
@@ -1975,7 +2077,12 @@
           </a:p>
           <a:p>
             <a:r>
-              <a:t>DEPENDENCIES: Recorded quotes, parallel_of and descends_from relationships help expose related material. A graph cannot display a dependency that nobody has recorded, and an independence flag is not proof that sources are historically independent. Repeated checks are not independent witnesses.</a:t>
+              <a:t>BACKGROUND</a:t>
+            </a:r>
+          </a:p>
+          <a:p>
+            <a:r>
+              <a:t>These are saved proposals, not established conclusions. The conjecture review found weaknesses; do not imply attested means correct. No proposal was accepted for the screenshot. </a:t>
             </a:r>
           </a:p>
           <a:p>
@@ -1983,114 +2090,7 @@
           </a:p>
           <a:p>
             <a:r>
-              <a:t>EDGE PREDICTION: In graph research, link prediction scores possible missing relationships between nodes. A future Cohort feature could propose a candidate quotation or textual parallel, retrieve the relevant passages and send it for review. A predicted link would be a proposal, not historical evidence by itself. Current semantic-neighbour retrieval compares passage vectors; it is not a trained graph link-prediction model. The source-grounded edge-proposal workflow would also need implementation and evaluation.</a:t>
-            </a:r>
-          </a:p>
-          <a:p>
-            <a:endParaRPr/>
-          </a:p>
-          <a:p>
-            <a:r>
-              <a:t>BACKGROUND READING: Hogan et al., Knowledge Graphs (2021), https://arxiv.org/abs/2003.02320; Daza et al., Inductive Entity Representations from Text via Link Prediction (2021), https://arxiv.org/abs/2010.03496.</a:t>
-            </a:r>
-          </a:p>
-          <a:p>
-            <a:endParaRPr/>
-          </a:p>
-          <a:p>
-            <a:r>
-              <a:t>EXISTING CHECKS AND DECISIONS</a:t>
-            </a:r>
-          </a:p>
-          <a:p>
-            <a:r>
-              <a:t>SAY: Finding a quotation at its source is one check. Whether it supports the interpretation requires reading. Accepting a passage does not accept every connected proposal.</a:t>
-            </a:r>
-          </a:p>
-          <a:p>
-            <a:endParaRPr/>
-          </a:p>
-          <a:p>
-            <a:r>
-              <a:t>BACKGROUND</a:t>
-            </a:r>
-          </a:p>
-          <a:p>
-            <a:r>
-              <a:t>Do not click Accept just to create an ending. Show available controls and explain their actual eligibility rules. The reviewer cannot be treated as a reliable semantic validator; explain the current limitation if asked.</a:t>
-            </a:r>
-          </a:p>
-          <a:p>
-            <a:endParaRPr/>
-          </a:p>
-          <a:p>
-            <a:r>
-              <a:t>| Status | Meaning |</a:t>
-            </a:r>
-          </a:p>
-          <a:p>
-            <a:r>
-              <a:t>|---|---|</a:t>
-            </a:r>
-          </a:p>
-          <a:p>
-            <a:r>
-              <a:t>| Proposed | Submitted for consideration |</a:t>
-            </a:r>
-          </a:p>
-          <a:p>
-            <a:r>
-              <a:t>| Attested | The required promotion checks for that record type passed |</a:t>
-            </a:r>
-          </a:p>
-          <a:p>
-            <a:r>
-              <a:t>| Accepted | The researcher approved this record under Cohort’s citation rules |</a:t>
-            </a:r>
-          </a:p>
-          <a:p>
-            <a:r>
-              <a:t>| Rejected | The researcher rejected this record with a reason |</a:t>
-            </a:r>
-          </a:p>
-          <a:p>
-            <a:endParaRPr/>
-          </a:p>
-          <a:p>
-            <a:r>
-              <a:t>A **contradiction** relationship is distinct from a researcher’s rejection. Colour alone is insufficient: some imported experiment records also have calculated assessment colours. Read the selected record’s status.</a:t>
-            </a:r>
-          </a:p>
-          <a:p>
-            <a:endParaRPr/>
-          </a:p>
-          <a:p>
-            <a:r>
-              <a:t>An eligible attested record can be accepted. Accepting a passage changes that passage’s status; it does not accept every connected claim. Rejecting a record preserves it and the reason rather than deleting a source text. Reopening a rejected record also requires a reason.</a:t>
-            </a:r>
-          </a:p>
-          <a:p>
-            <a:endParaRPr/>
-          </a:p>
-          <a:p>
-            <a:r>
-              <a:t>The reviewer is fallible. In the current implementation, its tool re-fetches cited passages and checks their spans, but the reviewer does not have a complete evidence-reading workflow before choosing its semantic verdict. A reviewer’s statement that it checked an interpretation or reproduced a calculation is not enough to establish that it did so. The researcher should inspect the passages and numerical output directly. This limitation remains open; do not say it has been repaired by changing model names.</a:t>
-            </a:r>
-          </a:p>
-          <a:p>
-            <a:endParaRPr/>
-          </a:p>
-          <a:p>
-            <a:r>
-              <a:t>The Vocabulary comparison tab does not currently offer a grounded `quotes` or `parallel_of` edge proposal for later acceptance. Accepting a graph record also does not change Vocabulary comparison profiles. The exclusion above is a separate researcher-controlled calculation.</a:t>
-            </a:r>
-          </a:p>
-          <a:p>
-            <a:endParaRPr/>
-          </a:p>
-          <a:p>
-            <a:r>
-              <a:t>Return to diachronic research through the distinction between supplied history and computed observations. The question asks how wording travels between texts produced at different times. Cohort locates and compares that wording; the current implementation does not date texts or reconstruct language change. Applying it to uncertain texts would require independent chronological and textual evidence.</a:t>
+              <a:t>VISUAL: The screenshot orients the audience; the diagram explains the operation. Read the diagram first. Its arrows show UI workflow, not evidence-graph edge types. In Corpus the two top boxes are alternative search modes; in Vocabulary comparison and Inquiry they are inputs used together.</a:t>
             </a:r>
           </a:p>
         </p:txBody>
@@ -6885,7 +6885,7 @@
         </p:nvSpPr>
         <p:spPr>
           <a:xfrm>
-            <a:off x="552450" y="5876925"/>
+            <a:off x="552450" y="5943600"/>
             <a:ext cx="11049000" cy="333375"/>
           </a:xfrm>
           <a:prstGeom prst="rect">
@@ -7016,6 +7016,57 @@
               </a:rPr>
               <a:t>01</a:t>
             </a:r>
+          </a:p>
+        </p:txBody>
+      </p:sp>
+      <p:sp>
+        <p:nvSpPr>
+          <p:cNvPr id="12" name="AccentRule">
+            <a:extLst>
+              <a:ext uri="{FF2B5EF4-FFF2-40B4-BE49-F238E27FC236}">
+                <a16:creationId xmlns:a16="http://schemas.microsoft.com/office/drawing/2014/main" id="{C3E0F568-5462-4CC8-8751-A5AF1D2CDD62}"/>
+              </a:ext>
+            </a:extLst>
+          </p:cNvPr>
+          <p:cNvSpPr/>
+          <p:nvPr/>
+        </p:nvSpPr>
+        <p:spPr>
+          <a:xfrm>
+            <a:off x="495300" y="596900"/>
+            <a:ext cx="584200" cy="38100"/>
+          </a:xfrm>
+          <a:prstGeom prst="rect">
+            <a:avLst/>
+          </a:prstGeom>
+          <a:solidFill>
+            <a:srgbClr val="126B85"/>
+          </a:solidFill>
+          <a:ln w="9525" cap="flat" cmpd="sng" algn="ctr">
+            <a:noFill/>
+            <a:prstDash val="solid"/>
+          </a:ln>
+        </p:spPr>
+        <p:style>
+          <a:lnRef idx="1">
+            <a:schemeClr val="accent1"/>
+          </a:lnRef>
+          <a:fillRef idx="3">
+            <a:schemeClr val="accent1"/>
+          </a:fillRef>
+          <a:effectRef idx="2">
+            <a:schemeClr val="accent1"/>
+          </a:effectRef>
+          <a:fontRef idx="minor">
+            <a:schemeClr val="lt1"/>
+          </a:fontRef>
+        </p:style>
+        <p:txBody>
+          <a:bodyPr vertOverflow="clip" horzOverflow="clip" rtlCol="0" anchor="t"/>
+          <a:lstStyle/>
+          <a:p>
+            <a:pPr algn="l"/>
+            <a:endParaRPr lang="zh-TW" altLang="en-US"/>
           </a:p>
         </p:txBody>
       </p:sp>
@@ -7148,7 +7199,7 @@
         </p:nvSpPr>
         <p:spPr>
           <a:xfrm>
-            <a:off x="714375" y="2105025"/>
+            <a:off x="714375" y="2511425"/>
             <a:ext cx="2857500" cy="476250"/>
           </a:xfrm>
           <a:prstGeom prst="rect">
@@ -7196,8 +7247,8 @@
         </p:nvSpPr>
         <p:spPr>
           <a:xfrm>
-            <a:off x="714375" y="2714625"/>
-            <a:ext cx="2857500" cy="857250"/>
+            <a:off x="714375" y="3121025"/>
+            <a:ext cx="2857500" cy="1809750"/>
           </a:xfrm>
           <a:prstGeom prst="rect">
             <a:avLst/>
@@ -7220,7 +7271,7 @@
               <a:spcAft>
                 <a:spcPts val="0"/>
               </a:spcAft>
-              <a:defRPr sz="2100" b="0">
+              <a:defRPr sz="1800" b="0">
                 <a:solidFill>
                   <a:srgbClr val="24384A"/>
                 </a:solidFill>
@@ -7228,10 +7279,29 @@
               </a:defRPr>
             </a:pPr>
             <a:r>
-              <a:rPr>
-                <a:ea typeface="Microsoft JhengHei"/>
-              </a:rPr>
-              <a:t>Choose strings to count</a:t>
+              <a:t>Radich: strings selected for a Dharmarakṣa dictionary.</a:t>
+            </a:r>
+          </a:p>
+          <a:p>
+            <a:pPr>
+              <a:lnSpc>
+                <a:spcPct val="118000"/>
+              </a:lnSpc>
+              <a:spcBef>
+                <a:spcPts val="0"/>
+              </a:spcBef>
+              <a:spcAft>
+                <a:spcPts val="0"/>
+              </a:spcAft>
+              <a:defRPr sz="1800" b="0">
+                <a:solidFill>
+                  <a:srgbClr val="24384A"/>
+                </a:solidFill>
+                <a:latin typeface="Lato"/>
+              </a:defRPr>
+            </a:pPr>
+            <a:r>
+              <a:t>Frequent: common strings in translator-uncertain texts; no group labels used.</a:t>
             </a:r>
           </a:p>
         </p:txBody>
@@ -7244,7 +7314,7 @@
         </p:nvSpPr>
         <p:spPr>
           <a:xfrm>
-            <a:off x="4619625" y="2105025"/>
+            <a:off x="4619625" y="2511425"/>
             <a:ext cx="2857500" cy="476250"/>
           </a:xfrm>
           <a:prstGeom prst="rect">
@@ -7292,8 +7362,8 @@
         </p:nvSpPr>
         <p:spPr>
           <a:xfrm>
-            <a:off x="4619625" y="2714625"/>
-            <a:ext cx="2857500" cy="857250"/>
+            <a:off x="4619625" y="3121025"/>
+            <a:ext cx="2857500" cy="1809750"/>
           </a:xfrm>
           <a:prstGeom prst="rect">
             <a:avLst/>
@@ -7316,7 +7386,7 @@
               <a:spcAft>
                 <a:spcPts val="0"/>
               </a:spcAft>
-              <a:defRPr sz="2100" b="0">
+              <a:defRPr sz="1800" b="0">
                 <a:solidFill>
                   <a:srgbClr val="24384A"/>
                 </a:solidFill>
@@ -7324,10 +7394,29 @@
               </a:defRPr>
             </a:pPr>
             <a:r>
-              <a:rPr>
-                <a:ea typeface="Microsoft JhengHei"/>
-              </a:rPr>
-              <a:t>Count those strings</a:t>
+              <a:t>Count each selected string in the target.</a:t>
+            </a:r>
+          </a:p>
+          <a:p>
+            <a:pPr>
+              <a:lnSpc>
+                <a:spcPct val="118000"/>
+              </a:lnSpc>
+              <a:spcBef>
+                <a:spcPts val="0"/>
+              </a:spcBef>
+              <a:spcAft>
+                <a:spcPts val="0"/>
+              </a:spcAft>
+              <a:defRPr sz="1800" b="0">
+                <a:solidFill>
+                  <a:srgbClr val="24384A"/>
+                </a:solidFill>
+                <a:latin typeface="Lato"/>
+              </a:defRPr>
+            </a:pPr>
+            <a:r>
+              <a:t>Repeated occurrences contribute repeatedly.</a:t>
             </a:r>
           </a:p>
         </p:txBody>
@@ -7340,7 +7429,7 @@
         </p:nvSpPr>
         <p:spPr>
           <a:xfrm>
-            <a:off x="8524875" y="2105025"/>
+            <a:off x="8524875" y="2511425"/>
             <a:ext cx="2952750" cy="476250"/>
           </a:xfrm>
           <a:prstGeom prst="rect">
@@ -7375,7 +7464,7 @@
               <a:rPr>
                 <a:ea typeface="Microsoft JhengHei"/>
               </a:rPr>
-              <a:t>Group profiles</a:t>
+              <a:t>Reference groups</a:t>
             </a:r>
           </a:p>
         </p:txBody>
@@ -7388,8 +7477,8 @@
         </p:nvSpPr>
         <p:spPr>
           <a:xfrm>
-            <a:off x="8524875" y="2714625"/>
-            <a:ext cx="2952750" cy="857250"/>
+            <a:off x="8524875" y="3121025"/>
+            <a:ext cx="2952750" cy="1809750"/>
           </a:xfrm>
           <a:prstGeom prst="rect">
             <a:avLst/>
@@ -7412,7 +7501,7 @@
               <a:spcAft>
                 <a:spcPts val="0"/>
               </a:spcAft>
-              <a:defRPr sz="2100" b="0">
+              <a:defRPr sz="1800" b="0">
                 <a:solidFill>
                   <a:srgbClr val="24384A"/>
                 </a:solidFill>
@@ -7420,24 +7509,21 @@
               </a:defRPr>
             </a:pPr>
             <a:r>
-              <a:rPr>
-                <a:ea typeface="Microsoft JhengHei"/>
-              </a:rPr>
-              <a:t>Texts pooled by</a:t>
-            </a:r>
-          </a:p>
-          <a:p>
-            <a:pPr>
-              <a:lnSpc>
-                <a:spcPct val="118000"/>
-              </a:lnSpc>
-              <a:spcBef>
-                <a:spcPts val="0"/>
-              </a:spcBef>
-              <a:spcAft>
-                <a:spcPts val="0"/>
-              </a:spcAft>
-              <a:defRPr sz="2100" b="0">
+              <a:t>Count the same strings in reference texts with catalogue group labels.</a:t>
+            </a:r>
+          </a:p>
+          <a:p>
+            <a:pPr>
+              <a:lnSpc>
+                <a:spcPct val="118000"/>
+              </a:lnSpc>
+              <a:spcBef>
+                <a:spcPts val="0"/>
+              </a:spcBef>
+              <a:spcAft>
+                <a:spcPts val="0"/>
+              </a:spcAft>
+              <a:defRPr sz="1800" b="0">
                 <a:solidFill>
                   <a:srgbClr val="24384A"/>
                 </a:solidFill>
@@ -7445,10 +7531,7 @@
               </a:defRPr>
             </a:pPr>
             <a:r>
-              <a:rPr>
-                <a:ea typeface="Microsoft JhengHei"/>
-              </a:rPr>
-              <a:t>catalogue label</a:t>
+              <a:t>Use relative frequencies; exclude the target’s own work.</a:t>
             </a:r>
           </a:p>
         </p:txBody>
@@ -7461,7 +7544,7 @@
         </p:nvCxnSpPr>
         <p:spPr>
           <a:xfrm>
-            <a:off x="3810000" y="2809875"/>
+            <a:off x="3810000" y="3216275"/>
             <a:ext cx="523874" cy="0"/>
           </a:xfrm>
           <a:prstGeom prst="line">
@@ -7497,8 +7580,8 @@
         </p:nvCxnSpPr>
         <p:spPr>
           <a:xfrm>
-            <a:off x="10001250" y="3819524"/>
-            <a:ext cx="0" cy="419100"/>
+            <a:off x="10001250" y="4886325"/>
+            <a:ext cx="0" cy="333375"/>
           </a:xfrm>
           <a:prstGeom prst="line">
             <a:avLst/>
@@ -7533,8 +7616,8 @@
         </p:nvCxnSpPr>
         <p:spPr>
           <a:xfrm>
-            <a:off x="6048375" y="3819524"/>
-            <a:ext cx="0" cy="419100"/>
+            <a:off x="6048375" y="4886325"/>
+            <a:ext cx="0" cy="333375"/>
           </a:xfrm>
           <a:prstGeom prst="line">
             <a:avLst/>
@@ -7569,8 +7652,8 @@
         </p:nvSpPr>
         <p:spPr>
           <a:xfrm>
-            <a:off x="4667250" y="4572000"/>
-            <a:ext cx="6810375" cy="714375"/>
+            <a:off x="4667250" y="5381625"/>
+            <a:ext cx="6810375" cy="762000"/>
           </a:xfrm>
           <a:prstGeom prst="rect">
             <a:avLst/>
@@ -7593,7 +7676,7 @@
               <a:spcAft>
                 <a:spcPts val="0"/>
               </a:spcAft>
-              <a:defRPr sz="2500" b="1">
+              <a:defRPr sz="2100" b="1">
                 <a:solidFill>
                   <a:srgbClr val="80511B"/>
                 </a:solidFill>
@@ -7601,10 +7684,7 @@
               </a:defRPr>
             </a:pPr>
             <a:r>
-              <a:rPr>
-                <a:ea typeface="Microsoft JhengHei"/>
-              </a:rPr>
-              <a:t>Compare usage → rank the catalogue groups</a:t>
+              <a:t>Rank groups by how well their string frequencies fit the target.</a:t>
             </a:r>
           </a:p>
         </p:txBody>
@@ -7703,6 +7783,93 @@
           </a:p>
         </p:txBody>
       </p:sp>
+      <p:sp>
+        <p:nvSpPr>
+          <p:cNvPr id="14" name="AccentRule">
+            <a:extLst>
+              <a:ext uri="{FF2B5EF4-FFF2-40B4-BE49-F238E27FC236}">
+                <a16:creationId xmlns:a16="http://schemas.microsoft.com/office/drawing/2014/main" id="{54FB4A4E-CC1C-4D1D-AE19-FF9F8620B62F}"/>
+              </a:ext>
+            </a:extLst>
+          </p:cNvPr>
+          <p:cNvSpPr/>
+          <p:nvPr/>
+        </p:nvSpPr>
+        <p:spPr>
+          <a:xfrm>
+            <a:off x="495300" y="596900"/>
+            <a:ext cx="584200" cy="38100"/>
+          </a:xfrm>
+          <a:prstGeom prst="rect">
+            <a:avLst/>
+          </a:prstGeom>
+          <a:solidFill>
+            <a:srgbClr val="126B85"/>
+          </a:solidFill>
+          <a:ln w="9525" cap="flat" cmpd="sng" algn="ctr">
+            <a:noFill/>
+            <a:prstDash val="solid"/>
+          </a:ln>
+        </p:spPr>
+        <p:style>
+          <a:lnRef idx="1">
+            <a:schemeClr val="accent1"/>
+          </a:lnRef>
+          <a:fillRef idx="3">
+            <a:schemeClr val="accent1"/>
+          </a:fillRef>
+          <a:effectRef idx="2">
+            <a:schemeClr val="accent1"/>
+          </a:effectRef>
+          <a:fontRef idx="minor">
+            <a:schemeClr val="lt1"/>
+          </a:fontRef>
+        </p:style>
+        <p:txBody>
+          <a:bodyPr vertOverflow="clip" horzOverflow="clip" rtlCol="0" anchor="t"/>
+          <a:lstStyle/>
+          <a:p>
+            <a:pPr algn="l"/>
+            <a:endParaRPr lang="zh-TW" altLang="en-US"/>
+          </a:p>
+        </p:txBody>
+      </p:sp>
+      <p:cxnSp>
+        <p:nvCxnSpPr>
+          <p:cNvPr id="100" name="Target to group comparison"/>
+          <p:cNvCxnSpPr/>
+          <p:nvPr/>
+        </p:nvCxnSpPr>
+        <p:spPr>
+          <a:xfrm>
+            <a:off x="7762875" y="3216275"/>
+            <a:ext cx="523874" cy="0"/>
+          </a:xfrm>
+          <a:prstGeom prst="line">
+            <a:avLst/>
+          </a:prstGeom>
+          <a:ln w="19050">
+            <a:solidFill>
+              <a:srgbClr val="526778"/>
+            </a:solidFill>
+            <a:tailEnd type="triangle"/>
+          </a:ln>
+        </p:spPr>
+        <p:style>
+          <a:lnRef idx="2">
+            <a:schemeClr val="accent1"/>
+          </a:lnRef>
+          <a:fillRef idx="0">
+            <a:schemeClr val="accent1"/>
+          </a:fillRef>
+          <a:effectRef idx="1">
+            <a:schemeClr val="accent1"/>
+          </a:effectRef>
+          <a:fontRef idx="minor">
+            <a:schemeClr val="tx1"/>
+          </a:fontRef>
+        </p:style>
+      </p:cxnSp>
     </p:spTree>
   </p:cSld>
   <p:clrMapOvr>
@@ -8092,8 +8259,8 @@
         </p:nvSpPr>
         <p:spPr>
           <a:xfrm>
-            <a:off x="7620000" y="2333625"/>
-            <a:ext cx="1619250" cy="571500"/>
+            <a:off x="7619999" y="2333625"/>
+            <a:ext cx="1698568" cy="310662"/>
           </a:xfrm>
           <a:prstGeom prst="rect">
             <a:avLst/>
@@ -8124,7 +8291,7 @@
               </a:defRPr>
             </a:pPr>
             <a:r>
-              <a:rPr>
+              <a:rPr dirty="0">
                 <a:ea typeface="Microsoft JhengHei"/>
               </a:rPr>
               <a:t>Target + strings</a:t>
@@ -8530,8 +8697,8 @@
         </p:nvSpPr>
         <p:spPr>
           <a:xfrm>
-            <a:off x="523874" y="5924550"/>
-            <a:ext cx="6477000" cy="495299"/>
+            <a:off x="523874" y="5867400"/>
+            <a:ext cx="6477000" cy="558800"/>
           </a:xfrm>
           <a:prstGeom prst="rect">
             <a:avLst/>
@@ -8663,6 +8830,57 @@
               </a:rPr>
               <a:t>Screenshot: source passages hidden where applicable. Diagram: schematic.</a:t>
             </a:r>
+          </a:p>
+        </p:txBody>
+      </p:sp>
+      <p:sp>
+        <p:nvSpPr>
+          <p:cNvPr id="23" name="AccentRule">
+            <a:extLst>
+              <a:ext uri="{FF2B5EF4-FFF2-40B4-BE49-F238E27FC236}">
+                <a16:creationId xmlns:a16="http://schemas.microsoft.com/office/drawing/2014/main" id="{B70C9061-E0EF-48CD-9D4E-0DE2B4FB9086}"/>
+              </a:ext>
+            </a:extLst>
+          </p:cNvPr>
+          <p:cNvSpPr/>
+          <p:nvPr/>
+        </p:nvSpPr>
+        <p:spPr>
+          <a:xfrm>
+            <a:off x="495300" y="596900"/>
+            <a:ext cx="584200" cy="38100"/>
+          </a:xfrm>
+          <a:prstGeom prst="rect">
+            <a:avLst/>
+          </a:prstGeom>
+          <a:solidFill>
+            <a:srgbClr val="126B85"/>
+          </a:solidFill>
+          <a:ln w="9525" cap="flat" cmpd="sng" algn="ctr">
+            <a:noFill/>
+            <a:prstDash val="solid"/>
+          </a:ln>
+        </p:spPr>
+        <p:style>
+          <a:lnRef idx="1">
+            <a:schemeClr val="accent1"/>
+          </a:lnRef>
+          <a:fillRef idx="3">
+            <a:schemeClr val="accent1"/>
+          </a:fillRef>
+          <a:effectRef idx="2">
+            <a:schemeClr val="accent1"/>
+          </a:effectRef>
+          <a:fontRef idx="minor">
+            <a:schemeClr val="lt1"/>
+          </a:fontRef>
+        </p:style>
+        <p:txBody>
+          <a:bodyPr vertOverflow="clip" horzOverflow="clip" rtlCol="0" anchor="t"/>
+          <a:lstStyle/>
+          <a:p>
+            <a:pPr algn="l"/>
+            <a:endParaRPr lang="zh-TW" altLang="en-US"/>
           </a:p>
         </p:txBody>
       </p:sp>
@@ -9165,7 +9383,7 @@
         <p:spPr>
           <a:xfrm>
             <a:off x="523874" y="5172075"/>
-            <a:ext cx="11049000" cy="647700"/>
+            <a:ext cx="11049000" cy="828240"/>
           </a:xfrm>
           <a:prstGeom prst="rect">
             <a:avLst/>
@@ -9196,59 +9414,32 @@
               </a:defRPr>
             </a:pPr>
             <a:r>
-              <a:rPr>
-                <a:ea typeface="Microsoft JhengHei"/>
-              </a:rPr>
-              <a:t>T1694 is the commentary on T0603. Its wording affects the ranking.</a:t>
-            </a:r>
-          </a:p>
-        </p:txBody>
-      </p:sp>
-      <p:sp>
-        <p:nvSpPr>
-          <p:cNvPr id="10" name="TextBox 9"/>
-          <p:cNvSpPr txBox="1"/>
-          <p:nvPr/>
-        </p:nvSpPr>
-        <p:spPr>
-          <a:xfrm>
-            <a:off x="523874" y="5886450"/>
-            <a:ext cx="11049000" cy="381000"/>
-          </a:xfrm>
-          <a:prstGeom prst="rect">
-            <a:avLst/>
-          </a:prstGeom>
-          <a:noFill/>
-        </p:spPr>
-        <p:txBody>
-          <a:bodyPr wrap="square" lIns="0" tIns="0" rIns="0" bIns="0">
-            <a:spAutoFit/>
-          </a:bodyPr>
-          <a:lstStyle/>
-          <a:p>
-            <a:pPr>
-              <a:lnSpc>
-                <a:spcPct val="118000"/>
-              </a:lnSpc>
-              <a:spcBef>
-                <a:spcPts val="0"/>
-              </a:spcBef>
-              <a:spcAft>
-                <a:spcPts val="0"/>
-              </a:spcAft>
-              <a:defRPr sz="1800" b="0">
-                <a:solidFill>
-                  <a:srgbClr val="526778"/>
-                </a:solidFill>
-                <a:latin typeface="Lato"/>
-              </a:defRPr>
-            </a:pPr>
-            <a:r>
-              <a:rPr>
-                <a:ea typeface="Microsoft JhengHei"/>
-              </a:rPr>
-              <a:t>This agrees with the accepted attribution after exclusion; it does not establish one.</a:t>
-            </a:r>
+              <a:rPr dirty="0">
+                <a:ea typeface="Microsoft JhengHei"/>
+              </a:rPr>
+              <a:t>T1694 is </a:t>
+            </a:r>
+            <a:r>
+              <a:rPr lang="en-US" dirty="0">
+                <a:ea typeface="Microsoft JhengHei"/>
+              </a:rPr>
+              <a:t>a</a:t>
+            </a:r>
+            <a:r>
+              <a:rPr dirty="0">
+                <a:ea typeface="Microsoft JhengHei"/>
+              </a:rPr>
+              <a:t> commentary on T0603</a:t>
+            </a:r>
+            <a:r>
+              <a:rPr lang="en-US" dirty="0">
+                <a:ea typeface="Microsoft JhengHei"/>
+              </a:rPr>
+              <a:t> with large spans of overlap, artificially boosting similarity</a:t>
+            </a:r>
+            <a:endParaRPr dirty="0">
+              <a:ea typeface="Microsoft JhengHei"/>
+            </a:endParaRPr>
           </a:p>
         </p:txBody>
       </p:sp>
@@ -9343,6 +9534,57 @@
               </a:rPr>
               <a:t>12</a:t>
             </a:r>
+          </a:p>
+        </p:txBody>
+      </p:sp>
+      <p:sp>
+        <p:nvSpPr>
+          <p:cNvPr id="13" name="AccentRule">
+            <a:extLst>
+              <a:ext uri="{FF2B5EF4-FFF2-40B4-BE49-F238E27FC236}">
+                <a16:creationId xmlns:a16="http://schemas.microsoft.com/office/drawing/2014/main" id="{7386ED30-88F8-41E7-8684-CC294B0D8DF1}"/>
+              </a:ext>
+            </a:extLst>
+          </p:cNvPr>
+          <p:cNvSpPr/>
+          <p:nvPr/>
+        </p:nvSpPr>
+        <p:spPr>
+          <a:xfrm>
+            <a:off x="495300" y="596900"/>
+            <a:ext cx="584200" cy="38100"/>
+          </a:xfrm>
+          <a:prstGeom prst="rect">
+            <a:avLst/>
+          </a:prstGeom>
+          <a:solidFill>
+            <a:srgbClr val="126B85"/>
+          </a:solidFill>
+          <a:ln w="9525" cap="flat" cmpd="sng" algn="ctr">
+            <a:noFill/>
+            <a:prstDash val="solid"/>
+          </a:ln>
+        </p:spPr>
+        <p:style>
+          <a:lnRef idx="1">
+            <a:schemeClr val="accent1"/>
+          </a:lnRef>
+          <a:fillRef idx="3">
+            <a:schemeClr val="accent1"/>
+          </a:fillRef>
+          <a:effectRef idx="2">
+            <a:schemeClr val="accent1"/>
+          </a:effectRef>
+          <a:fontRef idx="minor">
+            <a:schemeClr val="lt1"/>
+          </a:fontRef>
+        </p:style>
+        <p:txBody>
+          <a:bodyPr vertOverflow="clip" horzOverflow="clip" rtlCol="0" anchor="t"/>
+          <a:lstStyle/>
+          <a:p>
+            <a:pPr algn="l"/>
+            <a:endParaRPr lang="zh-TW" altLang="en-US"/>
           </a:p>
         </p:txBody>
       </p:sp>
@@ -10309,6 +10551,57 @@
           </a:p>
         </p:txBody>
       </p:sp>
+      <p:sp>
+        <p:nvSpPr>
+          <p:cNvPr id="23" name="AccentRule">
+            <a:extLst>
+              <a:ext uri="{FF2B5EF4-FFF2-40B4-BE49-F238E27FC236}">
+                <a16:creationId xmlns:a16="http://schemas.microsoft.com/office/drawing/2014/main" id="{7D403E93-E906-4D09-B5EC-09FA1169ED70}"/>
+              </a:ext>
+            </a:extLst>
+          </p:cNvPr>
+          <p:cNvSpPr/>
+          <p:nvPr/>
+        </p:nvSpPr>
+        <p:spPr>
+          <a:xfrm>
+            <a:off x="495300" y="596900"/>
+            <a:ext cx="584200" cy="38100"/>
+          </a:xfrm>
+          <a:prstGeom prst="rect">
+            <a:avLst/>
+          </a:prstGeom>
+          <a:solidFill>
+            <a:srgbClr val="126B85"/>
+          </a:solidFill>
+          <a:ln w="9525" cap="flat" cmpd="sng" algn="ctr">
+            <a:noFill/>
+            <a:prstDash val="solid"/>
+          </a:ln>
+        </p:spPr>
+        <p:style>
+          <a:lnRef idx="1">
+            <a:schemeClr val="accent1"/>
+          </a:lnRef>
+          <a:fillRef idx="3">
+            <a:schemeClr val="accent1"/>
+          </a:fillRef>
+          <a:effectRef idx="2">
+            <a:schemeClr val="accent1"/>
+          </a:effectRef>
+          <a:fontRef idx="minor">
+            <a:schemeClr val="lt1"/>
+          </a:fontRef>
+        </p:style>
+        <p:txBody>
+          <a:bodyPr vertOverflow="clip" horzOverflow="clip" rtlCol="0" anchor="t"/>
+          <a:lstStyle/>
+          <a:p>
+            <a:pPr algn="l"/>
+            <a:endParaRPr lang="zh-TW" altLang="en-US"/>
+          </a:p>
+        </p:txBody>
+      </p:sp>
     </p:spTree>
   </p:cSld>
   <p:clrMapOvr>
@@ -11060,7 +11353,7 @@
         <p:spPr>
           <a:xfrm>
             <a:off x="523874" y="5105400"/>
-            <a:ext cx="2286000" cy="447675"/>
+            <a:ext cx="2159000" cy="447675"/>
           </a:xfrm>
           <a:prstGeom prst="rect">
             <a:avLst/>
@@ -11286,6 +11579,57 @@
               </a:rPr>
               <a:t>14</a:t>
             </a:r>
+          </a:p>
+        </p:txBody>
+      </p:sp>
+      <p:sp>
+        <p:nvSpPr>
+          <p:cNvPr id="21" name="AccentRule">
+            <a:extLst>
+              <a:ext uri="{FF2B5EF4-FFF2-40B4-BE49-F238E27FC236}">
+                <a16:creationId xmlns:a16="http://schemas.microsoft.com/office/drawing/2014/main" id="{E7376052-6646-4270-B004-9BE59F1F43F7}"/>
+              </a:ext>
+            </a:extLst>
+          </p:cNvPr>
+          <p:cNvSpPr/>
+          <p:nvPr/>
+        </p:nvSpPr>
+        <p:spPr>
+          <a:xfrm>
+            <a:off x="495300" y="596900"/>
+            <a:ext cx="584200" cy="38100"/>
+          </a:xfrm>
+          <a:prstGeom prst="rect">
+            <a:avLst/>
+          </a:prstGeom>
+          <a:solidFill>
+            <a:srgbClr val="126B85"/>
+          </a:solidFill>
+          <a:ln w="9525" cap="flat" cmpd="sng" algn="ctr">
+            <a:noFill/>
+            <a:prstDash val="solid"/>
+          </a:ln>
+        </p:spPr>
+        <p:style>
+          <a:lnRef idx="1">
+            <a:schemeClr val="accent1"/>
+          </a:lnRef>
+          <a:fillRef idx="3">
+            <a:schemeClr val="accent1"/>
+          </a:fillRef>
+          <a:effectRef idx="2">
+            <a:schemeClr val="accent1"/>
+          </a:effectRef>
+          <a:fontRef idx="minor">
+            <a:schemeClr val="lt1"/>
+          </a:fontRef>
+        </p:style>
+        <p:txBody>
+          <a:bodyPr vertOverflow="clip" horzOverflow="clip" rtlCol="0" anchor="t"/>
+          <a:lstStyle/>
+          <a:p>
+            <a:pPr algn="l"/>
+            <a:endParaRPr lang="zh-TW" altLang="en-US"/>
           </a:p>
         </p:txBody>
       </p:sp>
@@ -11357,7 +11701,7 @@
               <a:rPr>
                 <a:ea typeface="Microsoft JhengHei"/>
               </a:rPr>
-              <a:t>Findings</a:t>
+              <a:t>Graph</a:t>
             </a:r>
           </a:p>
         </p:txBody>
@@ -11405,7 +11749,7 @@
               <a:rPr>
                 <a:ea typeface="Microsoft JhengHei"/>
               </a:rPr>
-              <a:t>Read the agents’ proposals, citations and checks.</a:t>
+              <a:t>Follow links between sources, proposals and decisions.</a:t>
             </a:r>
           </a:p>
         </p:txBody>
@@ -11499,14 +11843,14 @@
               <a:rPr>
                 <a:ea typeface="Microsoft JhengHei"/>
               </a:rPr>
-              <a:t>18</a:t>
+              <a:t>15</a:t>
             </a:r>
           </a:p>
         </p:txBody>
       </p:sp>
       <p:pic>
         <p:nvPicPr>
-          <p:cNvPr id="6" name="Picture 5" descr="findings.png"/>
+          <p:cNvPr id="6" name="Picture 5" descr="graph.png"/>
           <p:cNvPicPr>
             <a:picLocks noChangeAspect="1"/>
           </p:cNvPicPr>
@@ -11643,7 +11987,7 @@
           </a:solidFill>
           <a:ln w="12700">
             <a:solidFill>
-              <a:srgbClr val="146C68"/>
+              <a:srgbClr val="24384A"/>
             </a:solidFill>
           </a:ln>
         </p:spPr>
@@ -11704,7 +12048,7 @@
               </a:spcAft>
               <a:defRPr sz="1900" b="1">
                 <a:solidFill>
-                  <a:srgbClr val="146C68"/>
+                  <a:srgbClr val="24384A"/>
                 </a:solidFill>
                 <a:latin typeface="Lato"/>
               </a:defRPr>
@@ -11713,7 +12057,7 @@
               <a:rPr>
                 <a:ea typeface="Microsoft JhengHei"/>
               </a:rPr>
-              <a:t>Open a saved proposal</a:t>
+              <a:t>Select a research question</a:t>
             </a:r>
           </a:p>
         </p:txBody>
@@ -11725,9 +12069,9 @@
           <p:nvPr/>
         </p:nvCxnSpPr>
         <p:spPr>
-          <a:xfrm flipH="1">
-            <a:off x="8429625" y="3038475"/>
-            <a:ext cx="1095375" cy="457200"/>
+          <a:xfrm>
+            <a:off x="9572625" y="3028950"/>
+            <a:ext cx="0" cy="400050"/>
           </a:xfrm>
           <a:prstGeom prst="line">
             <a:avLst/>
@@ -11754,16 +12098,110 @@
           </a:fontRef>
         </p:style>
       </p:cxnSp>
+      <p:sp>
+        <p:nvSpPr>
+          <p:cNvPr id="12" name="Rectangle 11"/>
+          <p:cNvSpPr/>
+          <p:nvPr/>
+        </p:nvSpPr>
+        <p:spPr>
+          <a:xfrm>
+            <a:off x="7477125" y="3590925"/>
+            <a:ext cx="4190999" cy="762000"/>
+          </a:xfrm>
+          <a:prstGeom prst="rect">
+            <a:avLst/>
+          </a:prstGeom>
+          <a:solidFill>
+            <a:srgbClr val="FFFFFF"/>
+          </a:solidFill>
+          <a:ln w="12700">
+            <a:solidFill>
+              <a:srgbClr val="24384A"/>
+            </a:solidFill>
+          </a:ln>
+        </p:spPr>
+        <p:style>
+          <a:lnRef idx="1">
+            <a:schemeClr val="accent1"/>
+          </a:lnRef>
+          <a:fillRef idx="3">
+            <a:schemeClr val="accent1"/>
+          </a:fillRef>
+          <a:effectRef idx="2">
+            <a:schemeClr val="accent1"/>
+          </a:effectRef>
+          <a:fontRef idx="minor">
+            <a:schemeClr val="lt1"/>
+          </a:fontRef>
+        </p:style>
+        <p:txBody>
+          <a:bodyPr rtlCol="0" anchor="ctr"/>
+          <a:lstStyle/>
+          <a:p>
+            <a:pPr algn="ctr"/>
+            <a:endParaRPr/>
+          </a:p>
+        </p:txBody>
+      </p:sp>
+      <p:sp>
+        <p:nvSpPr>
+          <p:cNvPr id="13" name="TextBox 12"/>
+          <p:cNvSpPr txBox="1"/>
+          <p:nvPr/>
+        </p:nvSpPr>
+        <p:spPr>
+          <a:xfrm>
+            <a:off x="7620000" y="3733799"/>
+            <a:ext cx="3905249" cy="571500"/>
+          </a:xfrm>
+          <a:prstGeom prst="rect">
+            <a:avLst/>
+          </a:prstGeom>
+          <a:noFill/>
+        </p:spPr>
+        <p:txBody>
+          <a:bodyPr wrap="square" lIns="0" tIns="0" rIns="0" bIns="0">
+            <a:spAutoFit/>
+          </a:bodyPr>
+          <a:lstStyle/>
+          <a:p>
+            <a:pPr>
+              <a:lnSpc>
+                <a:spcPct val="118000"/>
+              </a:lnSpc>
+              <a:spcBef>
+                <a:spcPts val="0"/>
+              </a:spcBef>
+              <a:spcAft>
+                <a:spcPts val="0"/>
+              </a:spcAft>
+              <a:defRPr sz="1900" b="1">
+                <a:solidFill>
+                  <a:srgbClr val="24384A"/>
+                </a:solidFill>
+                <a:latin typeface="Lato"/>
+              </a:defRPr>
+            </a:pPr>
+            <a:r>
+              <a:rPr>
+                <a:ea typeface="Microsoft JhengHei"/>
+              </a:rPr>
+              <a:t>Inspect linked records</a:t>
+            </a:r>
+          </a:p>
+        </p:txBody>
+      </p:sp>
       <p:cxnSp>
         <p:nvCxnSpPr>
-          <p:cNvPr id="12" name="Connector 11"/>
+          <p:cNvPr id="14" name="Connector 13"/>
           <p:cNvCxnSpPr/>
           <p:nvPr/>
         </p:nvCxnSpPr>
         <p:spPr>
           <a:xfrm>
-            <a:off x="9525000" y="3038475"/>
-            <a:ext cx="1143000" cy="457200"/>
+            <a:off x="9572625" y="4419600"/>
+            <a:ext cx="0" cy="371475"/>
           </a:xfrm>
           <a:prstGeom prst="line">
             <a:avLst/>
@@ -11792,14 +12230,14 @@
       </p:cxnSp>
       <p:sp>
         <p:nvSpPr>
-          <p:cNvPr id="13" name="Rectangle 12"/>
+          <p:cNvPr id="15" name="Rectangle 14"/>
           <p:cNvSpPr/>
           <p:nvPr/>
         </p:nvSpPr>
         <p:spPr>
           <a:xfrm>
-            <a:off x="7477125" y="3667125"/>
-            <a:ext cx="1905000" cy="819150"/>
+            <a:off x="7477125" y="4953000"/>
+            <a:ext cx="4190999" cy="762000"/>
           </a:xfrm>
           <a:prstGeom prst="rect">
             <a:avLst/>
@@ -11809,7 +12247,7 @@
           </a:solidFill>
           <a:ln w="12700">
             <a:solidFill>
-              <a:srgbClr val="146C68"/>
+              <a:srgbClr val="24384A"/>
             </a:solidFill>
           </a:ln>
         </p:spPr>
@@ -11838,14 +12276,14 @@
       </p:sp>
       <p:sp>
         <p:nvSpPr>
-          <p:cNvPr id="14" name="TextBox 13"/>
+          <p:cNvPr id="16" name="TextBox 15"/>
           <p:cNvSpPr txBox="1"/>
           <p:nvPr/>
         </p:nvSpPr>
         <p:spPr>
           <a:xfrm>
-            <a:off x="7620000" y="3810000"/>
-            <a:ext cx="1619250" cy="628650"/>
+            <a:off x="7620000" y="5095875"/>
+            <a:ext cx="3905249" cy="571500"/>
           </a:xfrm>
           <a:prstGeom prst="rect">
             <a:avLst/>
@@ -11870,7 +12308,7 @@
               </a:spcAft>
               <a:defRPr sz="1900" b="1">
                 <a:solidFill>
-                  <a:srgbClr val="146C68"/>
+                  <a:srgbClr val="24384A"/>
                 </a:solidFill>
                 <a:latin typeface="Lato"/>
               </a:defRPr>
@@ -11879,32 +12317,181 @@
               <a:rPr>
                 <a:ea typeface="Microsoft JhengHei"/>
               </a:rPr>
-              <a:t>Cited passages</a:t>
-            </a:r>
-          </a:p>
-        </p:txBody>
-      </p:sp>
-      <p:sp>
-        <p:nvSpPr>
-          <p:cNvPr id="15" name="Rectangle 14"/>
+              <a:t>Accept or reject a record</a:t>
+            </a:r>
+          </a:p>
+        </p:txBody>
+      </p:sp>
+      <p:sp>
+        <p:nvSpPr>
+          <p:cNvPr id="17" name="TextBox 16"/>
+          <p:cNvSpPr txBox="1"/>
+          <p:nvPr/>
+        </p:nvSpPr>
+        <p:spPr>
+          <a:xfrm>
+            <a:off x="523874" y="5867400"/>
+            <a:ext cx="6477000" cy="558800"/>
+          </a:xfrm>
+          <a:prstGeom prst="rect">
+            <a:avLst/>
+          </a:prstGeom>
+          <a:noFill/>
+        </p:spPr>
+        <p:txBody>
+          <a:bodyPr wrap="square" lIns="0" tIns="0" rIns="0" bIns="0">
+            <a:spAutoFit/>
+          </a:bodyPr>
+          <a:lstStyle/>
+          <a:p>
+            <a:pPr>
+              <a:lnSpc>
+                <a:spcPct val="118000"/>
+              </a:lnSpc>
+              <a:spcBef>
+                <a:spcPts val="0"/>
+              </a:spcBef>
+              <a:spcAft>
+                <a:spcPts val="0"/>
+              </a:spcAft>
+              <a:defRPr sz="2100" b="0">
+                <a:solidFill>
+                  <a:srgbClr val="24384A"/>
+                </a:solidFill>
+                <a:latin typeface="Lato"/>
+              </a:defRPr>
+            </a:pPr>
+            <a:r>
+              <a:rPr>
+                <a:ea typeface="Microsoft JhengHei"/>
+              </a:rPr>
+              <a:t>Show exploration adds recorded tool activity.</a:t>
+            </a:r>
+          </a:p>
+        </p:txBody>
+      </p:sp>
+      <p:sp>
+        <p:nvSpPr>
+          <p:cNvPr id="18" name="TextBox 17"/>
+          <p:cNvSpPr txBox="1"/>
+          <p:nvPr/>
+        </p:nvSpPr>
+        <p:spPr>
+          <a:xfrm>
+            <a:off x="7477125" y="5924550"/>
+            <a:ext cx="4190999" cy="485775"/>
+          </a:xfrm>
+          <a:prstGeom prst="rect">
+            <a:avLst/>
+          </a:prstGeom>
+          <a:noFill/>
+        </p:spPr>
+        <p:txBody>
+          <a:bodyPr wrap="square" lIns="0" tIns="0" rIns="0" bIns="0">
+            <a:spAutoFit/>
+          </a:bodyPr>
+          <a:lstStyle/>
+          <a:p>
+            <a:pPr>
+              <a:lnSpc>
+                <a:spcPct val="118000"/>
+              </a:lnSpc>
+              <a:spcBef>
+                <a:spcPts val="0"/>
+              </a:spcBef>
+              <a:spcAft>
+                <a:spcPts val="0"/>
+              </a:spcAft>
+              <a:defRPr sz="1700" b="0">
+                <a:solidFill>
+                  <a:srgbClr val="526778"/>
+                </a:solidFill>
+                <a:latin typeface="Lato"/>
+              </a:defRPr>
+            </a:pPr>
+            <a:r>
+              <a:rPr>
+                <a:ea typeface="Microsoft JhengHei"/>
+              </a:rPr>
+              <a:t>Filtering the view does not delete records.</a:t>
+            </a:r>
+          </a:p>
+        </p:txBody>
+      </p:sp>
+      <p:sp>
+        <p:nvSpPr>
+          <p:cNvPr id="19" name="TextBox 18"/>
+          <p:cNvSpPr txBox="1"/>
+          <p:nvPr/>
+        </p:nvSpPr>
+        <p:spPr>
+          <a:xfrm>
+            <a:off x="523874" y="6515100"/>
+            <a:ext cx="10477500" cy="200025"/>
+          </a:xfrm>
+          <a:prstGeom prst="rect">
+            <a:avLst/>
+          </a:prstGeom>
+          <a:noFill/>
+        </p:spPr>
+        <p:txBody>
+          <a:bodyPr wrap="square" lIns="0" tIns="0" rIns="0" bIns="0">
+            <a:spAutoFit/>
+          </a:bodyPr>
+          <a:lstStyle/>
+          <a:p>
+            <a:pPr>
+              <a:lnSpc>
+                <a:spcPct val="118000"/>
+              </a:lnSpc>
+              <a:spcBef>
+                <a:spcPts val="0"/>
+              </a:spcBef>
+              <a:spcAft>
+                <a:spcPts val="0"/>
+              </a:spcAft>
+              <a:defRPr sz="1000" b="0">
+                <a:solidFill>
+                  <a:srgbClr val="526778"/>
+                </a:solidFill>
+                <a:latin typeface="Lato"/>
+              </a:defRPr>
+            </a:pPr>
+            <a:r>
+              <a:rPr>
+                <a:ea typeface="Microsoft JhengHei"/>
+              </a:rPr>
+              <a:t>Screenshot: source passages hidden where applicable. Diagram: schematic.</a:t>
+            </a:r>
+          </a:p>
+        </p:txBody>
+      </p:sp>
+      <p:sp>
+        <p:nvSpPr>
+          <p:cNvPr id="20" name="AccentRule">
+            <a:extLst>
+              <a:ext uri="{FF2B5EF4-FFF2-40B4-BE49-F238E27FC236}">
+                <a16:creationId xmlns:a16="http://schemas.microsoft.com/office/drawing/2014/main" id="{DFB81FCB-3BF2-4F43-A8F3-217109B3DBF3}"/>
+              </a:ext>
+            </a:extLst>
+          </p:cNvPr>
           <p:cNvSpPr/>
           <p:nvPr/>
         </p:nvSpPr>
         <p:spPr>
           <a:xfrm>
-            <a:off x="9667875" y="3667125"/>
-            <a:ext cx="2000250" cy="819150"/>
+            <a:off x="495300" y="596900"/>
+            <a:ext cx="584200" cy="38100"/>
           </a:xfrm>
           <a:prstGeom prst="rect">
             <a:avLst/>
           </a:prstGeom>
           <a:solidFill>
-            <a:srgbClr val="FFFFFF"/>
+            <a:srgbClr val="126B85"/>
           </a:solidFill>
-          <a:ln w="12700">
-            <a:solidFill>
-              <a:srgbClr val="146C68"/>
-            </a:solidFill>
+          <a:ln w="9525" cap="flat" cmpd="sng" algn="ctr">
+            <a:noFill/>
+            <a:prstDash val="solid"/>
           </a:ln>
         </p:spPr>
         <p:style>
@@ -11922,276 +12509,11 @@
           </a:fontRef>
         </p:style>
         <p:txBody>
-          <a:bodyPr rtlCol="0" anchor="ctr"/>
-          <a:lstStyle/>
-          <a:p>
-            <a:pPr algn="ctr"/>
-            <a:endParaRPr/>
-          </a:p>
-        </p:txBody>
-      </p:sp>
-      <p:sp>
-        <p:nvSpPr>
-          <p:cNvPr id="16" name="TextBox 15"/>
-          <p:cNvSpPr txBox="1"/>
-          <p:nvPr/>
-        </p:nvSpPr>
-        <p:spPr>
-          <a:xfrm>
-            <a:off x="9810750" y="3810000"/>
-            <a:ext cx="1714500" cy="628650"/>
-          </a:xfrm>
-          <a:prstGeom prst="rect">
-            <a:avLst/>
-          </a:prstGeom>
-          <a:noFill/>
-        </p:spPr>
-        <p:txBody>
-          <a:bodyPr wrap="square" lIns="0" tIns="0" rIns="0" bIns="0">
-            <a:spAutoFit/>
-          </a:bodyPr>
-          <a:lstStyle/>
-          <a:p>
-            <a:pPr>
-              <a:lnSpc>
-                <a:spcPct val="118000"/>
-              </a:lnSpc>
-              <a:spcBef>
-                <a:spcPts val="0"/>
-              </a:spcBef>
-              <a:spcAft>
-                <a:spcPts val="0"/>
-              </a:spcAft>
-              <a:defRPr sz="1900" b="1">
-                <a:solidFill>
-                  <a:srgbClr val="146C68"/>
-                </a:solidFill>
-                <a:latin typeface="Lato"/>
-              </a:defRPr>
-            </a:pPr>
-            <a:r>
-              <a:rPr>
-                <a:ea typeface="Microsoft JhengHei"/>
-              </a:rPr>
-              <a:t>Checks</a:t>
-            </a:r>
-          </a:p>
-        </p:txBody>
-      </p:sp>
-      <p:sp>
-        <p:nvSpPr>
-          <p:cNvPr id="17" name="TextBox 16"/>
-          <p:cNvSpPr txBox="1"/>
-          <p:nvPr/>
-        </p:nvSpPr>
-        <p:spPr>
-          <a:xfrm>
-            <a:off x="7477125" y="5010150"/>
-            <a:ext cx="4190999" cy="762000"/>
-          </a:xfrm>
-          <a:prstGeom prst="rect">
-            <a:avLst/>
-          </a:prstGeom>
-          <a:noFill/>
-        </p:spPr>
-        <p:txBody>
-          <a:bodyPr wrap="square" lIns="0" tIns="0" rIns="0" bIns="0">
-            <a:spAutoFit/>
-          </a:bodyPr>
-          <a:lstStyle/>
-          <a:p>
-            <a:pPr>
-              <a:lnSpc>
-                <a:spcPct val="118000"/>
-              </a:lnSpc>
-              <a:spcBef>
-                <a:spcPts val="0"/>
-              </a:spcBef>
-              <a:spcAft>
-                <a:spcPts val="0"/>
-              </a:spcAft>
-              <a:defRPr sz="2300" b="1">
-                <a:solidFill>
-                  <a:srgbClr val="146C68"/>
-                </a:solidFill>
-                <a:latin typeface="Lato"/>
-              </a:defRPr>
-            </a:pPr>
-            <a:r>
-              <a:rPr>
-                <a:ea typeface="Microsoft JhengHei"/>
-              </a:rPr>
-              <a:t>Read its explanation</a:t>
-            </a:r>
-          </a:p>
-          <a:p>
-            <a:pPr>
-              <a:lnSpc>
-                <a:spcPct val="118000"/>
-              </a:lnSpc>
-              <a:spcBef>
-                <a:spcPts val="0"/>
-              </a:spcBef>
-              <a:spcAft>
-                <a:spcPts val="0"/>
-              </a:spcAft>
-              <a:defRPr sz="2300" b="1">
-                <a:solidFill>
-                  <a:srgbClr val="146C68"/>
-                </a:solidFill>
-                <a:latin typeface="Lato"/>
-              </a:defRPr>
-            </a:pPr>
-            <a:r>
-              <a:rPr>
-                <a:ea typeface="Microsoft JhengHei"/>
-              </a:rPr>
-              <a:t>and alternatives.</a:t>
-            </a:r>
-          </a:p>
-        </p:txBody>
-      </p:sp>
-      <p:sp>
-        <p:nvSpPr>
-          <p:cNvPr id="18" name="TextBox 17"/>
-          <p:cNvSpPr txBox="1"/>
-          <p:nvPr/>
-        </p:nvSpPr>
-        <p:spPr>
-          <a:xfrm>
-            <a:off x="523874" y="5924550"/>
-            <a:ext cx="6477000" cy="495299"/>
-          </a:xfrm>
-          <a:prstGeom prst="rect">
-            <a:avLst/>
-          </a:prstGeom>
-          <a:noFill/>
-        </p:spPr>
-        <p:txBody>
-          <a:bodyPr wrap="square" lIns="0" tIns="0" rIns="0" bIns="0">
-            <a:spAutoFit/>
-          </a:bodyPr>
-          <a:lstStyle/>
-          <a:p>
-            <a:pPr>
-              <a:lnSpc>
-                <a:spcPct val="118000"/>
-              </a:lnSpc>
-              <a:spcBef>
-                <a:spcPts val="0"/>
-              </a:spcBef>
-              <a:spcAft>
-                <a:spcPts val="0"/>
-              </a:spcAft>
-              <a:defRPr sz="2100" b="0">
-                <a:solidFill>
-                  <a:srgbClr val="146C68"/>
-                </a:solidFill>
-                <a:latin typeface="Lato"/>
-              </a:defRPr>
-            </a:pPr>
-            <a:r>
-              <a:rPr>
-                <a:ea typeface="Microsoft JhengHei"/>
-              </a:rPr>
-              <a:t>Follow a citation into Graph to inspect its source.</a:t>
-            </a:r>
-          </a:p>
-        </p:txBody>
-      </p:sp>
-      <p:sp>
-        <p:nvSpPr>
-          <p:cNvPr id="19" name="TextBox 18"/>
-          <p:cNvSpPr txBox="1"/>
-          <p:nvPr/>
-        </p:nvSpPr>
-        <p:spPr>
-          <a:xfrm>
-            <a:off x="7477125" y="5924550"/>
-            <a:ext cx="4190999" cy="485775"/>
-          </a:xfrm>
-          <a:prstGeom prst="rect">
-            <a:avLst/>
-          </a:prstGeom>
-          <a:noFill/>
-        </p:spPr>
-        <p:txBody>
-          <a:bodyPr wrap="square" lIns="0" tIns="0" rIns="0" bIns="0">
-            <a:spAutoFit/>
-          </a:bodyPr>
-          <a:lstStyle/>
-          <a:p>
-            <a:pPr>
-              <a:lnSpc>
-                <a:spcPct val="118000"/>
-              </a:lnSpc>
-              <a:spcBef>
-                <a:spcPts val="0"/>
-              </a:spcBef>
-              <a:spcAft>
-                <a:spcPts val="0"/>
-              </a:spcAft>
-              <a:defRPr sz="1700" b="0">
-                <a:solidFill>
-                  <a:srgbClr val="526778"/>
-                </a:solidFill>
-                <a:latin typeface="Lato"/>
-              </a:defRPr>
-            </a:pPr>
-            <a:r>
-              <a:rPr>
-                <a:ea typeface="Microsoft JhengHei"/>
-              </a:rPr>
-              <a:t>Inspect one proposal at a time.</a:t>
-            </a:r>
-          </a:p>
-        </p:txBody>
-      </p:sp>
-      <p:sp>
-        <p:nvSpPr>
-          <p:cNvPr id="20" name="TextBox 19"/>
-          <p:cNvSpPr txBox="1"/>
-          <p:nvPr/>
-        </p:nvSpPr>
-        <p:spPr>
-          <a:xfrm>
-            <a:off x="523874" y="6515100"/>
-            <a:ext cx="10477500" cy="200025"/>
-          </a:xfrm>
-          <a:prstGeom prst="rect">
-            <a:avLst/>
-          </a:prstGeom>
-          <a:noFill/>
-        </p:spPr>
-        <p:txBody>
-          <a:bodyPr wrap="square" lIns="0" tIns="0" rIns="0" bIns="0">
-            <a:spAutoFit/>
-          </a:bodyPr>
-          <a:lstStyle/>
-          <a:p>
-            <a:pPr>
-              <a:lnSpc>
-                <a:spcPct val="118000"/>
-              </a:lnSpc>
-              <a:spcBef>
-                <a:spcPts val="0"/>
-              </a:spcBef>
-              <a:spcAft>
-                <a:spcPts val="0"/>
-              </a:spcAft>
-              <a:defRPr sz="1000" b="0">
-                <a:solidFill>
-                  <a:srgbClr val="526778"/>
-                </a:solidFill>
-                <a:latin typeface="Lato"/>
-              </a:defRPr>
-            </a:pPr>
-            <a:r>
-              <a:rPr>
-                <a:ea typeface="Microsoft JhengHei"/>
-              </a:rPr>
-              <a:t>Screenshot: source passages hidden where applicable. Diagram: schematic.</a:t>
-            </a:r>
+          <a:bodyPr vertOverflow="clip" horzOverflow="clip" rtlCol="0" anchor="t"/>
+          <a:lstStyle/>
+          <a:p>
+            <a:pPr algn="l"/>
+            <a:endParaRPr lang="zh-TW" altLang="en-US"/>
           </a:p>
         </p:txBody>
       </p:sp>
@@ -12263,7 +12585,7 @@
               <a:rPr>
                 <a:ea typeface="Microsoft JhengHei"/>
               </a:rPr>
-              <a:t>Graph</a:t>
+              <a:t>Graph relationships · schematic</a:t>
             </a:r>
           </a:p>
         </p:txBody>
@@ -12277,7 +12599,7 @@
         <p:spPr>
           <a:xfrm>
             <a:off x="495299" y="742950"/>
-            <a:ext cx="11144250" cy="952500"/>
+            <a:ext cx="11144250" cy="1047749"/>
           </a:xfrm>
           <a:prstGeom prst="rect">
             <a:avLst/>
@@ -12300,7 +12622,7 @@
               <a:spcAft>
                 <a:spcPts val="0"/>
               </a:spcAft>
-              <a:defRPr sz="2900" b="1">
+              <a:defRPr sz="3200" b="1">
                 <a:solidFill>
                   <a:srgbClr val="24384A"/>
                 </a:solidFill>
@@ -12311,14 +12633,1009 @@
               <a:rPr>
                 <a:ea typeface="Microsoft JhengHei"/>
               </a:rPr>
-              <a:t>Follow links between sources, proposals and decisions.</a:t>
-            </a:r>
-          </a:p>
-        </p:txBody>
-      </p:sp>
-      <p:sp>
-        <p:nvSpPr>
-          <p:cNvPr id="4" name="Rectangle 3"/>
+              <a:t>Why a query points to a proposal</a:t>
+            </a:r>
+          </a:p>
+        </p:txBody>
+      </p:sp>
+      <p:sp>
+        <p:nvSpPr>
+          <p:cNvPr id="4" name="Oval 3"/>
+          <p:cNvSpPr/>
+          <p:nvPr/>
+        </p:nvSpPr>
+        <p:spPr>
+          <a:xfrm>
+            <a:off x="523874" y="2000250"/>
+            <a:ext cx="2381250" cy="952500"/>
+          </a:xfrm>
+          <a:prstGeom prst="ellipse">
+            <a:avLst/>
+          </a:prstGeom>
+          <a:solidFill>
+            <a:srgbClr val="E8F3FA"/>
+          </a:solidFill>
+          <a:ln w="12700">
+            <a:solidFill>
+              <a:srgbClr val="24384A"/>
+            </a:solidFill>
+          </a:ln>
+        </p:spPr>
+        <p:style>
+          <a:lnRef idx="1">
+            <a:schemeClr val="accent1"/>
+          </a:lnRef>
+          <a:fillRef idx="3">
+            <a:schemeClr val="accent1"/>
+          </a:fillRef>
+          <a:effectRef idx="2">
+            <a:schemeClr val="accent1"/>
+          </a:effectRef>
+          <a:fontRef idx="minor">
+            <a:schemeClr val="lt1"/>
+          </a:fontRef>
+        </p:style>
+        <p:txBody>
+          <a:bodyPr rtlCol="0" anchor="ctr"/>
+          <a:lstStyle/>
+          <a:p>
+            <a:pPr algn="ctr"/>
+            <a:endParaRPr/>
+          </a:p>
+        </p:txBody>
+      </p:sp>
+      <p:sp>
+        <p:nvSpPr>
+          <p:cNvPr id="5" name="TextBox 4"/>
+          <p:cNvSpPr txBox="1"/>
+          <p:nvPr/>
+        </p:nvSpPr>
+        <p:spPr>
+          <a:xfrm>
+            <a:off x="714375" y="2257425"/>
+            <a:ext cx="2000250" cy="714375"/>
+          </a:xfrm>
+          <a:prstGeom prst="rect">
+            <a:avLst/>
+          </a:prstGeom>
+          <a:noFill/>
+        </p:spPr>
+        <p:txBody>
+          <a:bodyPr wrap="square" lIns="0" tIns="0" rIns="0" bIns="0">
+            <a:spAutoFit/>
+          </a:bodyPr>
+          <a:lstStyle/>
+          <a:p>
+            <a:pPr>
+              <a:lnSpc>
+                <a:spcPct val="118000"/>
+              </a:lnSpc>
+              <a:spcBef>
+                <a:spcPts val="0"/>
+              </a:spcBef>
+              <a:spcAft>
+                <a:spcPts val="0"/>
+              </a:spcAft>
+              <a:defRPr sz="2200" b="1">
+                <a:solidFill>
+                  <a:srgbClr val="24384A"/>
+                </a:solidFill>
+                <a:latin typeface="Lato"/>
+              </a:defRPr>
+            </a:pPr>
+            <a:r>
+              <a:rPr>
+                <a:ea typeface="Microsoft JhengHei"/>
+              </a:rPr>
+              <a:t>Witness</a:t>
+            </a:r>
+          </a:p>
+        </p:txBody>
+      </p:sp>
+      <p:sp>
+        <p:nvSpPr>
+          <p:cNvPr id="6" name="Rectangle 5"/>
+          <p:cNvSpPr/>
+          <p:nvPr/>
+        </p:nvSpPr>
+        <p:spPr>
+          <a:xfrm>
+            <a:off x="3857625" y="2000250"/>
+            <a:ext cx="2381250" cy="952500"/>
+          </a:xfrm>
+          <a:prstGeom prst="rect">
+            <a:avLst/>
+          </a:prstGeom>
+          <a:solidFill>
+            <a:srgbClr val="E8F3FA"/>
+          </a:solidFill>
+          <a:ln w="12700">
+            <a:solidFill>
+              <a:srgbClr val="24384A"/>
+            </a:solidFill>
+          </a:ln>
+        </p:spPr>
+        <p:style>
+          <a:lnRef idx="1">
+            <a:schemeClr val="accent1"/>
+          </a:lnRef>
+          <a:fillRef idx="3">
+            <a:schemeClr val="accent1"/>
+          </a:fillRef>
+          <a:effectRef idx="2">
+            <a:schemeClr val="accent1"/>
+          </a:effectRef>
+          <a:fontRef idx="minor">
+            <a:schemeClr val="lt1"/>
+          </a:fontRef>
+        </p:style>
+        <p:txBody>
+          <a:bodyPr rtlCol="0" anchor="ctr"/>
+          <a:lstStyle/>
+          <a:p>
+            <a:pPr algn="ctr"/>
+            <a:endParaRPr/>
+          </a:p>
+        </p:txBody>
+      </p:sp>
+      <p:sp>
+        <p:nvSpPr>
+          <p:cNvPr id="7" name="TextBox 6"/>
+          <p:cNvSpPr txBox="1"/>
+          <p:nvPr/>
+        </p:nvSpPr>
+        <p:spPr>
+          <a:xfrm>
+            <a:off x="4048124" y="2257425"/>
+            <a:ext cx="2000250" cy="714375"/>
+          </a:xfrm>
+          <a:prstGeom prst="rect">
+            <a:avLst/>
+          </a:prstGeom>
+          <a:noFill/>
+        </p:spPr>
+        <p:txBody>
+          <a:bodyPr wrap="square" lIns="0" tIns="0" rIns="0" bIns="0">
+            <a:spAutoFit/>
+          </a:bodyPr>
+          <a:lstStyle/>
+          <a:p>
+            <a:pPr>
+              <a:lnSpc>
+                <a:spcPct val="118000"/>
+              </a:lnSpc>
+              <a:spcBef>
+                <a:spcPts val="0"/>
+              </a:spcBef>
+              <a:spcAft>
+                <a:spcPts val="0"/>
+              </a:spcAft>
+              <a:defRPr sz="2200" b="1">
+                <a:solidFill>
+                  <a:srgbClr val="24384A"/>
+                </a:solidFill>
+                <a:latin typeface="Lato"/>
+              </a:defRPr>
+            </a:pPr>
+            <a:r>
+              <a:rPr>
+                <a:ea typeface="Microsoft JhengHei"/>
+              </a:rPr>
+              <a:t>Passage</a:t>
+            </a:r>
+          </a:p>
+        </p:txBody>
+      </p:sp>
+      <p:sp>
+        <p:nvSpPr>
+          <p:cNvPr id="8" name="Diamond 7"/>
+          <p:cNvSpPr/>
+          <p:nvPr/>
+        </p:nvSpPr>
+        <p:spPr>
+          <a:xfrm>
+            <a:off x="7667624" y="1809750"/>
+            <a:ext cx="2952750" cy="1476375"/>
+          </a:xfrm>
+          <a:prstGeom prst="diamond">
+            <a:avLst/>
+          </a:prstGeom>
+          <a:solidFill>
+            <a:srgbClr val="E8F4F1"/>
+          </a:solidFill>
+          <a:ln w="12700">
+            <a:solidFill>
+              <a:srgbClr val="24384A"/>
+            </a:solidFill>
+          </a:ln>
+        </p:spPr>
+        <p:style>
+          <a:lnRef idx="1">
+            <a:schemeClr val="accent1"/>
+          </a:lnRef>
+          <a:fillRef idx="3">
+            <a:schemeClr val="accent1"/>
+          </a:fillRef>
+          <a:effectRef idx="2">
+            <a:schemeClr val="accent1"/>
+          </a:effectRef>
+          <a:fontRef idx="minor">
+            <a:schemeClr val="lt1"/>
+          </a:fontRef>
+        </p:style>
+        <p:txBody>
+          <a:bodyPr rtlCol="0" anchor="ctr"/>
+          <a:lstStyle/>
+          <a:p>
+            <a:pPr algn="ctr"/>
+            <a:endParaRPr/>
+          </a:p>
+        </p:txBody>
+      </p:sp>
+      <p:sp>
+        <p:nvSpPr>
+          <p:cNvPr id="9" name="TextBox 8"/>
+          <p:cNvSpPr txBox="1"/>
+          <p:nvPr/>
+        </p:nvSpPr>
+        <p:spPr>
+          <a:xfrm>
+            <a:off x="8486775" y="2257425"/>
+            <a:ext cx="1352550" cy="666750"/>
+          </a:xfrm>
+          <a:prstGeom prst="rect">
+            <a:avLst/>
+          </a:prstGeom>
+          <a:noFill/>
+        </p:spPr>
+        <p:txBody>
+          <a:bodyPr wrap="square" lIns="0" tIns="0" rIns="0" bIns="0">
+            <a:spAutoFit/>
+          </a:bodyPr>
+          <a:lstStyle/>
+          <a:p>
+            <a:pPr>
+              <a:lnSpc>
+                <a:spcPct val="118000"/>
+              </a:lnSpc>
+              <a:spcBef>
+                <a:spcPts val="0"/>
+              </a:spcBef>
+              <a:spcAft>
+                <a:spcPts val="0"/>
+              </a:spcAft>
+              <a:defRPr sz="1700" b="1">
+                <a:solidFill>
+                  <a:srgbClr val="24384A"/>
+                </a:solidFill>
+                <a:latin typeface="Lato"/>
+              </a:defRPr>
+            </a:pPr>
+            <a:r>
+              <a:rPr>
+                <a:ea typeface="Microsoft JhengHei"/>
+              </a:rPr>
+              <a:t>Claim /</a:t>
+            </a:r>
+          </a:p>
+          <a:p>
+            <a:pPr>
+              <a:lnSpc>
+                <a:spcPct val="118000"/>
+              </a:lnSpc>
+              <a:spcBef>
+                <a:spcPts val="0"/>
+              </a:spcBef>
+              <a:spcAft>
+                <a:spcPts val="0"/>
+              </a:spcAft>
+              <a:defRPr sz="1700" b="1">
+                <a:solidFill>
+                  <a:srgbClr val="24384A"/>
+                </a:solidFill>
+                <a:latin typeface="Lato"/>
+              </a:defRPr>
+            </a:pPr>
+            <a:r>
+              <a:rPr>
+                <a:ea typeface="Microsoft JhengHei"/>
+              </a:rPr>
+              <a:t>conjecture</a:t>
+            </a:r>
+          </a:p>
+        </p:txBody>
+      </p:sp>
+      <p:sp>
+        <p:nvSpPr>
+          <p:cNvPr id="10" name="Oval 9"/>
+          <p:cNvSpPr/>
+          <p:nvPr/>
+        </p:nvSpPr>
+        <p:spPr>
+          <a:xfrm>
+            <a:off x="3857625" y="4124325"/>
+            <a:ext cx="2381250" cy="952500"/>
+          </a:xfrm>
+          <a:prstGeom prst="ellipse">
+            <a:avLst/>
+          </a:prstGeom>
+          <a:solidFill>
+            <a:srgbClr val="F0EBF8"/>
+          </a:solidFill>
+          <a:ln w="12700">
+            <a:solidFill>
+              <a:srgbClr val="24384A"/>
+            </a:solidFill>
+          </a:ln>
+        </p:spPr>
+        <p:style>
+          <a:lnRef idx="1">
+            <a:schemeClr val="accent1"/>
+          </a:lnRef>
+          <a:fillRef idx="3">
+            <a:schemeClr val="accent1"/>
+          </a:fillRef>
+          <a:effectRef idx="2">
+            <a:schemeClr val="accent1"/>
+          </a:effectRef>
+          <a:fontRef idx="minor">
+            <a:schemeClr val="lt1"/>
+          </a:fontRef>
+        </p:style>
+        <p:txBody>
+          <a:bodyPr rtlCol="0" anchor="ctr"/>
+          <a:lstStyle/>
+          <a:p>
+            <a:pPr algn="ctr"/>
+            <a:endParaRPr/>
+          </a:p>
+        </p:txBody>
+      </p:sp>
+      <p:sp>
+        <p:nvSpPr>
+          <p:cNvPr id="11" name="TextBox 10"/>
+          <p:cNvSpPr txBox="1"/>
+          <p:nvPr/>
+        </p:nvSpPr>
+        <p:spPr>
+          <a:xfrm>
+            <a:off x="4048124" y="4381500"/>
+            <a:ext cx="2000250" cy="714375"/>
+          </a:xfrm>
+          <a:prstGeom prst="rect">
+            <a:avLst/>
+          </a:prstGeom>
+          <a:noFill/>
+        </p:spPr>
+        <p:txBody>
+          <a:bodyPr wrap="square" lIns="0" tIns="0" rIns="0" bIns="0">
+            <a:spAutoFit/>
+          </a:bodyPr>
+          <a:lstStyle/>
+          <a:p>
+            <a:pPr>
+              <a:lnSpc>
+                <a:spcPct val="118000"/>
+              </a:lnSpc>
+              <a:spcBef>
+                <a:spcPts val="0"/>
+              </a:spcBef>
+              <a:spcAft>
+                <a:spcPts val="0"/>
+              </a:spcAft>
+              <a:defRPr sz="2200" b="1">
+                <a:solidFill>
+                  <a:srgbClr val="24384A"/>
+                </a:solidFill>
+                <a:latin typeface="Lato"/>
+              </a:defRPr>
+            </a:pPr>
+            <a:r>
+              <a:rPr>
+                <a:ea typeface="Microsoft JhengHei"/>
+              </a:rPr>
+              <a:t>Query</a:t>
+            </a:r>
+          </a:p>
+        </p:txBody>
+      </p:sp>
+      <p:sp>
+        <p:nvSpPr>
+          <p:cNvPr id="12" name="5-Point Star 11"/>
+          <p:cNvSpPr/>
+          <p:nvPr/>
+        </p:nvSpPr>
+        <p:spPr>
+          <a:xfrm>
+            <a:off x="8858250" y="4333875"/>
+            <a:ext cx="2000250" cy="1285875"/>
+          </a:xfrm>
+          <a:prstGeom prst="star5">
+            <a:avLst/>
+          </a:prstGeom>
+          <a:solidFill>
+            <a:srgbClr val="FBF0DC"/>
+          </a:solidFill>
+          <a:ln w="12700">
+            <a:solidFill>
+              <a:srgbClr val="24384A"/>
+            </a:solidFill>
+          </a:ln>
+        </p:spPr>
+        <p:style>
+          <a:lnRef idx="1">
+            <a:schemeClr val="accent1"/>
+          </a:lnRef>
+          <a:fillRef idx="3">
+            <a:schemeClr val="accent1"/>
+          </a:fillRef>
+          <a:effectRef idx="2">
+            <a:schemeClr val="accent1"/>
+          </a:effectRef>
+          <a:fontRef idx="minor">
+            <a:schemeClr val="lt1"/>
+          </a:fontRef>
+        </p:style>
+        <p:txBody>
+          <a:bodyPr rtlCol="0" anchor="ctr"/>
+          <a:lstStyle/>
+          <a:p>
+            <a:pPr algn="ctr"/>
+            <a:endParaRPr/>
+          </a:p>
+        </p:txBody>
+      </p:sp>
+      <p:sp>
+        <p:nvSpPr>
+          <p:cNvPr id="13" name="TextBox 12"/>
+          <p:cNvSpPr txBox="1"/>
+          <p:nvPr/>
+        </p:nvSpPr>
+        <p:spPr>
+          <a:xfrm>
+            <a:off x="9048750" y="4591050"/>
+            <a:ext cx="1619250" cy="1047749"/>
+          </a:xfrm>
+          <a:prstGeom prst="rect">
+            <a:avLst/>
+          </a:prstGeom>
+          <a:noFill/>
+        </p:spPr>
+        <p:txBody>
+          <a:bodyPr wrap="square" lIns="0" tIns="0" rIns="0" bIns="0">
+            <a:spAutoFit/>
+          </a:bodyPr>
+          <a:lstStyle/>
+          <a:p>
+            <a:pPr>
+              <a:lnSpc>
+                <a:spcPct val="118000"/>
+              </a:lnSpc>
+              <a:spcBef>
+                <a:spcPts val="0"/>
+              </a:spcBef>
+              <a:spcAft>
+                <a:spcPts val="0"/>
+              </a:spcAft>
+              <a:defRPr sz="2200" b="1">
+                <a:solidFill>
+                  <a:srgbClr val="24384A"/>
+                </a:solidFill>
+                <a:latin typeface="Lato"/>
+              </a:defRPr>
+            </a:pPr>
+            <a:endParaRPr/>
+          </a:p>
+        </p:txBody>
+      </p:sp>
+      <p:cxnSp>
+        <p:nvCxnSpPr>
+          <p:cNvPr id="14" name="Connector 13"/>
+          <p:cNvCxnSpPr/>
+          <p:nvPr/>
+        </p:nvCxnSpPr>
+        <p:spPr>
+          <a:xfrm>
+            <a:off x="2952750" y="2476500"/>
+            <a:ext cx="838200" cy="0"/>
+          </a:xfrm>
+          <a:prstGeom prst="line">
+            <a:avLst/>
+          </a:prstGeom>
+          <a:ln w="19050">
+            <a:solidFill>
+              <a:srgbClr val="526778"/>
+            </a:solidFill>
+            <a:tailEnd type="triangle"/>
+          </a:ln>
+        </p:spPr>
+        <p:style>
+          <a:lnRef idx="2">
+            <a:schemeClr val="accent1"/>
+          </a:lnRef>
+          <a:fillRef idx="0">
+            <a:schemeClr val="accent1"/>
+          </a:fillRef>
+          <a:effectRef idx="1">
+            <a:schemeClr val="accent1"/>
+          </a:effectRef>
+          <a:fontRef idx="minor">
+            <a:schemeClr val="tx1"/>
+          </a:fontRef>
+        </p:style>
+      </p:cxnSp>
+      <p:sp>
+        <p:nvSpPr>
+          <p:cNvPr id="15" name="TextBox 14"/>
+          <p:cNvSpPr txBox="1"/>
+          <p:nvPr/>
+        </p:nvSpPr>
+        <p:spPr>
+          <a:xfrm>
+            <a:off x="2959100" y="2076450"/>
+            <a:ext cx="889000" cy="314325"/>
+          </a:xfrm>
+          <a:prstGeom prst="rect">
+            <a:avLst/>
+          </a:prstGeom>
+          <a:noFill/>
+        </p:spPr>
+        <p:txBody>
+          <a:bodyPr wrap="square" lIns="0" tIns="0" rIns="0" bIns="0">
+            <a:spAutoFit/>
+          </a:bodyPr>
+          <a:lstStyle/>
+          <a:p>
+            <a:pPr>
+              <a:lnSpc>
+                <a:spcPct val="118000"/>
+              </a:lnSpc>
+              <a:spcBef>
+                <a:spcPts val="0"/>
+              </a:spcBef>
+              <a:spcAft>
+                <a:spcPts val="0"/>
+              </a:spcAft>
+              <a:defRPr sz="1400" b="0">
+                <a:solidFill>
+                  <a:srgbClr val="24384A"/>
+                </a:solidFill>
+                <a:latin typeface="Lato"/>
+              </a:defRPr>
+            </a:pPr>
+            <a:r>
+              <a:rPr>
+                <a:ea typeface="Microsoft JhengHei"/>
+              </a:rPr>
+              <a:t>contains</a:t>
+            </a:r>
+          </a:p>
+        </p:txBody>
+      </p:sp>
+      <p:cxnSp>
+        <p:nvCxnSpPr>
+          <p:cNvPr id="16" name="Connector 15"/>
+          <p:cNvCxnSpPr/>
+          <p:nvPr/>
+        </p:nvCxnSpPr>
+        <p:spPr>
+          <a:xfrm>
+            <a:off x="6334125" y="2476500"/>
+            <a:ext cx="1257300" cy="0"/>
+          </a:xfrm>
+          <a:prstGeom prst="line">
+            <a:avLst/>
+          </a:prstGeom>
+          <a:ln w="19050">
+            <a:solidFill>
+              <a:srgbClr val="526778"/>
+            </a:solidFill>
+            <a:tailEnd type="triangle"/>
+          </a:ln>
+        </p:spPr>
+        <p:style>
+          <a:lnRef idx="2">
+            <a:schemeClr val="accent1"/>
+          </a:lnRef>
+          <a:fillRef idx="0">
+            <a:schemeClr val="accent1"/>
+          </a:fillRef>
+          <a:effectRef idx="1">
+            <a:schemeClr val="accent1"/>
+          </a:effectRef>
+          <a:fontRef idx="minor">
+            <a:schemeClr val="tx1"/>
+          </a:fontRef>
+        </p:style>
+      </p:cxnSp>
+      <p:sp>
+        <p:nvSpPr>
+          <p:cNvPr id="17" name="TextBox 16"/>
+          <p:cNvSpPr txBox="1"/>
+          <p:nvPr/>
+        </p:nvSpPr>
+        <p:spPr>
+          <a:xfrm>
+            <a:off x="6486525" y="2076450"/>
+            <a:ext cx="952500" cy="314325"/>
+          </a:xfrm>
+          <a:prstGeom prst="rect">
+            <a:avLst/>
+          </a:prstGeom>
+          <a:noFill/>
+        </p:spPr>
+        <p:txBody>
+          <a:bodyPr wrap="square" lIns="0" tIns="0" rIns="0" bIns="0">
+            <a:spAutoFit/>
+          </a:bodyPr>
+          <a:lstStyle/>
+          <a:p>
+            <a:pPr>
+              <a:lnSpc>
+                <a:spcPct val="118000"/>
+              </a:lnSpc>
+              <a:spcBef>
+                <a:spcPts val="0"/>
+              </a:spcBef>
+              <a:spcAft>
+                <a:spcPts val="0"/>
+              </a:spcAft>
+              <a:defRPr sz="1400" b="0">
+                <a:solidFill>
+                  <a:srgbClr val="24384A"/>
+                </a:solidFill>
+                <a:latin typeface="Lato"/>
+              </a:defRPr>
+            </a:pPr>
+            <a:r>
+              <a:rPr>
+                <a:ea typeface="Microsoft JhengHei"/>
+              </a:rPr>
+              <a:t>attests</a:t>
+            </a:r>
+          </a:p>
+        </p:txBody>
+      </p:sp>
+      <p:cxnSp>
+        <p:nvCxnSpPr>
+          <p:cNvPr id="18" name="Connector 17"/>
+          <p:cNvCxnSpPr/>
+          <p:nvPr/>
+        </p:nvCxnSpPr>
+        <p:spPr>
+          <a:xfrm flipV="1">
+            <a:off x="6334125" y="3381376"/>
+            <a:ext cx="1524000" cy="1047749"/>
+          </a:xfrm>
+          <a:prstGeom prst="line">
+            <a:avLst/>
+          </a:prstGeom>
+          <a:ln w="19050">
+            <a:solidFill>
+              <a:srgbClr val="526778"/>
+            </a:solidFill>
+            <a:tailEnd type="triangle"/>
+          </a:ln>
+        </p:spPr>
+        <p:style>
+          <a:lnRef idx="2">
+            <a:schemeClr val="accent1"/>
+          </a:lnRef>
+          <a:fillRef idx="0">
+            <a:schemeClr val="accent1"/>
+          </a:fillRef>
+          <a:effectRef idx="1">
+            <a:schemeClr val="accent1"/>
+          </a:effectRef>
+          <a:fontRef idx="minor">
+            <a:schemeClr val="tx1"/>
+          </a:fontRef>
+        </p:style>
+      </p:cxnSp>
+      <p:sp>
+        <p:nvSpPr>
+          <p:cNvPr id="19" name="TextBox 18"/>
+          <p:cNvSpPr txBox="1"/>
+          <p:nvPr/>
+        </p:nvSpPr>
+        <p:spPr>
+          <a:xfrm>
+            <a:off x="6477000" y="4629150"/>
+            <a:ext cx="1905000" cy="333375"/>
+          </a:xfrm>
+          <a:prstGeom prst="rect">
+            <a:avLst/>
+          </a:prstGeom>
+          <a:noFill/>
+        </p:spPr>
+        <p:txBody>
+          <a:bodyPr wrap="square" lIns="0" tIns="0" rIns="0" bIns="0">
+            <a:spAutoFit/>
+          </a:bodyPr>
+          <a:lstStyle/>
+          <a:p>
+            <a:pPr>
+              <a:lnSpc>
+                <a:spcPct val="118000"/>
+              </a:lnSpc>
+              <a:spcBef>
+                <a:spcPts val="0"/>
+              </a:spcBef>
+              <a:spcAft>
+                <a:spcPts val="0"/>
+              </a:spcAft>
+              <a:defRPr sz="1700" b="0">
+                <a:solidFill>
+                  <a:srgbClr val="65439A"/>
+                </a:solidFill>
+                <a:latin typeface="Lato"/>
+              </a:defRPr>
+            </a:pPr>
+            <a:r>
+              <a:rPr>
+                <a:ea typeface="Microsoft JhengHei"/>
+              </a:rPr>
+              <a:t>searched for</a:t>
+            </a:r>
+          </a:p>
+        </p:txBody>
+      </p:sp>
+      <p:sp>
+        <p:nvSpPr>
+          <p:cNvPr id="20" name="TextBox 19"/>
+          <p:cNvSpPr txBox="1"/>
+          <p:nvPr/>
+        </p:nvSpPr>
+        <p:spPr>
+          <a:xfrm>
+            <a:off x="6477000" y="5000625"/>
+            <a:ext cx="1714500" cy="333375"/>
+          </a:xfrm>
+          <a:prstGeom prst="rect">
+            <a:avLst/>
+          </a:prstGeom>
+          <a:noFill/>
+        </p:spPr>
+        <p:txBody>
+          <a:bodyPr wrap="square" lIns="0" tIns="0" rIns="0" bIns="0">
+            <a:spAutoFit/>
+          </a:bodyPr>
+          <a:lstStyle/>
+          <a:p>
+            <a:pPr>
+              <a:lnSpc>
+                <a:spcPct val="118000"/>
+              </a:lnSpc>
+              <a:spcBef>
+                <a:spcPts val="0"/>
+              </a:spcBef>
+              <a:spcAft>
+                <a:spcPts val="0"/>
+              </a:spcAft>
+              <a:defRPr sz="1700" b="0">
+                <a:solidFill>
+                  <a:srgbClr val="65439A"/>
+                </a:solidFill>
+                <a:latin typeface="Lato"/>
+              </a:defRPr>
+            </a:pPr>
+            <a:r>
+              <a:rPr>
+                <a:ea typeface="Microsoft JhengHei"/>
+              </a:rPr>
+              <a:t>or tests</a:t>
+            </a:r>
+          </a:p>
+        </p:txBody>
+      </p:sp>
+      <p:cxnSp>
+        <p:nvCxnSpPr>
+          <p:cNvPr id="21" name="Connector 20"/>
+          <p:cNvCxnSpPr/>
+          <p:nvPr/>
+        </p:nvCxnSpPr>
+        <p:spPr>
+          <a:xfrm>
+            <a:off x="9620250" y="3352800"/>
+            <a:ext cx="0" cy="904875"/>
+          </a:xfrm>
+          <a:prstGeom prst="line">
+            <a:avLst/>
+          </a:prstGeom>
+          <a:ln w="19050">
+            <a:solidFill>
+              <a:srgbClr val="526778"/>
+            </a:solidFill>
+            <a:tailEnd type="triangle"/>
+          </a:ln>
+        </p:spPr>
+        <p:style>
+          <a:lnRef idx="2">
+            <a:schemeClr val="accent1"/>
+          </a:lnRef>
+          <a:fillRef idx="0">
+            <a:schemeClr val="accent1"/>
+          </a:fillRef>
+          <a:effectRef idx="1">
+            <a:schemeClr val="accent1"/>
+          </a:effectRef>
+          <a:fontRef idx="minor">
+            <a:schemeClr val="tx1"/>
+          </a:fontRef>
+        </p:style>
+      </p:cxnSp>
+      <p:sp>
+        <p:nvSpPr>
+          <p:cNvPr id="22" name="TextBox 21"/>
+          <p:cNvSpPr txBox="1"/>
+          <p:nvPr/>
+        </p:nvSpPr>
+        <p:spPr>
+          <a:xfrm>
+            <a:off x="9906000" y="3638550"/>
+            <a:ext cx="1524000" cy="333375"/>
+          </a:xfrm>
+          <a:prstGeom prst="rect">
+            <a:avLst/>
+          </a:prstGeom>
+          <a:noFill/>
+        </p:spPr>
+        <p:txBody>
+          <a:bodyPr wrap="square" lIns="0" tIns="0" rIns="0" bIns="0">
+            <a:spAutoFit/>
+          </a:bodyPr>
+          <a:lstStyle/>
+          <a:p>
+            <a:pPr>
+              <a:lnSpc>
+                <a:spcPct val="118000"/>
+              </a:lnSpc>
+              <a:spcBef>
+                <a:spcPts val="0"/>
+              </a:spcBef>
+              <a:spcAft>
+                <a:spcPts val="0"/>
+              </a:spcAft>
+              <a:defRPr sz="1700" b="0">
+                <a:solidFill>
+                  <a:srgbClr val="24384A"/>
+                </a:solidFill>
+                <a:latin typeface="Lato"/>
+              </a:defRPr>
+            </a:pPr>
+            <a:r>
+              <a:rPr>
+                <a:ea typeface="Microsoft JhengHei"/>
+              </a:rPr>
+              <a:t>addresses</a:t>
+            </a:r>
+          </a:p>
+        </p:txBody>
+      </p:sp>
+      <p:sp>
+        <p:nvSpPr>
+          <p:cNvPr id="23" name="TextBox 22"/>
+          <p:cNvSpPr txBox="1"/>
+          <p:nvPr/>
+        </p:nvSpPr>
+        <p:spPr>
+          <a:xfrm>
+            <a:off x="8620125" y="5791200"/>
+            <a:ext cx="2857500" cy="419100"/>
+          </a:xfrm>
+          <a:prstGeom prst="rect">
+            <a:avLst/>
+          </a:prstGeom>
+          <a:noFill/>
+        </p:spPr>
+        <p:txBody>
+          <a:bodyPr wrap="square" lIns="0" tIns="0" rIns="0" bIns="0">
+            <a:spAutoFit/>
+          </a:bodyPr>
+          <a:lstStyle/>
+          <a:p>
+            <a:pPr>
+              <a:lnSpc>
+                <a:spcPct val="118000"/>
+              </a:lnSpc>
+              <a:spcBef>
+                <a:spcPts val="0"/>
+              </a:spcBef>
+              <a:spcAft>
+                <a:spcPts val="0"/>
+              </a:spcAft>
+              <a:defRPr sz="1900" b="1">
+                <a:solidFill>
+                  <a:srgbClr val="80511B"/>
+                </a:solidFill>
+                <a:latin typeface="Lato"/>
+              </a:defRPr>
+            </a:pPr>
+            <a:r>
+              <a:rPr>
+                <a:ea typeface="Microsoft JhengHei"/>
+              </a:rPr>
+              <a:t>Research question</a:t>
+            </a:r>
+          </a:p>
+        </p:txBody>
+      </p:sp>
+      <p:sp>
+        <p:nvSpPr>
+          <p:cNvPr id="24" name="TextBox 23"/>
+          <p:cNvSpPr txBox="1"/>
+          <p:nvPr/>
+        </p:nvSpPr>
+        <p:spPr>
+          <a:xfrm>
+            <a:off x="523874" y="5505450"/>
+            <a:ext cx="7524749" cy="714375"/>
+          </a:xfrm>
+          <a:prstGeom prst="rect">
+            <a:avLst/>
+          </a:prstGeom>
+          <a:noFill/>
+        </p:spPr>
+        <p:txBody>
+          <a:bodyPr wrap="square" lIns="0" tIns="0" rIns="0" bIns="0">
+            <a:spAutoFit/>
+          </a:bodyPr>
+          <a:lstStyle/>
+          <a:p>
+            <a:pPr>
+              <a:lnSpc>
+                <a:spcPct val="118000"/>
+              </a:lnSpc>
+              <a:spcBef>
+                <a:spcPts val="0"/>
+              </a:spcBef>
+              <a:spcAft>
+                <a:spcPts val="0"/>
+              </a:spcAft>
+              <a:defRPr sz="2200" b="0">
+                <a:solidFill>
+                  <a:srgbClr val="24384A"/>
+                </a:solidFill>
+                <a:latin typeface="Lato"/>
+              </a:defRPr>
+            </a:pPr>
+            <a:r>
+              <a:rPr>
+                <a:ea typeface="Microsoft JhengHei"/>
+              </a:rPr>
+              <a:t>Arrows show different relationships.</a:t>
+            </a:r>
+          </a:p>
+          <a:p>
+            <a:pPr>
+              <a:lnSpc>
+                <a:spcPct val="118000"/>
+              </a:lnSpc>
+              <a:spcBef>
+                <a:spcPts val="0"/>
+              </a:spcBef>
+              <a:spcAft>
+                <a:spcPts val="0"/>
+              </a:spcAft>
+              <a:defRPr sz="2200" b="0">
+                <a:solidFill>
+                  <a:srgbClr val="24384A"/>
+                </a:solidFill>
+                <a:latin typeface="Lato"/>
+              </a:defRPr>
+            </a:pPr>
+            <a:r>
+              <a:rPr>
+                <a:ea typeface="Microsoft JhengHei"/>
+              </a:rPr>
+              <a:t>A search is not itself a supporting quotation.</a:t>
+            </a:r>
+          </a:p>
+        </p:txBody>
+      </p:sp>
+      <p:sp>
+        <p:nvSpPr>
+          <p:cNvPr id="25" name="Rectangle 24"/>
           <p:cNvSpPr/>
           <p:nvPr/>
         </p:nvSpPr>
@@ -12364,7 +13681,7 @@
       </p:sp>
       <p:sp>
         <p:nvSpPr>
-          <p:cNvPr id="5" name="TextBox 4"/>
+          <p:cNvPr id="26" name="TextBox 25"/>
           <p:cNvSpPr txBox="1"/>
           <p:nvPr/>
         </p:nvSpPr>
@@ -12405,152 +13722,37 @@
               <a:rPr>
                 <a:ea typeface="Microsoft JhengHei"/>
               </a:rPr>
-              <a:t>15</a:t>
-            </a:r>
-          </a:p>
-        </p:txBody>
-      </p:sp>
-      <p:pic>
-        <p:nvPicPr>
-          <p:cNvPr id="6" name="Picture 5" descr="graph.png"/>
-          <p:cNvPicPr>
-            <a:picLocks noChangeAspect="1"/>
-          </p:cNvPicPr>
-          <p:nvPr/>
-        </p:nvPicPr>
-        <p:blipFill>
-          <a:blip r:embed="rId3"/>
-          <a:stretch>
-            <a:fillRect/>
-          </a:stretch>
-        </p:blipFill>
-        <p:spPr>
-          <a:xfrm>
-            <a:off x="495299" y="2057400"/>
-            <a:ext cx="6477000" cy="3600450"/>
-          </a:xfrm>
-          <a:prstGeom prst="rect">
-            <a:avLst/>
-          </a:prstGeom>
-        </p:spPr>
-      </p:pic>
-      <p:sp>
-        <p:nvSpPr>
-          <p:cNvPr id="7" name="TextBox 6"/>
-          <p:cNvSpPr txBox="1"/>
-          <p:nvPr/>
-        </p:nvSpPr>
-        <p:spPr>
-          <a:xfrm>
-            <a:off x="523874" y="1762125"/>
-            <a:ext cx="6477000" cy="276225"/>
-          </a:xfrm>
-          <a:prstGeom prst="rect">
-            <a:avLst/>
-          </a:prstGeom>
-          <a:noFill/>
-        </p:spPr>
-        <p:txBody>
-          <a:bodyPr wrap="square" lIns="0" tIns="0" rIns="0" bIns="0">
-            <a:spAutoFit/>
-          </a:bodyPr>
-          <a:lstStyle/>
-          <a:p>
-            <a:pPr>
-              <a:lnSpc>
-                <a:spcPct val="118000"/>
-              </a:lnSpc>
-              <a:spcBef>
-                <a:spcPts val="0"/>
-              </a:spcBef>
-              <a:spcAft>
-                <a:spcPts val="0"/>
-              </a:spcAft>
-              <a:defRPr sz="1300" b="0">
-                <a:solidFill>
-                  <a:srgbClr val="526778"/>
-                </a:solidFill>
-                <a:latin typeface="Lato"/>
-              </a:defRPr>
-            </a:pPr>
-            <a:r>
-              <a:rPr>
-                <a:ea typeface="Microsoft JhengHei"/>
-              </a:rPr>
-              <a:t>Interface</a:t>
-            </a:r>
-          </a:p>
-        </p:txBody>
-      </p:sp>
-      <p:sp>
-        <p:nvSpPr>
-          <p:cNvPr id="8" name="TextBox 7"/>
-          <p:cNvSpPr txBox="1"/>
-          <p:nvPr/>
-        </p:nvSpPr>
-        <p:spPr>
-          <a:xfrm>
-            <a:off x="7477125" y="1762125"/>
-            <a:ext cx="4048124" cy="276225"/>
-          </a:xfrm>
-          <a:prstGeom prst="rect">
-            <a:avLst/>
-          </a:prstGeom>
-          <a:noFill/>
-        </p:spPr>
-        <p:txBody>
-          <a:bodyPr wrap="square" lIns="0" tIns="0" rIns="0" bIns="0">
-            <a:spAutoFit/>
-          </a:bodyPr>
-          <a:lstStyle/>
-          <a:p>
-            <a:pPr>
-              <a:lnSpc>
-                <a:spcPct val="118000"/>
-              </a:lnSpc>
-              <a:spcBef>
-                <a:spcPts val="0"/>
-              </a:spcBef>
-              <a:spcAft>
-                <a:spcPts val="0"/>
-              </a:spcAft>
-              <a:defRPr sz="1300" b="0">
-                <a:solidFill>
-                  <a:srgbClr val="526778"/>
-                </a:solidFill>
-                <a:latin typeface="Lato"/>
-              </a:defRPr>
-            </a:pPr>
-            <a:r>
-              <a:rPr>
-                <a:ea typeface="Microsoft JhengHei"/>
-              </a:rPr>
-              <a:t>How to use it</a:t>
-            </a:r>
-          </a:p>
-        </p:txBody>
-      </p:sp>
-      <p:sp>
-        <p:nvSpPr>
-          <p:cNvPr id="9" name="Rectangle 8"/>
+              <a:t>16</a:t>
+            </a:r>
+          </a:p>
+        </p:txBody>
+      </p:sp>
+      <p:sp>
+        <p:nvSpPr>
+          <p:cNvPr id="27" name="AccentRule">
+            <a:extLst>
+              <a:ext uri="{FF2B5EF4-FFF2-40B4-BE49-F238E27FC236}">
+                <a16:creationId xmlns:a16="http://schemas.microsoft.com/office/drawing/2014/main" id="{C33539E3-C184-4764-8EC3-D6F6551CF7D7}"/>
+              </a:ext>
+            </a:extLst>
+          </p:cNvPr>
           <p:cNvSpPr/>
           <p:nvPr/>
         </p:nvSpPr>
         <p:spPr>
           <a:xfrm>
-            <a:off x="7477125" y="2190750"/>
-            <a:ext cx="4190999" cy="762000"/>
+            <a:off x="495300" y="596900"/>
+            <a:ext cx="584200" cy="38100"/>
           </a:xfrm>
           <a:prstGeom prst="rect">
             <a:avLst/>
           </a:prstGeom>
           <a:solidFill>
-            <a:srgbClr val="FFFFFF"/>
+            <a:srgbClr val="126B85"/>
           </a:solidFill>
-          <a:ln w="12700">
-            <a:solidFill>
-              <a:srgbClr val="24384A"/>
-            </a:solidFill>
+          <a:ln w="9525" cap="flat" cmpd="sng" algn="ctr">
+            <a:noFill/>
+            <a:prstDash val="solid"/>
           </a:ln>
         </p:spPr>
         <p:style>
@@ -12568,463 +13770,11 @@
           </a:fontRef>
         </p:style>
         <p:txBody>
-          <a:bodyPr rtlCol="0" anchor="ctr"/>
-          <a:lstStyle/>
-          <a:p>
-            <a:pPr algn="ctr"/>
-            <a:endParaRPr/>
-          </a:p>
-        </p:txBody>
-      </p:sp>
-      <p:sp>
-        <p:nvSpPr>
-          <p:cNvPr id="10" name="TextBox 9"/>
-          <p:cNvSpPr txBox="1"/>
-          <p:nvPr/>
-        </p:nvSpPr>
-        <p:spPr>
-          <a:xfrm>
-            <a:off x="7620000" y="2333625"/>
-            <a:ext cx="3905249" cy="571500"/>
-          </a:xfrm>
-          <a:prstGeom prst="rect">
-            <a:avLst/>
-          </a:prstGeom>
-          <a:noFill/>
-        </p:spPr>
-        <p:txBody>
-          <a:bodyPr wrap="square" lIns="0" tIns="0" rIns="0" bIns="0">
-            <a:spAutoFit/>
-          </a:bodyPr>
-          <a:lstStyle/>
-          <a:p>
-            <a:pPr>
-              <a:lnSpc>
-                <a:spcPct val="118000"/>
-              </a:lnSpc>
-              <a:spcBef>
-                <a:spcPts val="0"/>
-              </a:spcBef>
-              <a:spcAft>
-                <a:spcPts val="0"/>
-              </a:spcAft>
-              <a:defRPr sz="1900" b="1">
-                <a:solidFill>
-                  <a:srgbClr val="24384A"/>
-                </a:solidFill>
-                <a:latin typeface="Lato"/>
-              </a:defRPr>
-            </a:pPr>
-            <a:r>
-              <a:rPr>
-                <a:ea typeface="Microsoft JhengHei"/>
-              </a:rPr>
-              <a:t>Select a research question</a:t>
-            </a:r>
-          </a:p>
-        </p:txBody>
-      </p:sp>
-      <p:cxnSp>
-        <p:nvCxnSpPr>
-          <p:cNvPr id="11" name="Connector 10"/>
-          <p:cNvCxnSpPr/>
-          <p:nvPr/>
-        </p:nvCxnSpPr>
-        <p:spPr>
-          <a:xfrm>
-            <a:off x="9572625" y="3028950"/>
-            <a:ext cx="0" cy="400050"/>
-          </a:xfrm>
-          <a:prstGeom prst="line">
-            <a:avLst/>
-          </a:prstGeom>
-          <a:ln w="19050">
-            <a:solidFill>
-              <a:srgbClr val="526778"/>
-            </a:solidFill>
-            <a:tailEnd type="triangle"/>
-          </a:ln>
-        </p:spPr>
-        <p:style>
-          <a:lnRef idx="2">
-            <a:schemeClr val="accent1"/>
-          </a:lnRef>
-          <a:fillRef idx="0">
-            <a:schemeClr val="accent1"/>
-          </a:fillRef>
-          <a:effectRef idx="1">
-            <a:schemeClr val="accent1"/>
-          </a:effectRef>
-          <a:fontRef idx="minor">
-            <a:schemeClr val="tx1"/>
-          </a:fontRef>
-        </p:style>
-      </p:cxnSp>
-      <p:sp>
-        <p:nvSpPr>
-          <p:cNvPr id="12" name="Rectangle 11"/>
-          <p:cNvSpPr/>
-          <p:nvPr/>
-        </p:nvSpPr>
-        <p:spPr>
-          <a:xfrm>
-            <a:off x="7477125" y="3590925"/>
-            <a:ext cx="4190999" cy="762000"/>
-          </a:xfrm>
-          <a:prstGeom prst="rect">
-            <a:avLst/>
-          </a:prstGeom>
-          <a:solidFill>
-            <a:srgbClr val="FFFFFF"/>
-          </a:solidFill>
-          <a:ln w="12700">
-            <a:solidFill>
-              <a:srgbClr val="24384A"/>
-            </a:solidFill>
-          </a:ln>
-        </p:spPr>
-        <p:style>
-          <a:lnRef idx="1">
-            <a:schemeClr val="accent1"/>
-          </a:lnRef>
-          <a:fillRef idx="3">
-            <a:schemeClr val="accent1"/>
-          </a:fillRef>
-          <a:effectRef idx="2">
-            <a:schemeClr val="accent1"/>
-          </a:effectRef>
-          <a:fontRef idx="minor">
-            <a:schemeClr val="lt1"/>
-          </a:fontRef>
-        </p:style>
-        <p:txBody>
-          <a:bodyPr rtlCol="0" anchor="ctr"/>
-          <a:lstStyle/>
-          <a:p>
-            <a:pPr algn="ctr"/>
-            <a:endParaRPr/>
-          </a:p>
-        </p:txBody>
-      </p:sp>
-      <p:sp>
-        <p:nvSpPr>
-          <p:cNvPr id="13" name="TextBox 12"/>
-          <p:cNvSpPr txBox="1"/>
-          <p:nvPr/>
-        </p:nvSpPr>
-        <p:spPr>
-          <a:xfrm>
-            <a:off x="7620000" y="3733799"/>
-            <a:ext cx="3905249" cy="571500"/>
-          </a:xfrm>
-          <a:prstGeom prst="rect">
-            <a:avLst/>
-          </a:prstGeom>
-          <a:noFill/>
-        </p:spPr>
-        <p:txBody>
-          <a:bodyPr wrap="square" lIns="0" tIns="0" rIns="0" bIns="0">
-            <a:spAutoFit/>
-          </a:bodyPr>
-          <a:lstStyle/>
-          <a:p>
-            <a:pPr>
-              <a:lnSpc>
-                <a:spcPct val="118000"/>
-              </a:lnSpc>
-              <a:spcBef>
-                <a:spcPts val="0"/>
-              </a:spcBef>
-              <a:spcAft>
-                <a:spcPts val="0"/>
-              </a:spcAft>
-              <a:defRPr sz="1900" b="1">
-                <a:solidFill>
-                  <a:srgbClr val="24384A"/>
-                </a:solidFill>
-                <a:latin typeface="Lato"/>
-              </a:defRPr>
-            </a:pPr>
-            <a:r>
-              <a:rPr>
-                <a:ea typeface="Microsoft JhengHei"/>
-              </a:rPr>
-              <a:t>Inspect linked records</a:t>
-            </a:r>
-          </a:p>
-        </p:txBody>
-      </p:sp>
-      <p:cxnSp>
-        <p:nvCxnSpPr>
-          <p:cNvPr id="14" name="Connector 13"/>
-          <p:cNvCxnSpPr/>
-          <p:nvPr/>
-        </p:nvCxnSpPr>
-        <p:spPr>
-          <a:xfrm>
-            <a:off x="9572625" y="4419600"/>
-            <a:ext cx="0" cy="371475"/>
-          </a:xfrm>
-          <a:prstGeom prst="line">
-            <a:avLst/>
-          </a:prstGeom>
-          <a:ln w="19050">
-            <a:solidFill>
-              <a:srgbClr val="526778"/>
-            </a:solidFill>
-            <a:tailEnd type="triangle"/>
-          </a:ln>
-        </p:spPr>
-        <p:style>
-          <a:lnRef idx="2">
-            <a:schemeClr val="accent1"/>
-          </a:lnRef>
-          <a:fillRef idx="0">
-            <a:schemeClr val="accent1"/>
-          </a:fillRef>
-          <a:effectRef idx="1">
-            <a:schemeClr val="accent1"/>
-          </a:effectRef>
-          <a:fontRef idx="minor">
-            <a:schemeClr val="tx1"/>
-          </a:fontRef>
-        </p:style>
-      </p:cxnSp>
-      <p:sp>
-        <p:nvSpPr>
-          <p:cNvPr id="15" name="Rectangle 14"/>
-          <p:cNvSpPr/>
-          <p:nvPr/>
-        </p:nvSpPr>
-        <p:spPr>
-          <a:xfrm>
-            <a:off x="7477125" y="4953000"/>
-            <a:ext cx="4190999" cy="762000"/>
-          </a:xfrm>
-          <a:prstGeom prst="rect">
-            <a:avLst/>
-          </a:prstGeom>
-          <a:solidFill>
-            <a:srgbClr val="FFFFFF"/>
-          </a:solidFill>
-          <a:ln w="12700">
-            <a:solidFill>
-              <a:srgbClr val="24384A"/>
-            </a:solidFill>
-          </a:ln>
-        </p:spPr>
-        <p:style>
-          <a:lnRef idx="1">
-            <a:schemeClr val="accent1"/>
-          </a:lnRef>
-          <a:fillRef idx="3">
-            <a:schemeClr val="accent1"/>
-          </a:fillRef>
-          <a:effectRef idx="2">
-            <a:schemeClr val="accent1"/>
-          </a:effectRef>
-          <a:fontRef idx="minor">
-            <a:schemeClr val="lt1"/>
-          </a:fontRef>
-        </p:style>
-        <p:txBody>
-          <a:bodyPr rtlCol="0" anchor="ctr"/>
-          <a:lstStyle/>
-          <a:p>
-            <a:pPr algn="ctr"/>
-            <a:endParaRPr/>
-          </a:p>
-        </p:txBody>
-      </p:sp>
-      <p:sp>
-        <p:nvSpPr>
-          <p:cNvPr id="16" name="TextBox 15"/>
-          <p:cNvSpPr txBox="1"/>
-          <p:nvPr/>
-        </p:nvSpPr>
-        <p:spPr>
-          <a:xfrm>
-            <a:off x="7620000" y="5095875"/>
-            <a:ext cx="3905249" cy="571500"/>
-          </a:xfrm>
-          <a:prstGeom prst="rect">
-            <a:avLst/>
-          </a:prstGeom>
-          <a:noFill/>
-        </p:spPr>
-        <p:txBody>
-          <a:bodyPr wrap="square" lIns="0" tIns="0" rIns="0" bIns="0">
-            <a:spAutoFit/>
-          </a:bodyPr>
-          <a:lstStyle/>
-          <a:p>
-            <a:pPr>
-              <a:lnSpc>
-                <a:spcPct val="118000"/>
-              </a:lnSpc>
-              <a:spcBef>
-                <a:spcPts val="0"/>
-              </a:spcBef>
-              <a:spcAft>
-                <a:spcPts val="0"/>
-              </a:spcAft>
-              <a:defRPr sz="1900" b="1">
-                <a:solidFill>
-                  <a:srgbClr val="24384A"/>
-                </a:solidFill>
-                <a:latin typeface="Lato"/>
-              </a:defRPr>
-            </a:pPr>
-            <a:r>
-              <a:rPr>
-                <a:ea typeface="Microsoft JhengHei"/>
-              </a:rPr>
-              <a:t>Accept or reject a record</a:t>
-            </a:r>
-          </a:p>
-        </p:txBody>
-      </p:sp>
-      <p:sp>
-        <p:nvSpPr>
-          <p:cNvPr id="17" name="TextBox 16"/>
-          <p:cNvSpPr txBox="1"/>
-          <p:nvPr/>
-        </p:nvSpPr>
-        <p:spPr>
-          <a:xfrm>
-            <a:off x="523874" y="5924550"/>
-            <a:ext cx="6477000" cy="495299"/>
-          </a:xfrm>
-          <a:prstGeom prst="rect">
-            <a:avLst/>
-          </a:prstGeom>
-          <a:noFill/>
-        </p:spPr>
-        <p:txBody>
-          <a:bodyPr wrap="square" lIns="0" tIns="0" rIns="0" bIns="0">
-            <a:spAutoFit/>
-          </a:bodyPr>
-          <a:lstStyle/>
-          <a:p>
-            <a:pPr>
-              <a:lnSpc>
-                <a:spcPct val="118000"/>
-              </a:lnSpc>
-              <a:spcBef>
-                <a:spcPts val="0"/>
-              </a:spcBef>
-              <a:spcAft>
-                <a:spcPts val="0"/>
-              </a:spcAft>
-              <a:defRPr sz="2100" b="0">
-                <a:solidFill>
-                  <a:srgbClr val="24384A"/>
-                </a:solidFill>
-                <a:latin typeface="Lato"/>
-              </a:defRPr>
-            </a:pPr>
-            <a:r>
-              <a:rPr>
-                <a:ea typeface="Microsoft JhengHei"/>
-              </a:rPr>
-              <a:t>Show exploration adds recorded tool activity.</a:t>
-            </a:r>
-          </a:p>
-        </p:txBody>
-      </p:sp>
-      <p:sp>
-        <p:nvSpPr>
-          <p:cNvPr id="18" name="TextBox 17"/>
-          <p:cNvSpPr txBox="1"/>
-          <p:nvPr/>
-        </p:nvSpPr>
-        <p:spPr>
-          <a:xfrm>
-            <a:off x="7477125" y="5924550"/>
-            <a:ext cx="4190999" cy="485775"/>
-          </a:xfrm>
-          <a:prstGeom prst="rect">
-            <a:avLst/>
-          </a:prstGeom>
-          <a:noFill/>
-        </p:spPr>
-        <p:txBody>
-          <a:bodyPr wrap="square" lIns="0" tIns="0" rIns="0" bIns="0">
-            <a:spAutoFit/>
-          </a:bodyPr>
-          <a:lstStyle/>
-          <a:p>
-            <a:pPr>
-              <a:lnSpc>
-                <a:spcPct val="118000"/>
-              </a:lnSpc>
-              <a:spcBef>
-                <a:spcPts val="0"/>
-              </a:spcBef>
-              <a:spcAft>
-                <a:spcPts val="0"/>
-              </a:spcAft>
-              <a:defRPr sz="1700" b="0">
-                <a:solidFill>
-                  <a:srgbClr val="526778"/>
-                </a:solidFill>
-                <a:latin typeface="Lato"/>
-              </a:defRPr>
-            </a:pPr>
-            <a:r>
-              <a:rPr>
-                <a:ea typeface="Microsoft JhengHei"/>
-              </a:rPr>
-              <a:t>Filtering the view does not delete records.</a:t>
-            </a:r>
-          </a:p>
-        </p:txBody>
-      </p:sp>
-      <p:sp>
-        <p:nvSpPr>
-          <p:cNvPr id="19" name="TextBox 18"/>
-          <p:cNvSpPr txBox="1"/>
-          <p:nvPr/>
-        </p:nvSpPr>
-        <p:spPr>
-          <a:xfrm>
-            <a:off x="523874" y="6515100"/>
-            <a:ext cx="10477500" cy="200025"/>
-          </a:xfrm>
-          <a:prstGeom prst="rect">
-            <a:avLst/>
-          </a:prstGeom>
-          <a:noFill/>
-        </p:spPr>
-        <p:txBody>
-          <a:bodyPr wrap="square" lIns="0" tIns="0" rIns="0" bIns="0">
-            <a:spAutoFit/>
-          </a:bodyPr>
-          <a:lstStyle/>
-          <a:p>
-            <a:pPr>
-              <a:lnSpc>
-                <a:spcPct val="118000"/>
-              </a:lnSpc>
-              <a:spcBef>
-                <a:spcPts val="0"/>
-              </a:spcBef>
-              <a:spcAft>
-                <a:spcPts val="0"/>
-              </a:spcAft>
-              <a:defRPr sz="1000" b="0">
-                <a:solidFill>
-                  <a:srgbClr val="526778"/>
-                </a:solidFill>
-                <a:latin typeface="Lato"/>
-              </a:defRPr>
-            </a:pPr>
-            <a:r>
-              <a:rPr>
-                <a:ea typeface="Microsoft JhengHei"/>
-              </a:rPr>
-              <a:t>Screenshot: source passages hidden where applicable. Diagram: schematic.</a:t>
-            </a:r>
+          <a:bodyPr vertOverflow="clip" horzOverflow="clip" rtlCol="0" anchor="t"/>
+          <a:lstStyle/>
+          <a:p>
+            <a:pPr algn="l"/>
+            <a:endParaRPr lang="zh-TW" altLang="en-US"/>
           </a:p>
         </p:txBody>
       </p:sp>
@@ -13096,7 +13846,7 @@
               <a:rPr>
                 <a:ea typeface="Microsoft JhengHei"/>
               </a:rPr>
-              <a:t>Graph relationships · schematic</a:t>
+              <a:t>Provenance</a:t>
             </a:r>
           </a:p>
         </p:txBody>
@@ -13110,7 +13860,7 @@
         <p:spPr>
           <a:xfrm>
             <a:off x="495299" y="742950"/>
-            <a:ext cx="11144250" cy="1047749"/>
+            <a:ext cx="11144250" cy="952500"/>
           </a:xfrm>
           <a:prstGeom prst="rect">
             <a:avLst/>
@@ -13144,67 +13894,21 @@
               <a:rPr>
                 <a:ea typeface="Microsoft JhengHei"/>
               </a:rPr>
-              <a:t>Why a query points to a proposal</a:t>
-            </a:r>
-          </a:p>
-        </p:txBody>
-      </p:sp>
-      <p:sp>
-        <p:nvSpPr>
-          <p:cNvPr id="4" name="Oval 3"/>
-          <p:cNvSpPr/>
-          <p:nvPr/>
-        </p:nvSpPr>
-        <p:spPr>
-          <a:xfrm>
-            <a:off x="523874" y="2000250"/>
-            <a:ext cx="2381250" cy="952500"/>
-          </a:xfrm>
-          <a:prstGeom prst="ellipse">
-            <a:avLst/>
-          </a:prstGeom>
-          <a:solidFill>
-            <a:srgbClr val="E8F3FA"/>
-          </a:solidFill>
-          <a:ln w="12700">
-            <a:solidFill>
-              <a:srgbClr val="24384A"/>
-            </a:solidFill>
-          </a:ln>
-        </p:spPr>
-        <p:style>
-          <a:lnRef idx="1">
-            <a:schemeClr val="accent1"/>
-          </a:lnRef>
-          <a:fillRef idx="3">
-            <a:schemeClr val="accent1"/>
-          </a:fillRef>
-          <a:effectRef idx="2">
-            <a:schemeClr val="accent1"/>
-          </a:effectRef>
-          <a:fontRef idx="minor">
-            <a:schemeClr val="lt1"/>
-          </a:fontRef>
-        </p:style>
-        <p:txBody>
-          <a:bodyPr rtlCol="0" anchor="ctr"/>
-          <a:lstStyle/>
-          <a:p>
-            <a:pPr algn="ctr"/>
-            <a:endParaRPr/>
-          </a:p>
-        </p:txBody>
-      </p:sp>
-      <p:sp>
-        <p:nvSpPr>
-          <p:cNvPr id="5" name="TextBox 4"/>
+              <a:t>Why use an evidence graph?</a:t>
+            </a:r>
+          </a:p>
+        </p:txBody>
+      </p:sp>
+      <p:sp>
+        <p:nvSpPr>
+          <p:cNvPr id="4" name="TextBox 3"/>
           <p:cNvSpPr txBox="1"/>
           <p:nvPr/>
         </p:nvSpPr>
         <p:spPr>
           <a:xfrm>
-            <a:off x="714375" y="2257425"/>
-            <a:ext cx="2000250" cy="714375"/>
+            <a:off x="523874" y="1924049"/>
+            <a:ext cx="3190875" cy="752475"/>
           </a:xfrm>
           <a:prstGeom prst="rect">
             <a:avLst/>
@@ -13227,9 +13931,9 @@
               <a:spcAft>
                 <a:spcPts val="0"/>
               </a:spcAft>
-              <a:defRPr sz="2200" b="1">
-                <a:solidFill>
-                  <a:srgbClr val="24384A"/>
+              <a:defRPr sz="2500" b="1">
+                <a:solidFill>
+                  <a:srgbClr val="146C68"/>
                 </a:solidFill>
                 <a:latin typeface="Lato"/>
               </a:defRPr>
@@ -13238,67 +13942,21 @@
               <a:rPr>
                 <a:ea typeface="Microsoft JhengHei"/>
               </a:rPr>
-              <a:t>Witness</a:t>
-            </a:r>
-          </a:p>
-        </p:txBody>
-      </p:sp>
-      <p:sp>
-        <p:nvSpPr>
-          <p:cNvPr id="6" name="Rectangle 5"/>
-          <p:cNvSpPr/>
-          <p:nvPr/>
-        </p:nvSpPr>
-        <p:spPr>
-          <a:xfrm>
-            <a:off x="3857625" y="2000250"/>
-            <a:ext cx="2381250" cy="952500"/>
-          </a:xfrm>
-          <a:prstGeom prst="rect">
-            <a:avLst/>
-          </a:prstGeom>
-          <a:solidFill>
-            <a:srgbClr val="E8F3FA"/>
-          </a:solidFill>
-          <a:ln w="12700">
-            <a:solidFill>
-              <a:srgbClr val="24384A"/>
-            </a:solidFill>
-          </a:ln>
-        </p:spPr>
-        <p:style>
-          <a:lnRef idx="1">
-            <a:schemeClr val="accent1"/>
-          </a:lnRef>
-          <a:fillRef idx="3">
-            <a:schemeClr val="accent1"/>
-          </a:fillRef>
-          <a:effectRef idx="2">
-            <a:schemeClr val="accent1"/>
-          </a:effectRef>
-          <a:fontRef idx="minor">
-            <a:schemeClr val="lt1"/>
-          </a:fontRef>
-        </p:style>
-        <p:txBody>
-          <a:bodyPr rtlCol="0" anchor="ctr"/>
-          <a:lstStyle/>
-          <a:p>
-            <a:pPr algn="ctr"/>
-            <a:endParaRPr/>
-          </a:p>
-        </p:txBody>
-      </p:sp>
-      <p:sp>
-        <p:nvSpPr>
-          <p:cNvPr id="7" name="TextBox 6"/>
+              <a:t>Trace a proposal</a:t>
+            </a:r>
+          </a:p>
+        </p:txBody>
+      </p:sp>
+      <p:sp>
+        <p:nvSpPr>
+          <p:cNvPr id="5" name="TextBox 4"/>
           <p:cNvSpPr txBox="1"/>
           <p:nvPr/>
         </p:nvSpPr>
         <p:spPr>
           <a:xfrm>
-            <a:off x="4048124" y="2257425"/>
-            <a:ext cx="2000250" cy="714375"/>
+            <a:off x="4095750" y="1924049"/>
+            <a:ext cx="7524749" cy="885825"/>
           </a:xfrm>
           <a:prstGeom prst="rect">
             <a:avLst/>
@@ -13321,7 +13979,7 @@
               <a:spcAft>
                 <a:spcPts val="0"/>
               </a:spcAft>
-              <a:defRPr sz="2200" b="1">
+              <a:defRPr sz="2400" b="0">
                 <a:solidFill>
                   <a:srgbClr val="24384A"/>
                 </a:solidFill>
@@ -13332,67 +13990,21 @@
               <a:rPr>
                 <a:ea typeface="Microsoft JhengHei"/>
               </a:rPr>
-              <a:t>Passage</a:t>
-            </a:r>
-          </a:p>
-        </p:txBody>
-      </p:sp>
-      <p:sp>
-        <p:nvSpPr>
-          <p:cNvPr id="8" name="Diamond 7"/>
-          <p:cNvSpPr/>
-          <p:nvPr/>
-        </p:nvSpPr>
-        <p:spPr>
-          <a:xfrm>
-            <a:off x="7667624" y="1809750"/>
-            <a:ext cx="2952750" cy="1476375"/>
-          </a:xfrm>
-          <a:prstGeom prst="diamond">
-            <a:avLst/>
-          </a:prstGeom>
-          <a:solidFill>
-            <a:srgbClr val="E8F4F1"/>
-          </a:solidFill>
-          <a:ln w="12700">
-            <a:solidFill>
-              <a:srgbClr val="24384A"/>
-            </a:solidFill>
-          </a:ln>
-        </p:spPr>
-        <p:style>
-          <a:lnRef idx="1">
-            <a:schemeClr val="accent1"/>
-          </a:lnRef>
-          <a:fillRef idx="3">
-            <a:schemeClr val="accent1"/>
-          </a:fillRef>
-          <a:effectRef idx="2">
-            <a:schemeClr val="accent1"/>
-          </a:effectRef>
-          <a:fontRef idx="minor">
-            <a:schemeClr val="lt1"/>
-          </a:fontRef>
-        </p:style>
-        <p:txBody>
-          <a:bodyPr rtlCol="0" anchor="ctr"/>
-          <a:lstStyle/>
-          <a:p>
-            <a:pPr algn="ctr"/>
-            <a:endParaRPr/>
-          </a:p>
-        </p:txBody>
-      </p:sp>
-      <p:sp>
-        <p:nvSpPr>
-          <p:cNvPr id="9" name="TextBox 8"/>
+              <a:t>Follow its citations to passages and source records.</a:t>
+            </a:r>
+          </a:p>
+        </p:txBody>
+      </p:sp>
+      <p:sp>
+        <p:nvSpPr>
+          <p:cNvPr id="6" name="TextBox 5"/>
           <p:cNvSpPr txBox="1"/>
           <p:nvPr/>
         </p:nvSpPr>
         <p:spPr>
           <a:xfrm>
-            <a:off x="8486775" y="2257425"/>
-            <a:ext cx="1352550" cy="666750"/>
+            <a:off x="523874" y="2962275"/>
+            <a:ext cx="3190875" cy="752475"/>
           </a:xfrm>
           <a:prstGeom prst="rect">
             <a:avLst/>
@@ -13415,9 +14027,9 @@
               <a:spcAft>
                 <a:spcPts val="0"/>
               </a:spcAft>
-              <a:defRPr sz="1700" b="1">
-                <a:solidFill>
-                  <a:srgbClr val="24384A"/>
+              <a:defRPr sz="2500" b="1">
+                <a:solidFill>
+                  <a:srgbClr val="146C68"/>
                 </a:solidFill>
                 <a:latin typeface="Lato"/>
               </a:defRPr>
@@ -13426,92 +14038,21 @@
               <a:rPr>
                 <a:ea typeface="Microsoft JhengHei"/>
               </a:rPr>
-              <a:t>Claim /</a:t>
-            </a:r>
-          </a:p>
-          <a:p>
-            <a:pPr>
-              <a:lnSpc>
-                <a:spcPct val="118000"/>
-              </a:lnSpc>
-              <a:spcBef>
-                <a:spcPts val="0"/>
-              </a:spcBef>
-              <a:spcAft>
-                <a:spcPts val="0"/>
-              </a:spcAft>
-              <a:defRPr sz="1700" b="1">
-                <a:solidFill>
-                  <a:srgbClr val="24384A"/>
-                </a:solidFill>
-                <a:latin typeface="Lato"/>
-              </a:defRPr>
-            </a:pPr>
-            <a:r>
-              <a:rPr>
-                <a:ea typeface="Microsoft JhengHei"/>
-              </a:rPr>
-              <a:t>conjecture</a:t>
-            </a:r>
-          </a:p>
-        </p:txBody>
-      </p:sp>
-      <p:sp>
-        <p:nvSpPr>
-          <p:cNvPr id="10" name="Oval 9"/>
-          <p:cNvSpPr/>
-          <p:nvPr/>
-        </p:nvSpPr>
-        <p:spPr>
-          <a:xfrm>
-            <a:off x="3857625" y="4124325"/>
-            <a:ext cx="2381250" cy="952500"/>
-          </a:xfrm>
-          <a:prstGeom prst="ellipse">
-            <a:avLst/>
-          </a:prstGeom>
-          <a:solidFill>
-            <a:srgbClr val="F0EBF8"/>
-          </a:solidFill>
-          <a:ln w="12700">
-            <a:solidFill>
-              <a:srgbClr val="24384A"/>
-            </a:solidFill>
-          </a:ln>
-        </p:spPr>
-        <p:style>
-          <a:lnRef idx="1">
-            <a:schemeClr val="accent1"/>
-          </a:lnRef>
-          <a:fillRef idx="3">
-            <a:schemeClr val="accent1"/>
-          </a:fillRef>
-          <a:effectRef idx="2">
-            <a:schemeClr val="accent1"/>
-          </a:effectRef>
-          <a:fontRef idx="minor">
-            <a:schemeClr val="lt1"/>
-          </a:fontRef>
-        </p:style>
-        <p:txBody>
-          <a:bodyPr rtlCol="0" anchor="ctr"/>
-          <a:lstStyle/>
-          <a:p>
-            <a:pPr algn="ctr"/>
-            <a:endParaRPr/>
-          </a:p>
-        </p:txBody>
-      </p:sp>
-      <p:sp>
-        <p:nvSpPr>
-          <p:cNvPr id="11" name="TextBox 10"/>
+              <a:t>Inspect dependencies</a:t>
+            </a:r>
+          </a:p>
+        </p:txBody>
+      </p:sp>
+      <p:sp>
+        <p:nvSpPr>
+          <p:cNvPr id="7" name="TextBox 6"/>
           <p:cNvSpPr txBox="1"/>
           <p:nvPr/>
         </p:nvSpPr>
         <p:spPr>
           <a:xfrm>
-            <a:off x="4048124" y="4381500"/>
-            <a:ext cx="2000250" cy="714375"/>
+            <a:off x="4095750" y="2962275"/>
+            <a:ext cx="7524749" cy="885825"/>
           </a:xfrm>
           <a:prstGeom prst="rect">
             <a:avLst/>
@@ -13534,7 +14075,7 @@
               <a:spcAft>
                 <a:spcPts val="0"/>
               </a:spcAft>
-              <a:defRPr sz="2200" b="1">
+              <a:defRPr sz="2400" b="0">
                 <a:solidFill>
                   <a:srgbClr val="24384A"/>
                 </a:solidFill>
@@ -13545,67 +14086,21 @@
               <a:rPr>
                 <a:ea typeface="Microsoft JhengHei"/>
               </a:rPr>
-              <a:t>Query</a:t>
-            </a:r>
-          </a:p>
-        </p:txBody>
-      </p:sp>
-      <p:sp>
-        <p:nvSpPr>
-          <p:cNvPr id="12" name="5-Point Star 11"/>
-          <p:cNvSpPr/>
-          <p:nvPr/>
-        </p:nvSpPr>
-        <p:spPr>
-          <a:xfrm>
-            <a:off x="8858250" y="4333875"/>
-            <a:ext cx="2000250" cy="1285875"/>
-          </a:xfrm>
-          <a:prstGeom prst="star5">
-            <a:avLst/>
-          </a:prstGeom>
-          <a:solidFill>
-            <a:srgbClr val="FBF0DC"/>
-          </a:solidFill>
-          <a:ln w="12700">
-            <a:solidFill>
-              <a:srgbClr val="24384A"/>
-            </a:solidFill>
-          </a:ln>
-        </p:spPr>
-        <p:style>
-          <a:lnRef idx="1">
-            <a:schemeClr val="accent1"/>
-          </a:lnRef>
-          <a:fillRef idx="3">
-            <a:schemeClr val="accent1"/>
-          </a:fillRef>
-          <a:effectRef idx="2">
-            <a:schemeClr val="accent1"/>
-          </a:effectRef>
-          <a:fontRef idx="minor">
-            <a:schemeClr val="lt1"/>
-          </a:fontRef>
-        </p:style>
-        <p:txBody>
-          <a:bodyPr rtlCol="0" anchor="ctr"/>
-          <a:lstStyle/>
-          <a:p>
-            <a:pPr algn="ctr"/>
-            <a:endParaRPr/>
-          </a:p>
-        </p:txBody>
-      </p:sp>
-      <p:sp>
-        <p:nvSpPr>
-          <p:cNvPr id="13" name="TextBox 12"/>
+              <a:t>See recorded quotation, parallel and descent links.</a:t>
+            </a:r>
+          </a:p>
+        </p:txBody>
+      </p:sp>
+      <p:sp>
+        <p:nvSpPr>
+          <p:cNvPr id="8" name="TextBox 7"/>
           <p:cNvSpPr txBox="1"/>
           <p:nvPr/>
         </p:nvSpPr>
         <p:spPr>
           <a:xfrm>
-            <a:off x="9048750" y="4591050"/>
-            <a:ext cx="1619250" cy="1047749"/>
+            <a:off x="523874" y="4000500"/>
+            <a:ext cx="3190875" cy="752475"/>
           </a:xfrm>
           <a:prstGeom prst="rect">
             <a:avLst/>
@@ -13628,63 +14123,32 @@
               <a:spcAft>
                 <a:spcPts val="0"/>
               </a:spcAft>
-              <a:defRPr sz="2200" b="1">
-                <a:solidFill>
-                  <a:srgbClr val="24384A"/>
-                </a:solidFill>
-                <a:latin typeface="Lato"/>
-              </a:defRPr>
-            </a:pPr>
-            <a:endParaRPr/>
-          </a:p>
-        </p:txBody>
-      </p:sp>
-      <p:cxnSp>
-        <p:nvCxnSpPr>
-          <p:cNvPr id="14" name="Connector 13"/>
-          <p:cNvCxnSpPr/>
-          <p:nvPr/>
-        </p:nvCxnSpPr>
-        <p:spPr>
-          <a:xfrm>
-            <a:off x="2952750" y="2476500"/>
-            <a:ext cx="838200" cy="0"/>
-          </a:xfrm>
-          <a:prstGeom prst="line">
-            <a:avLst/>
-          </a:prstGeom>
-          <a:ln w="19050">
-            <a:solidFill>
-              <a:srgbClr val="526778"/>
-            </a:solidFill>
-            <a:tailEnd type="triangle"/>
-          </a:ln>
-        </p:spPr>
-        <p:style>
-          <a:lnRef idx="2">
-            <a:schemeClr val="accent1"/>
-          </a:lnRef>
-          <a:fillRef idx="0">
-            <a:schemeClr val="accent1"/>
-          </a:fillRef>
-          <a:effectRef idx="1">
-            <a:schemeClr val="accent1"/>
-          </a:effectRef>
-          <a:fontRef idx="minor">
-            <a:schemeClr val="tx1"/>
-          </a:fontRef>
-        </p:style>
-      </p:cxnSp>
-      <p:sp>
-        <p:nvSpPr>
-          <p:cNvPr id="15" name="TextBox 14"/>
+              <a:defRPr sz="2500" b="1">
+                <a:solidFill>
+                  <a:srgbClr val="146C68"/>
+                </a:solidFill>
+                <a:latin typeface="Lato"/>
+              </a:defRPr>
+            </a:pPr>
+            <a:r>
+              <a:rPr>
+                <a:ea typeface="Microsoft JhengHei"/>
+              </a:rPr>
+              <a:t>Keep the history</a:t>
+            </a:r>
+          </a:p>
+        </p:txBody>
+      </p:sp>
+      <p:sp>
+        <p:nvSpPr>
+          <p:cNvPr id="9" name="TextBox 8"/>
           <p:cNvSpPr txBox="1"/>
           <p:nvPr/>
         </p:nvSpPr>
         <p:spPr>
           <a:xfrm>
-            <a:off x="2914650" y="2076450"/>
-            <a:ext cx="1047749" cy="314325"/>
+            <a:off x="4095750" y="4000500"/>
+            <a:ext cx="7524749" cy="885825"/>
           </a:xfrm>
           <a:prstGeom prst="rect">
             <a:avLst/>
@@ -13707,7 +14171,7 @@
               <a:spcAft>
                 <a:spcPts val="0"/>
               </a:spcAft>
-              <a:defRPr sz="1400" b="0">
+              <a:defRPr sz="2400" b="0">
                 <a:solidFill>
                   <a:srgbClr val="24384A"/>
                 </a:solidFill>
@@ -13718,57 +14182,21 @@
               <a:rPr>
                 <a:ea typeface="Microsoft JhengHei"/>
               </a:rPr>
-              <a:t>contains</a:t>
-            </a:r>
-          </a:p>
-        </p:txBody>
-      </p:sp>
-      <p:cxnSp>
-        <p:nvCxnSpPr>
-          <p:cNvPr id="16" name="Connector 15"/>
-          <p:cNvCxnSpPr/>
-          <p:nvPr/>
-        </p:nvCxnSpPr>
-        <p:spPr>
-          <a:xfrm>
-            <a:off x="6334125" y="2476500"/>
-            <a:ext cx="1257300" cy="0"/>
-          </a:xfrm>
-          <a:prstGeom prst="line">
-            <a:avLst/>
-          </a:prstGeom>
-          <a:ln w="19050">
-            <a:solidFill>
-              <a:srgbClr val="526778"/>
-            </a:solidFill>
-            <a:tailEnd type="triangle"/>
-          </a:ln>
-        </p:spPr>
-        <p:style>
-          <a:lnRef idx="2">
-            <a:schemeClr val="accent1"/>
-          </a:lnRef>
-          <a:fillRef idx="0">
-            <a:schemeClr val="accent1"/>
-          </a:fillRef>
-          <a:effectRef idx="1">
-            <a:schemeClr val="accent1"/>
-          </a:effectRef>
-          <a:fontRef idx="minor">
-            <a:schemeClr val="tx1"/>
-          </a:fontRef>
-        </p:style>
-      </p:cxnSp>
-      <p:sp>
-        <p:nvSpPr>
-          <p:cNvPr id="17" name="TextBox 16"/>
+              <a:t>Who proposed it, what was checked, what the researcher decided.</a:t>
+            </a:r>
+          </a:p>
+        </p:txBody>
+      </p:sp>
+      <p:sp>
+        <p:nvSpPr>
+          <p:cNvPr id="10" name="TextBox 9"/>
           <p:cNvSpPr txBox="1"/>
           <p:nvPr/>
         </p:nvSpPr>
         <p:spPr>
           <a:xfrm>
-            <a:off x="6486525" y="2076450"/>
-            <a:ext cx="952500" cy="314325"/>
+            <a:off x="523874" y="5276850"/>
+            <a:ext cx="11049000" cy="428625"/>
           </a:xfrm>
           <a:prstGeom prst="rect">
             <a:avLst/>
@@ -13791,9 +14219,9 @@
               <a:spcAft>
                 <a:spcPts val="0"/>
               </a:spcAft>
-              <a:defRPr sz="1400" b="0">
-                <a:solidFill>
-                  <a:srgbClr val="24384A"/>
+              <a:defRPr sz="2400" b="1">
+                <a:solidFill>
+                  <a:srgbClr val="65439A"/>
                 </a:solidFill>
                 <a:latin typeface="Lato"/>
               </a:defRPr>
@@ -13802,57 +14230,21 @@
               <a:rPr>
                 <a:ea typeface="Microsoft JhengHei"/>
               </a:rPr>
-              <a:t>attests</a:t>
-            </a:r>
-          </a:p>
-        </p:txBody>
-      </p:sp>
-      <p:cxnSp>
-        <p:nvCxnSpPr>
-          <p:cNvPr id="18" name="Connector 17"/>
-          <p:cNvCxnSpPr/>
-          <p:nvPr/>
-        </p:nvCxnSpPr>
-        <p:spPr>
-          <a:xfrm flipV="1">
-            <a:off x="6334125" y="3381376"/>
-            <a:ext cx="1524000" cy="1047749"/>
-          </a:xfrm>
-          <a:prstGeom prst="line">
-            <a:avLst/>
-          </a:prstGeom>
-          <a:ln w="19050">
-            <a:solidFill>
-              <a:srgbClr val="526778"/>
-            </a:solidFill>
-            <a:tailEnd type="triangle"/>
-          </a:ln>
-        </p:spPr>
-        <p:style>
-          <a:lnRef idx="2">
-            <a:schemeClr val="accent1"/>
-          </a:lnRef>
-          <a:fillRef idx="0">
-            <a:schemeClr val="accent1"/>
-          </a:fillRef>
-          <a:effectRef idx="1">
-            <a:schemeClr val="accent1"/>
-          </a:effectRef>
-          <a:fontRef idx="minor">
-            <a:schemeClr val="tx1"/>
-          </a:fontRef>
-        </p:style>
-      </p:cxnSp>
-      <p:sp>
-        <p:nvSpPr>
-          <p:cNvPr id="19" name="TextBox 18"/>
+              <a:t>Future work: edge prediction</a:t>
+            </a:r>
+          </a:p>
+        </p:txBody>
+      </p:sp>
+      <p:sp>
+        <p:nvSpPr>
+          <p:cNvPr id="11" name="TextBox 10"/>
           <p:cNvSpPr txBox="1"/>
           <p:nvPr/>
         </p:nvSpPr>
         <p:spPr>
           <a:xfrm>
-            <a:off x="6477000" y="4629150"/>
-            <a:ext cx="1905000" cy="333375"/>
+            <a:off x="523874" y="5810250"/>
+            <a:ext cx="11049000" cy="504825"/>
           </a:xfrm>
           <a:prstGeom prst="rect">
             <a:avLst/>
@@ -13875,9 +14267,9 @@
               <a:spcAft>
                 <a:spcPts val="0"/>
               </a:spcAft>
-              <a:defRPr sz="1700" b="0">
-                <a:solidFill>
-                  <a:srgbClr val="65439A"/>
+              <a:defRPr sz="2300" b="0">
+                <a:solidFill>
+                  <a:srgbClr val="24384A"/>
                 </a:solidFill>
                 <a:latin typeface="Lato"/>
               </a:defRPr>
@@ -13886,267 +14278,14 @@
               <a:rPr>
                 <a:ea typeface="Microsoft JhengHei"/>
               </a:rPr>
-              <a:t>searched for</a:t>
-            </a:r>
-          </a:p>
-        </p:txBody>
-      </p:sp>
-      <p:sp>
-        <p:nvSpPr>
-          <p:cNvPr id="20" name="TextBox 19"/>
-          <p:cNvSpPr txBox="1"/>
-          <p:nvPr/>
-        </p:nvSpPr>
-        <p:spPr>
-          <a:xfrm>
-            <a:off x="6477000" y="5000625"/>
-            <a:ext cx="1714500" cy="333375"/>
-          </a:xfrm>
-          <a:prstGeom prst="rect">
-            <a:avLst/>
-          </a:prstGeom>
-          <a:noFill/>
-        </p:spPr>
-        <p:txBody>
-          <a:bodyPr wrap="square" lIns="0" tIns="0" rIns="0" bIns="0">
-            <a:spAutoFit/>
-          </a:bodyPr>
-          <a:lstStyle/>
-          <a:p>
-            <a:pPr>
-              <a:lnSpc>
-                <a:spcPct val="118000"/>
-              </a:lnSpc>
-              <a:spcBef>
-                <a:spcPts val="0"/>
-              </a:spcBef>
-              <a:spcAft>
-                <a:spcPts val="0"/>
-              </a:spcAft>
-              <a:defRPr sz="1700" b="0">
-                <a:solidFill>
-                  <a:srgbClr val="65439A"/>
-                </a:solidFill>
-                <a:latin typeface="Lato"/>
-              </a:defRPr>
-            </a:pPr>
-            <a:r>
-              <a:rPr>
-                <a:ea typeface="Microsoft JhengHei"/>
-              </a:rPr>
-              <a:t>or tests</a:t>
-            </a:r>
-          </a:p>
-        </p:txBody>
-      </p:sp>
-      <p:cxnSp>
-        <p:nvCxnSpPr>
-          <p:cNvPr id="21" name="Connector 20"/>
-          <p:cNvCxnSpPr/>
-          <p:nvPr/>
-        </p:nvCxnSpPr>
-        <p:spPr>
-          <a:xfrm>
-            <a:off x="9620250" y="3352800"/>
-            <a:ext cx="0" cy="904875"/>
-          </a:xfrm>
-          <a:prstGeom prst="line">
-            <a:avLst/>
-          </a:prstGeom>
-          <a:ln w="19050">
-            <a:solidFill>
-              <a:srgbClr val="526778"/>
-            </a:solidFill>
-            <a:tailEnd type="triangle"/>
-          </a:ln>
-        </p:spPr>
-        <p:style>
-          <a:lnRef idx="2">
-            <a:schemeClr val="accent1"/>
-          </a:lnRef>
-          <a:fillRef idx="0">
-            <a:schemeClr val="accent1"/>
-          </a:fillRef>
-          <a:effectRef idx="1">
-            <a:schemeClr val="accent1"/>
-          </a:effectRef>
-          <a:fontRef idx="minor">
-            <a:schemeClr val="tx1"/>
-          </a:fontRef>
-        </p:style>
-      </p:cxnSp>
-      <p:sp>
-        <p:nvSpPr>
-          <p:cNvPr id="22" name="TextBox 21"/>
-          <p:cNvSpPr txBox="1"/>
-          <p:nvPr/>
-        </p:nvSpPr>
-        <p:spPr>
-          <a:xfrm>
-            <a:off x="9906000" y="3638550"/>
-            <a:ext cx="1524000" cy="333375"/>
-          </a:xfrm>
-          <a:prstGeom prst="rect">
-            <a:avLst/>
-          </a:prstGeom>
-          <a:noFill/>
-        </p:spPr>
-        <p:txBody>
-          <a:bodyPr wrap="square" lIns="0" tIns="0" rIns="0" bIns="0">
-            <a:spAutoFit/>
-          </a:bodyPr>
-          <a:lstStyle/>
-          <a:p>
-            <a:pPr>
-              <a:lnSpc>
-                <a:spcPct val="118000"/>
-              </a:lnSpc>
-              <a:spcBef>
-                <a:spcPts val="0"/>
-              </a:spcBef>
-              <a:spcAft>
-                <a:spcPts val="0"/>
-              </a:spcAft>
-              <a:defRPr sz="1700" b="0">
-                <a:solidFill>
-                  <a:srgbClr val="24384A"/>
-                </a:solidFill>
-                <a:latin typeface="Lato"/>
-              </a:defRPr>
-            </a:pPr>
-            <a:r>
-              <a:rPr>
-                <a:ea typeface="Microsoft JhengHei"/>
-              </a:rPr>
-              <a:t>addresses</a:t>
-            </a:r>
-          </a:p>
-        </p:txBody>
-      </p:sp>
-      <p:sp>
-        <p:nvSpPr>
-          <p:cNvPr id="23" name="TextBox 22"/>
-          <p:cNvSpPr txBox="1"/>
-          <p:nvPr/>
-        </p:nvSpPr>
-        <p:spPr>
-          <a:xfrm>
-            <a:off x="8620125" y="5686425"/>
-            <a:ext cx="2857500" cy="419100"/>
-          </a:xfrm>
-          <a:prstGeom prst="rect">
-            <a:avLst/>
-          </a:prstGeom>
-          <a:noFill/>
-        </p:spPr>
-        <p:txBody>
-          <a:bodyPr wrap="square" lIns="0" tIns="0" rIns="0" bIns="0">
-            <a:spAutoFit/>
-          </a:bodyPr>
-          <a:lstStyle/>
-          <a:p>
-            <a:pPr>
-              <a:lnSpc>
-                <a:spcPct val="118000"/>
-              </a:lnSpc>
-              <a:spcBef>
-                <a:spcPts val="0"/>
-              </a:spcBef>
-              <a:spcAft>
-                <a:spcPts val="0"/>
-              </a:spcAft>
-              <a:defRPr sz="1900" b="1">
-                <a:solidFill>
-                  <a:srgbClr val="80511B"/>
-                </a:solidFill>
-                <a:latin typeface="Lato"/>
-              </a:defRPr>
-            </a:pPr>
-            <a:r>
-              <a:rPr>
-                <a:ea typeface="Microsoft JhengHei"/>
-              </a:rPr>
-              <a:t>Research question</a:t>
-            </a:r>
-          </a:p>
-        </p:txBody>
-      </p:sp>
-      <p:sp>
-        <p:nvSpPr>
-          <p:cNvPr id="24" name="TextBox 23"/>
-          <p:cNvSpPr txBox="1"/>
-          <p:nvPr/>
-        </p:nvSpPr>
-        <p:spPr>
-          <a:xfrm>
-            <a:off x="523874" y="5505450"/>
-            <a:ext cx="7524749" cy="714375"/>
-          </a:xfrm>
-          <a:prstGeom prst="rect">
-            <a:avLst/>
-          </a:prstGeom>
-          <a:noFill/>
-        </p:spPr>
-        <p:txBody>
-          <a:bodyPr wrap="square" lIns="0" tIns="0" rIns="0" bIns="0">
-            <a:spAutoFit/>
-          </a:bodyPr>
-          <a:lstStyle/>
-          <a:p>
-            <a:pPr>
-              <a:lnSpc>
-                <a:spcPct val="118000"/>
-              </a:lnSpc>
-              <a:spcBef>
-                <a:spcPts val="0"/>
-              </a:spcBef>
-              <a:spcAft>
-                <a:spcPts val="0"/>
-              </a:spcAft>
-              <a:defRPr sz="2200" b="0">
-                <a:solidFill>
-                  <a:srgbClr val="24384A"/>
-                </a:solidFill>
-                <a:latin typeface="Lato"/>
-              </a:defRPr>
-            </a:pPr>
-            <a:r>
-              <a:rPr>
-                <a:ea typeface="Microsoft JhengHei"/>
-              </a:rPr>
-              <a:t>Arrows show different relationships.</a:t>
-            </a:r>
-          </a:p>
-          <a:p>
-            <a:pPr>
-              <a:lnSpc>
-                <a:spcPct val="118000"/>
-              </a:lnSpc>
-              <a:spcBef>
-                <a:spcPts val="0"/>
-              </a:spcBef>
-              <a:spcAft>
-                <a:spcPts val="0"/>
-              </a:spcAft>
-              <a:defRPr sz="2200" b="0">
-                <a:solidFill>
-                  <a:srgbClr val="24384A"/>
-                </a:solidFill>
-                <a:latin typeface="Lato"/>
-              </a:defRPr>
-            </a:pPr>
-            <a:r>
-              <a:rPr>
-                <a:ea typeface="Microsoft JhengHei"/>
-              </a:rPr>
-              <a:t>A search is not itself a supporting quotation.</a:t>
-            </a:r>
-          </a:p>
-        </p:txBody>
-      </p:sp>
-      <p:sp>
-        <p:nvSpPr>
-          <p:cNvPr id="25" name="Rectangle 24"/>
+              <a:t>Suggest a quotation or parallel to investigate, with passages to check.</a:t>
+            </a:r>
+          </a:p>
+        </p:txBody>
+      </p:sp>
+      <p:sp>
+        <p:nvSpPr>
+          <p:cNvPr id="12" name="Rectangle 11"/>
           <p:cNvSpPr/>
           <p:nvPr/>
         </p:nvSpPr>
@@ -14192,7 +14331,7 @@
       </p:sp>
       <p:sp>
         <p:nvSpPr>
-          <p:cNvPr id="26" name="TextBox 25"/>
+          <p:cNvPr id="13" name="TextBox 12"/>
           <p:cNvSpPr txBox="1"/>
           <p:nvPr/>
         </p:nvSpPr>
@@ -14233,8 +14372,59 @@
               <a:rPr>
                 <a:ea typeface="Microsoft JhengHei"/>
               </a:rPr>
-              <a:t>16</a:t>
-            </a:r>
+              <a:t>17</a:t>
+            </a:r>
+          </a:p>
+        </p:txBody>
+      </p:sp>
+      <p:sp>
+        <p:nvSpPr>
+          <p:cNvPr id="14" name="AccentRule">
+            <a:extLst>
+              <a:ext uri="{FF2B5EF4-FFF2-40B4-BE49-F238E27FC236}">
+                <a16:creationId xmlns:a16="http://schemas.microsoft.com/office/drawing/2014/main" id="{AEA4C187-C641-4E50-A382-7F94FA61A5A2}"/>
+              </a:ext>
+            </a:extLst>
+          </p:cNvPr>
+          <p:cNvSpPr/>
+          <p:nvPr/>
+        </p:nvSpPr>
+        <p:spPr>
+          <a:xfrm>
+            <a:off x="495300" y="596900"/>
+            <a:ext cx="584200" cy="38100"/>
+          </a:xfrm>
+          <a:prstGeom prst="rect">
+            <a:avLst/>
+          </a:prstGeom>
+          <a:solidFill>
+            <a:srgbClr val="126B85"/>
+          </a:solidFill>
+          <a:ln w="9525" cap="flat" cmpd="sng" algn="ctr">
+            <a:noFill/>
+            <a:prstDash val="solid"/>
+          </a:ln>
+        </p:spPr>
+        <p:style>
+          <a:lnRef idx="1">
+            <a:schemeClr val="accent1"/>
+          </a:lnRef>
+          <a:fillRef idx="3">
+            <a:schemeClr val="accent1"/>
+          </a:fillRef>
+          <a:effectRef idx="2">
+            <a:schemeClr val="accent1"/>
+          </a:effectRef>
+          <a:fontRef idx="minor">
+            <a:schemeClr val="lt1"/>
+          </a:fontRef>
+        </p:style>
+        <p:txBody>
+          <a:bodyPr vertOverflow="clip" horzOverflow="clip" rtlCol="0" anchor="t"/>
+          <a:lstStyle/>
+          <a:p>
+            <a:pPr algn="l"/>
+            <a:endParaRPr lang="zh-TW" altLang="en-US"/>
           </a:p>
         </p:txBody>
       </p:sp>
@@ -14306,7 +14496,7 @@
               <a:rPr>
                 <a:ea typeface="Microsoft JhengHei"/>
               </a:rPr>
-              <a:t>Provenance</a:t>
+              <a:t>Findings</a:t>
             </a:r>
           </a:p>
         </p:txBody>
@@ -14343,7 +14533,7 @@
               <a:spcAft>
                 <a:spcPts val="0"/>
               </a:spcAft>
-              <a:defRPr sz="3200" b="1">
+              <a:defRPr sz="2900" b="1">
                 <a:solidFill>
                   <a:srgbClr val="24384A"/>
                 </a:solidFill>
@@ -14354,398 +14544,14 @@
               <a:rPr>
                 <a:ea typeface="Microsoft JhengHei"/>
               </a:rPr>
-              <a:t>Why use an evidence graph?</a:t>
-            </a:r>
-          </a:p>
-        </p:txBody>
-      </p:sp>
-      <p:sp>
-        <p:nvSpPr>
-          <p:cNvPr id="4" name="TextBox 3"/>
-          <p:cNvSpPr txBox="1"/>
-          <p:nvPr/>
-        </p:nvSpPr>
-        <p:spPr>
-          <a:xfrm>
-            <a:off x="523874" y="1924049"/>
-            <a:ext cx="3190875" cy="752475"/>
-          </a:xfrm>
-          <a:prstGeom prst="rect">
-            <a:avLst/>
-          </a:prstGeom>
-          <a:noFill/>
-        </p:spPr>
-        <p:txBody>
-          <a:bodyPr wrap="square" lIns="0" tIns="0" rIns="0" bIns="0">
-            <a:spAutoFit/>
-          </a:bodyPr>
-          <a:lstStyle/>
-          <a:p>
-            <a:pPr>
-              <a:lnSpc>
-                <a:spcPct val="118000"/>
-              </a:lnSpc>
-              <a:spcBef>
-                <a:spcPts val="0"/>
-              </a:spcBef>
-              <a:spcAft>
-                <a:spcPts val="0"/>
-              </a:spcAft>
-              <a:defRPr sz="2500" b="1">
-                <a:solidFill>
-                  <a:srgbClr val="146C68"/>
-                </a:solidFill>
-                <a:latin typeface="Lato"/>
-              </a:defRPr>
-            </a:pPr>
-            <a:r>
-              <a:rPr>
-                <a:ea typeface="Microsoft JhengHei"/>
-              </a:rPr>
-              <a:t>Trace a proposal</a:t>
-            </a:r>
-          </a:p>
-        </p:txBody>
-      </p:sp>
-      <p:sp>
-        <p:nvSpPr>
-          <p:cNvPr id="5" name="TextBox 4"/>
-          <p:cNvSpPr txBox="1"/>
-          <p:nvPr/>
-        </p:nvSpPr>
-        <p:spPr>
-          <a:xfrm>
-            <a:off x="4095750" y="1924049"/>
-            <a:ext cx="7524749" cy="885825"/>
-          </a:xfrm>
-          <a:prstGeom prst="rect">
-            <a:avLst/>
-          </a:prstGeom>
-          <a:noFill/>
-        </p:spPr>
-        <p:txBody>
-          <a:bodyPr wrap="square" lIns="0" tIns="0" rIns="0" bIns="0">
-            <a:spAutoFit/>
-          </a:bodyPr>
-          <a:lstStyle/>
-          <a:p>
-            <a:pPr>
-              <a:lnSpc>
-                <a:spcPct val="118000"/>
-              </a:lnSpc>
-              <a:spcBef>
-                <a:spcPts val="0"/>
-              </a:spcBef>
-              <a:spcAft>
-                <a:spcPts val="0"/>
-              </a:spcAft>
-              <a:defRPr sz="2400" b="0">
-                <a:solidFill>
-                  <a:srgbClr val="24384A"/>
-                </a:solidFill>
-                <a:latin typeface="Lato"/>
-              </a:defRPr>
-            </a:pPr>
-            <a:r>
-              <a:rPr>
-                <a:ea typeface="Microsoft JhengHei"/>
-              </a:rPr>
-              <a:t>Follow its citations to passages and source records.</a:t>
-            </a:r>
-          </a:p>
-        </p:txBody>
-      </p:sp>
-      <p:sp>
-        <p:nvSpPr>
-          <p:cNvPr id="6" name="TextBox 5"/>
-          <p:cNvSpPr txBox="1"/>
-          <p:nvPr/>
-        </p:nvSpPr>
-        <p:spPr>
-          <a:xfrm>
-            <a:off x="523874" y="2962275"/>
-            <a:ext cx="3190875" cy="752475"/>
-          </a:xfrm>
-          <a:prstGeom prst="rect">
-            <a:avLst/>
-          </a:prstGeom>
-          <a:noFill/>
-        </p:spPr>
-        <p:txBody>
-          <a:bodyPr wrap="square" lIns="0" tIns="0" rIns="0" bIns="0">
-            <a:spAutoFit/>
-          </a:bodyPr>
-          <a:lstStyle/>
-          <a:p>
-            <a:pPr>
-              <a:lnSpc>
-                <a:spcPct val="118000"/>
-              </a:lnSpc>
-              <a:spcBef>
-                <a:spcPts val="0"/>
-              </a:spcBef>
-              <a:spcAft>
-                <a:spcPts val="0"/>
-              </a:spcAft>
-              <a:defRPr sz="2500" b="1">
-                <a:solidFill>
-                  <a:srgbClr val="146C68"/>
-                </a:solidFill>
-                <a:latin typeface="Lato"/>
-              </a:defRPr>
-            </a:pPr>
-            <a:r>
-              <a:rPr>
-                <a:ea typeface="Microsoft JhengHei"/>
-              </a:rPr>
-              <a:t>Inspect dependencies</a:t>
-            </a:r>
-          </a:p>
-        </p:txBody>
-      </p:sp>
-      <p:sp>
-        <p:nvSpPr>
-          <p:cNvPr id="7" name="TextBox 6"/>
-          <p:cNvSpPr txBox="1"/>
-          <p:nvPr/>
-        </p:nvSpPr>
-        <p:spPr>
-          <a:xfrm>
-            <a:off x="4095750" y="2962275"/>
-            <a:ext cx="7524749" cy="885825"/>
-          </a:xfrm>
-          <a:prstGeom prst="rect">
-            <a:avLst/>
-          </a:prstGeom>
-          <a:noFill/>
-        </p:spPr>
-        <p:txBody>
-          <a:bodyPr wrap="square" lIns="0" tIns="0" rIns="0" bIns="0">
-            <a:spAutoFit/>
-          </a:bodyPr>
-          <a:lstStyle/>
-          <a:p>
-            <a:pPr>
-              <a:lnSpc>
-                <a:spcPct val="118000"/>
-              </a:lnSpc>
-              <a:spcBef>
-                <a:spcPts val="0"/>
-              </a:spcBef>
-              <a:spcAft>
-                <a:spcPts val="0"/>
-              </a:spcAft>
-              <a:defRPr sz="2400" b="0">
-                <a:solidFill>
-                  <a:srgbClr val="24384A"/>
-                </a:solidFill>
-                <a:latin typeface="Lato"/>
-              </a:defRPr>
-            </a:pPr>
-            <a:r>
-              <a:rPr>
-                <a:ea typeface="Microsoft JhengHei"/>
-              </a:rPr>
-              <a:t>See recorded quotation, parallel and descent links.</a:t>
-            </a:r>
-          </a:p>
-        </p:txBody>
-      </p:sp>
-      <p:sp>
-        <p:nvSpPr>
-          <p:cNvPr id="8" name="TextBox 7"/>
-          <p:cNvSpPr txBox="1"/>
-          <p:nvPr/>
-        </p:nvSpPr>
-        <p:spPr>
-          <a:xfrm>
-            <a:off x="523874" y="4000500"/>
-            <a:ext cx="3190875" cy="752475"/>
-          </a:xfrm>
-          <a:prstGeom prst="rect">
-            <a:avLst/>
-          </a:prstGeom>
-          <a:noFill/>
-        </p:spPr>
-        <p:txBody>
-          <a:bodyPr wrap="square" lIns="0" tIns="0" rIns="0" bIns="0">
-            <a:spAutoFit/>
-          </a:bodyPr>
-          <a:lstStyle/>
-          <a:p>
-            <a:pPr>
-              <a:lnSpc>
-                <a:spcPct val="118000"/>
-              </a:lnSpc>
-              <a:spcBef>
-                <a:spcPts val="0"/>
-              </a:spcBef>
-              <a:spcAft>
-                <a:spcPts val="0"/>
-              </a:spcAft>
-              <a:defRPr sz="2500" b="1">
-                <a:solidFill>
-                  <a:srgbClr val="146C68"/>
-                </a:solidFill>
-                <a:latin typeface="Lato"/>
-              </a:defRPr>
-            </a:pPr>
-            <a:r>
-              <a:rPr>
-                <a:ea typeface="Microsoft JhengHei"/>
-              </a:rPr>
-              <a:t>Keep the history</a:t>
-            </a:r>
-          </a:p>
-        </p:txBody>
-      </p:sp>
-      <p:sp>
-        <p:nvSpPr>
-          <p:cNvPr id="9" name="TextBox 8"/>
-          <p:cNvSpPr txBox="1"/>
-          <p:nvPr/>
-        </p:nvSpPr>
-        <p:spPr>
-          <a:xfrm>
-            <a:off x="4095750" y="4000500"/>
-            <a:ext cx="7524749" cy="885825"/>
-          </a:xfrm>
-          <a:prstGeom prst="rect">
-            <a:avLst/>
-          </a:prstGeom>
-          <a:noFill/>
-        </p:spPr>
-        <p:txBody>
-          <a:bodyPr wrap="square" lIns="0" tIns="0" rIns="0" bIns="0">
-            <a:spAutoFit/>
-          </a:bodyPr>
-          <a:lstStyle/>
-          <a:p>
-            <a:pPr>
-              <a:lnSpc>
-                <a:spcPct val="118000"/>
-              </a:lnSpc>
-              <a:spcBef>
-                <a:spcPts val="0"/>
-              </a:spcBef>
-              <a:spcAft>
-                <a:spcPts val="0"/>
-              </a:spcAft>
-              <a:defRPr sz="2400" b="0">
-                <a:solidFill>
-                  <a:srgbClr val="24384A"/>
-                </a:solidFill>
-                <a:latin typeface="Lato"/>
-              </a:defRPr>
-            </a:pPr>
-            <a:r>
-              <a:rPr>
-                <a:ea typeface="Microsoft JhengHei"/>
-              </a:rPr>
-              <a:t>Who proposed it, what was checked, what the researcher decided.</a:t>
-            </a:r>
-          </a:p>
-        </p:txBody>
-      </p:sp>
-      <p:sp>
-        <p:nvSpPr>
-          <p:cNvPr id="10" name="TextBox 9"/>
-          <p:cNvSpPr txBox="1"/>
-          <p:nvPr/>
-        </p:nvSpPr>
-        <p:spPr>
-          <a:xfrm>
-            <a:off x="523874" y="5276850"/>
-            <a:ext cx="11049000" cy="428625"/>
-          </a:xfrm>
-          <a:prstGeom prst="rect">
-            <a:avLst/>
-          </a:prstGeom>
-          <a:noFill/>
-        </p:spPr>
-        <p:txBody>
-          <a:bodyPr wrap="square" lIns="0" tIns="0" rIns="0" bIns="0">
-            <a:spAutoFit/>
-          </a:bodyPr>
-          <a:lstStyle/>
-          <a:p>
-            <a:pPr>
-              <a:lnSpc>
-                <a:spcPct val="118000"/>
-              </a:lnSpc>
-              <a:spcBef>
-                <a:spcPts val="0"/>
-              </a:spcBef>
-              <a:spcAft>
-                <a:spcPts val="0"/>
-              </a:spcAft>
-              <a:defRPr sz="2400" b="1">
-                <a:solidFill>
-                  <a:srgbClr val="65439A"/>
-                </a:solidFill>
-                <a:latin typeface="Lato"/>
-              </a:defRPr>
-            </a:pPr>
-            <a:r>
-              <a:rPr>
-                <a:ea typeface="Microsoft JhengHei"/>
-              </a:rPr>
-              <a:t>Future work: edge prediction</a:t>
-            </a:r>
-          </a:p>
-        </p:txBody>
-      </p:sp>
-      <p:sp>
-        <p:nvSpPr>
-          <p:cNvPr id="11" name="TextBox 10"/>
-          <p:cNvSpPr txBox="1"/>
-          <p:nvPr/>
-        </p:nvSpPr>
-        <p:spPr>
-          <a:xfrm>
-            <a:off x="523874" y="5810250"/>
-            <a:ext cx="11049000" cy="504825"/>
-          </a:xfrm>
-          <a:prstGeom prst="rect">
-            <a:avLst/>
-          </a:prstGeom>
-          <a:noFill/>
-        </p:spPr>
-        <p:txBody>
-          <a:bodyPr wrap="square" lIns="0" tIns="0" rIns="0" bIns="0">
-            <a:spAutoFit/>
-          </a:bodyPr>
-          <a:lstStyle/>
-          <a:p>
-            <a:pPr>
-              <a:lnSpc>
-                <a:spcPct val="118000"/>
-              </a:lnSpc>
-              <a:spcBef>
-                <a:spcPts val="0"/>
-              </a:spcBef>
-              <a:spcAft>
-                <a:spcPts val="0"/>
-              </a:spcAft>
-              <a:defRPr sz="2300" b="0">
-                <a:solidFill>
-                  <a:srgbClr val="24384A"/>
-                </a:solidFill>
-                <a:latin typeface="Lato"/>
-              </a:defRPr>
-            </a:pPr>
-            <a:r>
-              <a:rPr>
-                <a:ea typeface="Microsoft JhengHei"/>
-              </a:rPr>
-              <a:t>Suggest a quotation or parallel to investigate, with passages to check.</a:t>
-            </a:r>
-          </a:p>
-        </p:txBody>
-      </p:sp>
-      <p:sp>
-        <p:nvSpPr>
-          <p:cNvPr id="12" name="Rectangle 11"/>
+              <a:t>Read the agents’ proposals, citations and checks.</a:t>
+            </a:r>
+          </a:p>
+        </p:txBody>
+      </p:sp>
+      <p:sp>
+        <p:nvSpPr>
+          <p:cNvPr id="4" name="Rectangle 3"/>
           <p:cNvSpPr/>
           <p:nvPr/>
         </p:nvSpPr>
@@ -14791,7 +14597,7 @@
       </p:sp>
       <p:sp>
         <p:nvSpPr>
-          <p:cNvPr id="13" name="TextBox 12"/>
+          <p:cNvPr id="5" name="TextBox 4"/>
           <p:cNvSpPr txBox="1"/>
           <p:nvPr/>
         </p:nvSpPr>
@@ -14832,8 +14638,750 @@
               <a:rPr>
                 <a:ea typeface="Microsoft JhengHei"/>
               </a:rPr>
-              <a:t>17</a:t>
-            </a:r>
+              <a:t>18</a:t>
+            </a:r>
+          </a:p>
+        </p:txBody>
+      </p:sp>
+      <p:pic>
+        <p:nvPicPr>
+          <p:cNvPr id="6" name="Picture 5" descr="findings.png"/>
+          <p:cNvPicPr>
+            <a:picLocks noChangeAspect="1"/>
+          </p:cNvPicPr>
+          <p:nvPr/>
+        </p:nvPicPr>
+        <p:blipFill>
+          <a:blip r:embed="rId3"/>
+          <a:stretch>
+            <a:fillRect/>
+          </a:stretch>
+        </p:blipFill>
+        <p:spPr>
+          <a:xfrm>
+            <a:off x="495299" y="2057400"/>
+            <a:ext cx="6477000" cy="3600450"/>
+          </a:xfrm>
+          <a:prstGeom prst="rect">
+            <a:avLst/>
+          </a:prstGeom>
+        </p:spPr>
+      </p:pic>
+      <p:sp>
+        <p:nvSpPr>
+          <p:cNvPr id="7" name="TextBox 6"/>
+          <p:cNvSpPr txBox="1"/>
+          <p:nvPr/>
+        </p:nvSpPr>
+        <p:spPr>
+          <a:xfrm>
+            <a:off x="523874" y="1762125"/>
+            <a:ext cx="6477000" cy="276225"/>
+          </a:xfrm>
+          <a:prstGeom prst="rect">
+            <a:avLst/>
+          </a:prstGeom>
+          <a:noFill/>
+        </p:spPr>
+        <p:txBody>
+          <a:bodyPr wrap="square" lIns="0" tIns="0" rIns="0" bIns="0">
+            <a:spAutoFit/>
+          </a:bodyPr>
+          <a:lstStyle/>
+          <a:p>
+            <a:pPr>
+              <a:lnSpc>
+                <a:spcPct val="118000"/>
+              </a:lnSpc>
+              <a:spcBef>
+                <a:spcPts val="0"/>
+              </a:spcBef>
+              <a:spcAft>
+                <a:spcPts val="0"/>
+              </a:spcAft>
+              <a:defRPr sz="1300" b="0">
+                <a:solidFill>
+                  <a:srgbClr val="526778"/>
+                </a:solidFill>
+                <a:latin typeface="Lato"/>
+              </a:defRPr>
+            </a:pPr>
+            <a:r>
+              <a:rPr>
+                <a:ea typeface="Microsoft JhengHei"/>
+              </a:rPr>
+              <a:t>Interface</a:t>
+            </a:r>
+          </a:p>
+        </p:txBody>
+      </p:sp>
+      <p:sp>
+        <p:nvSpPr>
+          <p:cNvPr id="8" name="TextBox 7"/>
+          <p:cNvSpPr txBox="1"/>
+          <p:nvPr/>
+        </p:nvSpPr>
+        <p:spPr>
+          <a:xfrm>
+            <a:off x="7477125" y="1762125"/>
+            <a:ext cx="4048124" cy="276225"/>
+          </a:xfrm>
+          <a:prstGeom prst="rect">
+            <a:avLst/>
+          </a:prstGeom>
+          <a:noFill/>
+        </p:spPr>
+        <p:txBody>
+          <a:bodyPr wrap="square" lIns="0" tIns="0" rIns="0" bIns="0">
+            <a:spAutoFit/>
+          </a:bodyPr>
+          <a:lstStyle/>
+          <a:p>
+            <a:pPr>
+              <a:lnSpc>
+                <a:spcPct val="118000"/>
+              </a:lnSpc>
+              <a:spcBef>
+                <a:spcPts val="0"/>
+              </a:spcBef>
+              <a:spcAft>
+                <a:spcPts val="0"/>
+              </a:spcAft>
+              <a:defRPr sz="1300" b="0">
+                <a:solidFill>
+                  <a:srgbClr val="526778"/>
+                </a:solidFill>
+                <a:latin typeface="Lato"/>
+              </a:defRPr>
+            </a:pPr>
+            <a:r>
+              <a:rPr>
+                <a:ea typeface="Microsoft JhengHei"/>
+              </a:rPr>
+              <a:t>How to use it</a:t>
+            </a:r>
+          </a:p>
+        </p:txBody>
+      </p:sp>
+      <p:sp>
+        <p:nvSpPr>
+          <p:cNvPr id="9" name="Rectangle 8"/>
+          <p:cNvSpPr/>
+          <p:nvPr/>
+        </p:nvSpPr>
+        <p:spPr>
+          <a:xfrm>
+            <a:off x="7477125" y="2190750"/>
+            <a:ext cx="4190999" cy="762000"/>
+          </a:xfrm>
+          <a:prstGeom prst="rect">
+            <a:avLst/>
+          </a:prstGeom>
+          <a:solidFill>
+            <a:srgbClr val="FFFFFF"/>
+          </a:solidFill>
+          <a:ln w="12700">
+            <a:solidFill>
+              <a:srgbClr val="146C68"/>
+            </a:solidFill>
+          </a:ln>
+        </p:spPr>
+        <p:style>
+          <a:lnRef idx="1">
+            <a:schemeClr val="accent1"/>
+          </a:lnRef>
+          <a:fillRef idx="3">
+            <a:schemeClr val="accent1"/>
+          </a:fillRef>
+          <a:effectRef idx="2">
+            <a:schemeClr val="accent1"/>
+          </a:effectRef>
+          <a:fontRef idx="minor">
+            <a:schemeClr val="lt1"/>
+          </a:fontRef>
+        </p:style>
+        <p:txBody>
+          <a:bodyPr rtlCol="0" anchor="ctr"/>
+          <a:lstStyle/>
+          <a:p>
+            <a:pPr algn="ctr"/>
+            <a:endParaRPr/>
+          </a:p>
+        </p:txBody>
+      </p:sp>
+      <p:sp>
+        <p:nvSpPr>
+          <p:cNvPr id="10" name="TextBox 9"/>
+          <p:cNvSpPr txBox="1"/>
+          <p:nvPr/>
+        </p:nvSpPr>
+        <p:spPr>
+          <a:xfrm>
+            <a:off x="7620000" y="2333625"/>
+            <a:ext cx="3905249" cy="571500"/>
+          </a:xfrm>
+          <a:prstGeom prst="rect">
+            <a:avLst/>
+          </a:prstGeom>
+          <a:noFill/>
+        </p:spPr>
+        <p:txBody>
+          <a:bodyPr wrap="square" lIns="0" tIns="0" rIns="0" bIns="0">
+            <a:spAutoFit/>
+          </a:bodyPr>
+          <a:lstStyle/>
+          <a:p>
+            <a:pPr>
+              <a:lnSpc>
+                <a:spcPct val="118000"/>
+              </a:lnSpc>
+              <a:spcBef>
+                <a:spcPts val="0"/>
+              </a:spcBef>
+              <a:spcAft>
+                <a:spcPts val="0"/>
+              </a:spcAft>
+              <a:defRPr sz="1900" b="1">
+                <a:solidFill>
+                  <a:srgbClr val="146C68"/>
+                </a:solidFill>
+                <a:latin typeface="Lato"/>
+              </a:defRPr>
+            </a:pPr>
+            <a:r>
+              <a:rPr>
+                <a:ea typeface="Microsoft JhengHei"/>
+              </a:rPr>
+              <a:t>Open a saved proposal</a:t>
+            </a:r>
+          </a:p>
+        </p:txBody>
+      </p:sp>
+      <p:cxnSp>
+        <p:nvCxnSpPr>
+          <p:cNvPr id="11" name="Connector 10"/>
+          <p:cNvCxnSpPr/>
+          <p:nvPr/>
+        </p:nvCxnSpPr>
+        <p:spPr>
+          <a:xfrm flipH="1">
+            <a:off x="8429625" y="3038475"/>
+            <a:ext cx="1095375" cy="457200"/>
+          </a:xfrm>
+          <a:prstGeom prst="line">
+            <a:avLst/>
+          </a:prstGeom>
+          <a:ln w="19050">
+            <a:solidFill>
+              <a:srgbClr val="526778"/>
+            </a:solidFill>
+            <a:tailEnd type="triangle"/>
+          </a:ln>
+        </p:spPr>
+        <p:style>
+          <a:lnRef idx="2">
+            <a:schemeClr val="accent1"/>
+          </a:lnRef>
+          <a:fillRef idx="0">
+            <a:schemeClr val="accent1"/>
+          </a:fillRef>
+          <a:effectRef idx="1">
+            <a:schemeClr val="accent1"/>
+          </a:effectRef>
+          <a:fontRef idx="minor">
+            <a:schemeClr val="tx1"/>
+          </a:fontRef>
+        </p:style>
+      </p:cxnSp>
+      <p:cxnSp>
+        <p:nvCxnSpPr>
+          <p:cNvPr id="12" name="Connector 11"/>
+          <p:cNvCxnSpPr/>
+          <p:nvPr/>
+        </p:nvCxnSpPr>
+        <p:spPr>
+          <a:xfrm>
+            <a:off x="9525000" y="3038475"/>
+            <a:ext cx="1143000" cy="457200"/>
+          </a:xfrm>
+          <a:prstGeom prst="line">
+            <a:avLst/>
+          </a:prstGeom>
+          <a:ln w="19050">
+            <a:solidFill>
+              <a:srgbClr val="526778"/>
+            </a:solidFill>
+            <a:tailEnd type="triangle"/>
+          </a:ln>
+        </p:spPr>
+        <p:style>
+          <a:lnRef idx="2">
+            <a:schemeClr val="accent1"/>
+          </a:lnRef>
+          <a:fillRef idx="0">
+            <a:schemeClr val="accent1"/>
+          </a:fillRef>
+          <a:effectRef idx="1">
+            <a:schemeClr val="accent1"/>
+          </a:effectRef>
+          <a:fontRef idx="minor">
+            <a:schemeClr val="tx1"/>
+          </a:fontRef>
+        </p:style>
+      </p:cxnSp>
+      <p:sp>
+        <p:nvSpPr>
+          <p:cNvPr id="13" name="Rectangle 12"/>
+          <p:cNvSpPr/>
+          <p:nvPr/>
+        </p:nvSpPr>
+        <p:spPr>
+          <a:xfrm>
+            <a:off x="7477125" y="3667125"/>
+            <a:ext cx="1905000" cy="819150"/>
+          </a:xfrm>
+          <a:prstGeom prst="rect">
+            <a:avLst/>
+          </a:prstGeom>
+          <a:solidFill>
+            <a:srgbClr val="FFFFFF"/>
+          </a:solidFill>
+          <a:ln w="12700">
+            <a:solidFill>
+              <a:srgbClr val="146C68"/>
+            </a:solidFill>
+          </a:ln>
+        </p:spPr>
+        <p:style>
+          <a:lnRef idx="1">
+            <a:schemeClr val="accent1"/>
+          </a:lnRef>
+          <a:fillRef idx="3">
+            <a:schemeClr val="accent1"/>
+          </a:fillRef>
+          <a:effectRef idx="2">
+            <a:schemeClr val="accent1"/>
+          </a:effectRef>
+          <a:fontRef idx="minor">
+            <a:schemeClr val="lt1"/>
+          </a:fontRef>
+        </p:style>
+        <p:txBody>
+          <a:bodyPr rtlCol="0" anchor="ctr"/>
+          <a:lstStyle/>
+          <a:p>
+            <a:pPr algn="ctr"/>
+            <a:endParaRPr/>
+          </a:p>
+        </p:txBody>
+      </p:sp>
+      <p:sp>
+        <p:nvSpPr>
+          <p:cNvPr id="14" name="TextBox 13"/>
+          <p:cNvSpPr txBox="1"/>
+          <p:nvPr/>
+        </p:nvSpPr>
+        <p:spPr>
+          <a:xfrm>
+            <a:off x="7620000" y="3810000"/>
+            <a:ext cx="1619250" cy="628650"/>
+          </a:xfrm>
+          <a:prstGeom prst="rect">
+            <a:avLst/>
+          </a:prstGeom>
+          <a:noFill/>
+        </p:spPr>
+        <p:txBody>
+          <a:bodyPr wrap="square" lIns="0" tIns="0" rIns="0" bIns="0">
+            <a:spAutoFit/>
+          </a:bodyPr>
+          <a:lstStyle/>
+          <a:p>
+            <a:pPr>
+              <a:lnSpc>
+                <a:spcPct val="118000"/>
+              </a:lnSpc>
+              <a:spcBef>
+                <a:spcPts val="0"/>
+              </a:spcBef>
+              <a:spcAft>
+                <a:spcPts val="0"/>
+              </a:spcAft>
+              <a:defRPr sz="1900" b="1">
+                <a:solidFill>
+                  <a:srgbClr val="146C68"/>
+                </a:solidFill>
+                <a:latin typeface="Lato"/>
+              </a:defRPr>
+            </a:pPr>
+            <a:r>
+              <a:rPr>
+                <a:ea typeface="Microsoft JhengHei"/>
+              </a:rPr>
+              <a:t>Cited passages</a:t>
+            </a:r>
+          </a:p>
+        </p:txBody>
+      </p:sp>
+      <p:sp>
+        <p:nvSpPr>
+          <p:cNvPr id="15" name="Rectangle 14"/>
+          <p:cNvSpPr/>
+          <p:nvPr/>
+        </p:nvSpPr>
+        <p:spPr>
+          <a:xfrm>
+            <a:off x="9667875" y="3667125"/>
+            <a:ext cx="2000250" cy="819150"/>
+          </a:xfrm>
+          <a:prstGeom prst="rect">
+            <a:avLst/>
+          </a:prstGeom>
+          <a:solidFill>
+            <a:srgbClr val="FFFFFF"/>
+          </a:solidFill>
+          <a:ln w="12700">
+            <a:solidFill>
+              <a:srgbClr val="146C68"/>
+            </a:solidFill>
+          </a:ln>
+        </p:spPr>
+        <p:style>
+          <a:lnRef idx="1">
+            <a:schemeClr val="accent1"/>
+          </a:lnRef>
+          <a:fillRef idx="3">
+            <a:schemeClr val="accent1"/>
+          </a:fillRef>
+          <a:effectRef idx="2">
+            <a:schemeClr val="accent1"/>
+          </a:effectRef>
+          <a:fontRef idx="minor">
+            <a:schemeClr val="lt1"/>
+          </a:fontRef>
+        </p:style>
+        <p:txBody>
+          <a:bodyPr rtlCol="0" anchor="ctr"/>
+          <a:lstStyle/>
+          <a:p>
+            <a:pPr algn="ctr"/>
+            <a:endParaRPr/>
+          </a:p>
+        </p:txBody>
+      </p:sp>
+      <p:sp>
+        <p:nvSpPr>
+          <p:cNvPr id="16" name="TextBox 15"/>
+          <p:cNvSpPr txBox="1"/>
+          <p:nvPr/>
+        </p:nvSpPr>
+        <p:spPr>
+          <a:xfrm>
+            <a:off x="9810750" y="3810000"/>
+            <a:ext cx="1714500" cy="628650"/>
+          </a:xfrm>
+          <a:prstGeom prst="rect">
+            <a:avLst/>
+          </a:prstGeom>
+          <a:noFill/>
+        </p:spPr>
+        <p:txBody>
+          <a:bodyPr wrap="square" lIns="0" tIns="0" rIns="0" bIns="0">
+            <a:spAutoFit/>
+          </a:bodyPr>
+          <a:lstStyle/>
+          <a:p>
+            <a:pPr>
+              <a:lnSpc>
+                <a:spcPct val="118000"/>
+              </a:lnSpc>
+              <a:spcBef>
+                <a:spcPts val="0"/>
+              </a:spcBef>
+              <a:spcAft>
+                <a:spcPts val="0"/>
+              </a:spcAft>
+              <a:defRPr sz="1900" b="1">
+                <a:solidFill>
+                  <a:srgbClr val="146C68"/>
+                </a:solidFill>
+                <a:latin typeface="Lato"/>
+              </a:defRPr>
+            </a:pPr>
+            <a:r>
+              <a:rPr>
+                <a:ea typeface="Microsoft JhengHei"/>
+              </a:rPr>
+              <a:t>Checks</a:t>
+            </a:r>
+          </a:p>
+        </p:txBody>
+      </p:sp>
+      <p:sp>
+        <p:nvSpPr>
+          <p:cNvPr id="17" name="TextBox 16"/>
+          <p:cNvSpPr txBox="1"/>
+          <p:nvPr/>
+        </p:nvSpPr>
+        <p:spPr>
+          <a:xfrm>
+            <a:off x="7477125" y="5010150"/>
+            <a:ext cx="4190999" cy="762000"/>
+          </a:xfrm>
+          <a:prstGeom prst="rect">
+            <a:avLst/>
+          </a:prstGeom>
+          <a:noFill/>
+        </p:spPr>
+        <p:txBody>
+          <a:bodyPr wrap="square" lIns="0" tIns="0" rIns="0" bIns="0">
+            <a:spAutoFit/>
+          </a:bodyPr>
+          <a:lstStyle/>
+          <a:p>
+            <a:pPr>
+              <a:lnSpc>
+                <a:spcPct val="118000"/>
+              </a:lnSpc>
+              <a:spcBef>
+                <a:spcPts val="0"/>
+              </a:spcBef>
+              <a:spcAft>
+                <a:spcPts val="0"/>
+              </a:spcAft>
+              <a:defRPr sz="2300" b="1">
+                <a:solidFill>
+                  <a:srgbClr val="146C68"/>
+                </a:solidFill>
+                <a:latin typeface="Lato"/>
+              </a:defRPr>
+            </a:pPr>
+            <a:r>
+              <a:rPr>
+                <a:ea typeface="Microsoft JhengHei"/>
+              </a:rPr>
+              <a:t>Read its explanation</a:t>
+            </a:r>
+          </a:p>
+          <a:p>
+            <a:pPr>
+              <a:lnSpc>
+                <a:spcPct val="118000"/>
+              </a:lnSpc>
+              <a:spcBef>
+                <a:spcPts val="0"/>
+              </a:spcBef>
+              <a:spcAft>
+                <a:spcPts val="0"/>
+              </a:spcAft>
+              <a:defRPr sz="2300" b="1">
+                <a:solidFill>
+                  <a:srgbClr val="146C68"/>
+                </a:solidFill>
+                <a:latin typeface="Lato"/>
+              </a:defRPr>
+            </a:pPr>
+            <a:r>
+              <a:rPr>
+                <a:ea typeface="Microsoft JhengHei"/>
+              </a:rPr>
+              <a:t>and alternatives.</a:t>
+            </a:r>
+          </a:p>
+        </p:txBody>
+      </p:sp>
+      <p:sp>
+        <p:nvSpPr>
+          <p:cNvPr id="18" name="TextBox 17"/>
+          <p:cNvSpPr txBox="1"/>
+          <p:nvPr/>
+        </p:nvSpPr>
+        <p:spPr>
+          <a:xfrm>
+            <a:off x="523874" y="5816600"/>
+            <a:ext cx="6477000" cy="609600"/>
+          </a:xfrm>
+          <a:prstGeom prst="rect">
+            <a:avLst/>
+          </a:prstGeom>
+          <a:noFill/>
+        </p:spPr>
+        <p:txBody>
+          <a:bodyPr wrap="square" lIns="0" tIns="0" rIns="0" bIns="0">
+            <a:spAutoFit/>
+          </a:bodyPr>
+          <a:lstStyle/>
+          <a:p>
+            <a:pPr>
+              <a:lnSpc>
+                <a:spcPct val="118000"/>
+              </a:lnSpc>
+              <a:spcBef>
+                <a:spcPts val="0"/>
+              </a:spcBef>
+              <a:spcAft>
+                <a:spcPts val="0"/>
+              </a:spcAft>
+              <a:defRPr sz="2100" b="0">
+                <a:solidFill>
+                  <a:srgbClr val="146C68"/>
+                </a:solidFill>
+                <a:latin typeface="Lato"/>
+              </a:defRPr>
+            </a:pPr>
+            <a:r>
+              <a:rPr>
+                <a:ea typeface="Microsoft JhengHei"/>
+              </a:rPr>
+              <a:t>Follow a citation into Graph to inspect its source.</a:t>
+            </a:r>
+          </a:p>
+        </p:txBody>
+      </p:sp>
+      <p:sp>
+        <p:nvSpPr>
+          <p:cNvPr id="19" name="TextBox 18"/>
+          <p:cNvSpPr txBox="1"/>
+          <p:nvPr/>
+        </p:nvSpPr>
+        <p:spPr>
+          <a:xfrm>
+            <a:off x="7477125" y="5924550"/>
+            <a:ext cx="4190999" cy="485775"/>
+          </a:xfrm>
+          <a:prstGeom prst="rect">
+            <a:avLst/>
+          </a:prstGeom>
+          <a:noFill/>
+        </p:spPr>
+        <p:txBody>
+          <a:bodyPr wrap="square" lIns="0" tIns="0" rIns="0" bIns="0">
+            <a:spAutoFit/>
+          </a:bodyPr>
+          <a:lstStyle/>
+          <a:p>
+            <a:pPr>
+              <a:lnSpc>
+                <a:spcPct val="118000"/>
+              </a:lnSpc>
+              <a:spcBef>
+                <a:spcPts val="0"/>
+              </a:spcBef>
+              <a:spcAft>
+                <a:spcPts val="0"/>
+              </a:spcAft>
+              <a:defRPr sz="1700" b="0">
+                <a:solidFill>
+                  <a:srgbClr val="526778"/>
+                </a:solidFill>
+                <a:latin typeface="Lato"/>
+              </a:defRPr>
+            </a:pPr>
+            <a:r>
+              <a:rPr>
+                <a:ea typeface="Microsoft JhengHei"/>
+              </a:rPr>
+              <a:t>Inspect one proposal at a time.</a:t>
+            </a:r>
+          </a:p>
+        </p:txBody>
+      </p:sp>
+      <p:sp>
+        <p:nvSpPr>
+          <p:cNvPr id="20" name="TextBox 19"/>
+          <p:cNvSpPr txBox="1"/>
+          <p:nvPr/>
+        </p:nvSpPr>
+        <p:spPr>
+          <a:xfrm>
+            <a:off x="523874" y="6515100"/>
+            <a:ext cx="10477500" cy="200025"/>
+          </a:xfrm>
+          <a:prstGeom prst="rect">
+            <a:avLst/>
+          </a:prstGeom>
+          <a:noFill/>
+        </p:spPr>
+        <p:txBody>
+          <a:bodyPr wrap="square" lIns="0" tIns="0" rIns="0" bIns="0">
+            <a:spAutoFit/>
+          </a:bodyPr>
+          <a:lstStyle/>
+          <a:p>
+            <a:pPr>
+              <a:lnSpc>
+                <a:spcPct val="118000"/>
+              </a:lnSpc>
+              <a:spcBef>
+                <a:spcPts val="0"/>
+              </a:spcBef>
+              <a:spcAft>
+                <a:spcPts val="0"/>
+              </a:spcAft>
+              <a:defRPr sz="1000" b="0">
+                <a:solidFill>
+                  <a:srgbClr val="526778"/>
+                </a:solidFill>
+                <a:latin typeface="Lato"/>
+              </a:defRPr>
+            </a:pPr>
+            <a:r>
+              <a:rPr>
+                <a:ea typeface="Microsoft JhengHei"/>
+              </a:rPr>
+              <a:t>Screenshot: source passages hidden where applicable. Diagram: schematic.</a:t>
+            </a:r>
+          </a:p>
+        </p:txBody>
+      </p:sp>
+      <p:sp>
+        <p:nvSpPr>
+          <p:cNvPr id="21" name="AccentRule">
+            <a:extLst>
+              <a:ext uri="{FF2B5EF4-FFF2-40B4-BE49-F238E27FC236}">
+                <a16:creationId xmlns:a16="http://schemas.microsoft.com/office/drawing/2014/main" id="{8481F6A8-7D87-46B4-953A-8C7F1A560644}"/>
+              </a:ext>
+            </a:extLst>
+          </p:cNvPr>
+          <p:cNvSpPr/>
+          <p:nvPr/>
+        </p:nvSpPr>
+        <p:spPr>
+          <a:xfrm>
+            <a:off x="495300" y="596900"/>
+            <a:ext cx="584200" cy="38100"/>
+          </a:xfrm>
+          <a:prstGeom prst="rect">
+            <a:avLst/>
+          </a:prstGeom>
+          <a:solidFill>
+            <a:srgbClr val="126B85"/>
+          </a:solidFill>
+          <a:ln w="9525" cap="flat" cmpd="sng" algn="ctr">
+            <a:noFill/>
+            <a:prstDash val="solid"/>
+          </a:ln>
+        </p:spPr>
+        <p:style>
+          <a:lnRef idx="1">
+            <a:schemeClr val="accent1"/>
+          </a:lnRef>
+          <a:fillRef idx="3">
+            <a:schemeClr val="accent1"/>
+          </a:fillRef>
+          <a:effectRef idx="2">
+            <a:schemeClr val="accent1"/>
+          </a:effectRef>
+          <a:fontRef idx="minor">
+            <a:schemeClr val="lt1"/>
+          </a:fontRef>
+        </p:style>
+        <p:txBody>
+          <a:bodyPr vertOverflow="clip" horzOverflow="clip" rtlCol="0" anchor="t"/>
+          <a:lstStyle/>
+          <a:p>
+            <a:pPr algn="l"/>
+            <a:endParaRPr lang="zh-TW" altLang="en-US"/>
           </a:p>
         </p:txBody>
       </p:sp>
@@ -15484,6 +16032,57 @@
           </a:p>
         </p:txBody>
       </p:sp>
+      <p:sp>
+        <p:nvSpPr>
+          <p:cNvPr id="15" name="AccentRule">
+            <a:extLst>
+              <a:ext uri="{FF2B5EF4-FFF2-40B4-BE49-F238E27FC236}">
+                <a16:creationId xmlns:a16="http://schemas.microsoft.com/office/drawing/2014/main" id="{5AD56324-3DB7-4518-AB27-90D5FDD60BDB}"/>
+              </a:ext>
+            </a:extLst>
+          </p:cNvPr>
+          <p:cNvSpPr/>
+          <p:nvPr/>
+        </p:nvSpPr>
+        <p:spPr>
+          <a:xfrm>
+            <a:off x="495300" y="596900"/>
+            <a:ext cx="584200" cy="38100"/>
+          </a:xfrm>
+          <a:prstGeom prst="rect">
+            <a:avLst/>
+          </a:prstGeom>
+          <a:solidFill>
+            <a:srgbClr val="126B85"/>
+          </a:solidFill>
+          <a:ln w="9525" cap="flat" cmpd="sng" algn="ctr">
+            <a:noFill/>
+            <a:prstDash val="solid"/>
+          </a:ln>
+        </p:spPr>
+        <p:style>
+          <a:lnRef idx="1">
+            <a:schemeClr val="accent1"/>
+          </a:lnRef>
+          <a:fillRef idx="3">
+            <a:schemeClr val="accent1"/>
+          </a:fillRef>
+          <a:effectRef idx="2">
+            <a:schemeClr val="accent1"/>
+          </a:effectRef>
+          <a:fontRef idx="minor">
+            <a:schemeClr val="lt1"/>
+          </a:fontRef>
+        </p:style>
+        <p:txBody>
+          <a:bodyPr vertOverflow="clip" horzOverflow="clip" rtlCol="0" anchor="t"/>
+          <a:lstStyle/>
+          <a:p>
+            <a:pPr algn="l"/>
+            <a:endParaRPr lang="zh-TW" altLang="en-US"/>
+          </a:p>
+        </p:txBody>
+      </p:sp>
     </p:spTree>
   </p:cSld>
   <p:clrMapOvr>
@@ -15628,7 +16227,7 @@
         </p:nvSpPr>
         <p:spPr>
           <a:xfrm>
-            <a:off x="714375" y="2867025"/>
+            <a:off x="714375" y="3632200"/>
             <a:ext cx="3000375" cy="476250"/>
           </a:xfrm>
           <a:prstGeom prst="rect">
@@ -15676,7 +16275,7 @@
         </p:nvSpPr>
         <p:spPr>
           <a:xfrm>
-            <a:off x="714375" y="3476625"/>
+            <a:off x="714375" y="4419600"/>
             <a:ext cx="3000375" cy="1428750"/>
           </a:xfrm>
           <a:prstGeom prst="rect">
@@ -15749,7 +16348,7 @@
         </p:nvSpPr>
         <p:spPr>
           <a:xfrm>
-            <a:off x="4572000" y="2867025"/>
+            <a:off x="4572000" y="3632200"/>
             <a:ext cx="3000375" cy="476250"/>
           </a:xfrm>
           <a:prstGeom prst="rect">
@@ -15797,7 +16396,7 @@
         </p:nvSpPr>
         <p:spPr>
           <a:xfrm>
-            <a:off x="4572000" y="3476625"/>
+            <a:off x="4572000" y="4419600"/>
             <a:ext cx="3000375" cy="1428750"/>
           </a:xfrm>
           <a:prstGeom prst="rect">
@@ -15870,7 +16469,7 @@
         </p:nvSpPr>
         <p:spPr>
           <a:xfrm>
-            <a:off x="8429625" y="2867025"/>
+            <a:off x="8429625" y="3632200"/>
             <a:ext cx="3000375" cy="476250"/>
           </a:xfrm>
           <a:prstGeom prst="rect">
@@ -15918,7 +16517,7 @@
         </p:nvSpPr>
         <p:spPr>
           <a:xfrm>
-            <a:off x="8429625" y="3476625"/>
+            <a:off x="8429625" y="4419600"/>
             <a:ext cx="3000375" cy="1428750"/>
           </a:xfrm>
           <a:prstGeom prst="rect">
@@ -16074,6 +16673,57 @@
               </a:rPr>
               <a:t>02</a:t>
             </a:r>
+          </a:p>
+        </p:txBody>
+      </p:sp>
+      <p:sp>
+        <p:nvSpPr>
+          <p:cNvPr id="2" name="AccentRule">
+            <a:extLst>
+              <a:ext uri="{FF2B5EF4-FFF2-40B4-BE49-F238E27FC236}">
+                <a16:creationId xmlns:a16="http://schemas.microsoft.com/office/drawing/2014/main" id="{86637AF7-4BF9-472D-8071-E2C6FE1D097B}"/>
+              </a:ext>
+            </a:extLst>
+          </p:cNvPr>
+          <p:cNvSpPr/>
+          <p:nvPr/>
+        </p:nvSpPr>
+        <p:spPr>
+          <a:xfrm>
+            <a:off x="495300" y="596900"/>
+            <a:ext cx="584200" cy="38100"/>
+          </a:xfrm>
+          <a:prstGeom prst="rect">
+            <a:avLst/>
+          </a:prstGeom>
+          <a:solidFill>
+            <a:srgbClr val="126B85"/>
+          </a:solidFill>
+          <a:ln w="9525" cap="flat" cmpd="sng" algn="ctr">
+            <a:noFill/>
+            <a:prstDash val="solid"/>
+          </a:ln>
+        </p:spPr>
+        <p:style>
+          <a:lnRef idx="1">
+            <a:schemeClr val="accent1"/>
+          </a:lnRef>
+          <a:fillRef idx="3">
+            <a:schemeClr val="accent1"/>
+          </a:fillRef>
+          <a:effectRef idx="2">
+            <a:schemeClr val="accent1"/>
+          </a:effectRef>
+          <a:fontRef idx="minor">
+            <a:schemeClr val="lt1"/>
+          </a:fontRef>
+        </p:style>
+        <p:txBody>
+          <a:bodyPr vertOverflow="clip" horzOverflow="clip" rtlCol="0" anchor="t"/>
+          <a:lstStyle/>
+          <a:p>
+            <a:pPr algn="l"/>
+            <a:endParaRPr lang="zh-TW" altLang="en-US"/>
           </a:p>
         </p:txBody>
       </p:sp>
@@ -16826,6 +17476,57 @@
           </a:p>
         </p:txBody>
       </p:sp>
+      <p:sp>
+        <p:nvSpPr>
+          <p:cNvPr id="14" name="AccentRule">
+            <a:extLst>
+              <a:ext uri="{FF2B5EF4-FFF2-40B4-BE49-F238E27FC236}">
+                <a16:creationId xmlns:a16="http://schemas.microsoft.com/office/drawing/2014/main" id="{8FCD6111-2C3B-4A92-A014-88C34B4076D9}"/>
+              </a:ext>
+            </a:extLst>
+          </p:cNvPr>
+          <p:cNvSpPr/>
+          <p:nvPr/>
+        </p:nvSpPr>
+        <p:spPr>
+          <a:xfrm>
+            <a:off x="495300" y="596900"/>
+            <a:ext cx="584200" cy="38100"/>
+          </a:xfrm>
+          <a:prstGeom prst="rect">
+            <a:avLst/>
+          </a:prstGeom>
+          <a:solidFill>
+            <a:srgbClr val="126B85"/>
+          </a:solidFill>
+          <a:ln w="9525" cap="flat" cmpd="sng" algn="ctr">
+            <a:noFill/>
+            <a:prstDash val="solid"/>
+          </a:ln>
+        </p:spPr>
+        <p:style>
+          <a:lnRef idx="1">
+            <a:schemeClr val="accent1"/>
+          </a:lnRef>
+          <a:fillRef idx="3">
+            <a:schemeClr val="accent1"/>
+          </a:fillRef>
+          <a:effectRef idx="2">
+            <a:schemeClr val="accent1"/>
+          </a:effectRef>
+          <a:fontRef idx="minor">
+            <a:schemeClr val="lt1"/>
+          </a:fontRef>
+        </p:style>
+        <p:txBody>
+          <a:bodyPr vertOverflow="clip" horzOverflow="clip" rtlCol="0" anchor="t"/>
+          <a:lstStyle/>
+          <a:p>
+            <a:pPr algn="l"/>
+            <a:endParaRPr lang="zh-TW" altLang="en-US"/>
+          </a:p>
+        </p:txBody>
+      </p:sp>
     </p:spTree>
   </p:cSld>
   <p:clrMapOvr>
@@ -16979,7 +17680,7 @@
         </p:nvSpPr>
         <p:spPr>
           <a:xfrm>
-            <a:off x="742950" y="3905249"/>
+            <a:off x="742950" y="4500822"/>
             <a:ext cx="10477500" cy="523874"/>
           </a:xfrm>
           <a:prstGeom prst="rect">
@@ -17027,7 +17728,7 @@
         </p:nvSpPr>
         <p:spPr>
           <a:xfrm>
-            <a:off x="742950" y="4591050"/>
+            <a:off x="742950" y="5300303"/>
             <a:ext cx="10477500" cy="897297"/>
           </a:xfrm>
           <a:prstGeom prst="rect">
@@ -17207,6 +17908,57 @@
               </a:rPr>
               <a:t>03</a:t>
             </a:r>
+          </a:p>
+        </p:txBody>
+      </p:sp>
+      <p:sp>
+        <p:nvSpPr>
+          <p:cNvPr id="2" name="AccentRule">
+            <a:extLst>
+              <a:ext uri="{FF2B5EF4-FFF2-40B4-BE49-F238E27FC236}">
+                <a16:creationId xmlns:a16="http://schemas.microsoft.com/office/drawing/2014/main" id="{FDA6DCF0-9914-4F68-A142-0EA4B7D26841}"/>
+              </a:ext>
+            </a:extLst>
+          </p:cNvPr>
+          <p:cNvSpPr/>
+          <p:nvPr/>
+        </p:nvSpPr>
+        <p:spPr>
+          <a:xfrm>
+            <a:off x="495300" y="596900"/>
+            <a:ext cx="584200" cy="38100"/>
+          </a:xfrm>
+          <a:prstGeom prst="rect">
+            <a:avLst/>
+          </a:prstGeom>
+          <a:solidFill>
+            <a:srgbClr val="126B85"/>
+          </a:solidFill>
+          <a:ln w="9525" cap="flat" cmpd="sng" algn="ctr">
+            <a:noFill/>
+            <a:prstDash val="solid"/>
+          </a:ln>
+        </p:spPr>
+        <p:style>
+          <a:lnRef idx="1">
+            <a:schemeClr val="accent1"/>
+          </a:lnRef>
+          <a:fillRef idx="3">
+            <a:schemeClr val="accent1"/>
+          </a:fillRef>
+          <a:effectRef idx="2">
+            <a:schemeClr val="accent1"/>
+          </a:effectRef>
+          <a:fontRef idx="minor">
+            <a:schemeClr val="lt1"/>
+          </a:fontRef>
+        </p:style>
+        <p:txBody>
+          <a:bodyPr vertOverflow="clip" horzOverflow="clip" rtlCol="0" anchor="t"/>
+          <a:lstStyle/>
+          <a:p>
+            <a:pPr algn="l"/>
+            <a:endParaRPr lang="zh-TW" altLang="en-US"/>
           </a:p>
         </p:txBody>
       </p:sp>
@@ -17863,6 +18615,57 @@
           </a:p>
         </p:txBody>
       </p:sp>
+      <p:sp>
+        <p:nvSpPr>
+          <p:cNvPr id="2" name="AccentRule">
+            <a:extLst>
+              <a:ext uri="{FF2B5EF4-FFF2-40B4-BE49-F238E27FC236}">
+                <a16:creationId xmlns:a16="http://schemas.microsoft.com/office/drawing/2014/main" id="{AA380881-1BD7-4F49-844F-AA78BA380193}"/>
+              </a:ext>
+            </a:extLst>
+          </p:cNvPr>
+          <p:cNvSpPr/>
+          <p:nvPr/>
+        </p:nvSpPr>
+        <p:spPr>
+          <a:xfrm>
+            <a:off x="495300" y="596900"/>
+            <a:ext cx="584200" cy="38100"/>
+          </a:xfrm>
+          <a:prstGeom prst="rect">
+            <a:avLst/>
+          </a:prstGeom>
+          <a:solidFill>
+            <a:srgbClr val="126B85"/>
+          </a:solidFill>
+          <a:ln w="9525" cap="flat" cmpd="sng" algn="ctr">
+            <a:noFill/>
+            <a:prstDash val="solid"/>
+          </a:ln>
+        </p:spPr>
+        <p:style>
+          <a:lnRef idx="1">
+            <a:schemeClr val="accent1"/>
+          </a:lnRef>
+          <a:fillRef idx="3">
+            <a:schemeClr val="accent1"/>
+          </a:fillRef>
+          <a:effectRef idx="2">
+            <a:schemeClr val="accent1"/>
+          </a:effectRef>
+          <a:fontRef idx="minor">
+            <a:schemeClr val="lt1"/>
+          </a:fontRef>
+        </p:style>
+        <p:txBody>
+          <a:bodyPr vertOverflow="clip" horzOverflow="clip" rtlCol="0" anchor="t"/>
+          <a:lstStyle/>
+          <a:p>
+            <a:pPr algn="l"/>
+            <a:endParaRPr lang="zh-TW" altLang="en-US"/>
+          </a:p>
+        </p:txBody>
+      </p:sp>
     </p:spTree>
   </p:cSld>
   <p:clrMapOvr>
@@ -18087,7 +18890,7 @@
         <p:spPr>
           <a:xfrm>
             <a:off x="4095750" y="2028825"/>
-            <a:ext cx="7505700" cy="609600"/>
+            <a:ext cx="7505700" cy="736600"/>
           </a:xfrm>
           <a:prstGeom prst="rect">
             <a:avLst/>
@@ -18183,7 +18986,7 @@
         <p:spPr>
           <a:xfrm>
             <a:off x="4095750" y="2857500"/>
-            <a:ext cx="7505700" cy="609600"/>
+            <a:ext cx="7505700" cy="736600"/>
           </a:xfrm>
           <a:prstGeom prst="rect">
             <a:avLst/>
@@ -18279,7 +19082,7 @@
         <p:spPr>
           <a:xfrm>
             <a:off x="4095750" y="3686175"/>
-            <a:ext cx="7505700" cy="609600"/>
+            <a:ext cx="7505700" cy="736600"/>
           </a:xfrm>
           <a:prstGeom prst="rect">
             <a:avLst/>
@@ -18375,7 +19178,7 @@
         <p:spPr>
           <a:xfrm>
             <a:off x="4095750" y="5343525"/>
-            <a:ext cx="7505700" cy="609600"/>
+            <a:ext cx="7505700" cy="736600"/>
           </a:xfrm>
           <a:prstGeom prst="rect">
             <a:avLst/>
@@ -18471,7 +19274,7 @@
         <p:spPr>
           <a:xfrm>
             <a:off x="4095750" y="4514850"/>
-            <a:ext cx="7505700" cy="609600"/>
+            <a:ext cx="7505700" cy="736600"/>
           </a:xfrm>
           <a:prstGeom prst="rect">
             <a:avLst/>
@@ -18507,6 +19310,57 @@
               </a:rPr>
               <a:t>Follow links between sources, proposals and decisions.</a:t>
             </a:r>
+          </a:p>
+        </p:txBody>
+      </p:sp>
+      <p:sp>
+        <p:nvSpPr>
+          <p:cNvPr id="2" name="AccentRule">
+            <a:extLst>
+              <a:ext uri="{FF2B5EF4-FFF2-40B4-BE49-F238E27FC236}">
+                <a16:creationId xmlns:a16="http://schemas.microsoft.com/office/drawing/2014/main" id="{5580DBD1-731D-4762-971F-85CCDA1DB9E0}"/>
+              </a:ext>
+            </a:extLst>
+          </p:cNvPr>
+          <p:cNvSpPr/>
+          <p:nvPr/>
+        </p:nvSpPr>
+        <p:spPr>
+          <a:xfrm>
+            <a:off x="495300" y="596900"/>
+            <a:ext cx="584200" cy="38100"/>
+          </a:xfrm>
+          <a:prstGeom prst="rect">
+            <a:avLst/>
+          </a:prstGeom>
+          <a:solidFill>
+            <a:srgbClr val="126B85"/>
+          </a:solidFill>
+          <a:ln w="9525" cap="flat" cmpd="sng" algn="ctr">
+            <a:noFill/>
+            <a:prstDash val="solid"/>
+          </a:ln>
+        </p:spPr>
+        <p:style>
+          <a:lnRef idx="1">
+            <a:schemeClr val="accent1"/>
+          </a:lnRef>
+          <a:fillRef idx="3">
+            <a:schemeClr val="accent1"/>
+          </a:fillRef>
+          <a:effectRef idx="2">
+            <a:schemeClr val="accent1"/>
+          </a:effectRef>
+          <a:fontRef idx="minor">
+            <a:schemeClr val="lt1"/>
+          </a:fontRef>
+        </p:style>
+        <p:txBody>
+          <a:bodyPr vertOverflow="clip" horzOverflow="clip" rtlCol="0" anchor="t"/>
+          <a:lstStyle/>
+          <a:p>
+            <a:pPr algn="l"/>
+            <a:endParaRPr lang="zh-TW" altLang="en-US"/>
           </a:p>
         </p:txBody>
       </p:sp>
@@ -19014,7 +19868,7 @@
         <p:spPr>
           <a:xfrm>
             <a:off x="523874" y="5457825"/>
-            <a:ext cx="11049000" cy="619125"/>
+            <a:ext cx="11049000" cy="392415"/>
           </a:xfrm>
           <a:prstGeom prst="rect">
             <a:avLst/>
@@ -19045,11 +19899,14 @@
               </a:defRPr>
             </a:pPr>
             <a:r>
-              <a:rPr>
-                <a:ea typeface="Microsoft JhengHei"/>
-              </a:rPr>
-              <a:t>Known relationships let us inspect what the tools get right and wrong.</a:t>
-            </a:r>
+              <a:rPr lang="en-US" dirty="0">
+                <a:ea typeface="Microsoft JhengHei"/>
+              </a:rPr>
+              <a:t>Using known  </a:t>
+            </a:r>
+            <a:endParaRPr dirty="0">
+              <a:ea typeface="Microsoft JhengHei"/>
+            </a:endParaRPr>
           </a:p>
         </p:txBody>
       </p:sp>
@@ -19144,6 +20001,57 @@
               </a:rPr>
               <a:t>06</a:t>
             </a:r>
+          </a:p>
+        </p:txBody>
+      </p:sp>
+      <p:sp>
+        <p:nvSpPr>
+          <p:cNvPr id="2" name="AccentRule">
+            <a:extLst>
+              <a:ext uri="{FF2B5EF4-FFF2-40B4-BE49-F238E27FC236}">
+                <a16:creationId xmlns:a16="http://schemas.microsoft.com/office/drawing/2014/main" id="{039F0C20-FFF9-49B2-9787-EB029C628D8E}"/>
+              </a:ext>
+            </a:extLst>
+          </p:cNvPr>
+          <p:cNvSpPr/>
+          <p:nvPr/>
+        </p:nvSpPr>
+        <p:spPr>
+          <a:xfrm>
+            <a:off x="495300" y="596900"/>
+            <a:ext cx="584200" cy="38100"/>
+          </a:xfrm>
+          <a:prstGeom prst="rect">
+            <a:avLst/>
+          </a:prstGeom>
+          <a:solidFill>
+            <a:srgbClr val="126B85"/>
+          </a:solidFill>
+          <a:ln w="9525" cap="flat" cmpd="sng" algn="ctr">
+            <a:noFill/>
+            <a:prstDash val="solid"/>
+          </a:ln>
+        </p:spPr>
+        <p:style>
+          <a:lnRef idx="1">
+            <a:schemeClr val="accent1"/>
+          </a:lnRef>
+          <a:fillRef idx="3">
+            <a:schemeClr val="accent1"/>
+          </a:fillRef>
+          <a:effectRef idx="2">
+            <a:schemeClr val="accent1"/>
+          </a:effectRef>
+          <a:fontRef idx="minor">
+            <a:schemeClr val="lt1"/>
+          </a:fontRef>
+        </p:style>
+        <p:txBody>
+          <a:bodyPr vertOverflow="clip" horzOverflow="clip" rtlCol="0" anchor="t"/>
+          <a:lstStyle/>
+          <a:p>
+            <a:pPr algn="l"/>
+            <a:endParaRPr lang="zh-TW" altLang="en-US"/>
           </a:p>
         </p:txBody>
       </p:sp>
@@ -20158,6 +21066,57 @@
           </a:p>
         </p:txBody>
       </p:sp>
+      <p:sp>
+        <p:nvSpPr>
+          <p:cNvPr id="24" name="AccentRule">
+            <a:extLst>
+              <a:ext uri="{FF2B5EF4-FFF2-40B4-BE49-F238E27FC236}">
+                <a16:creationId xmlns:a16="http://schemas.microsoft.com/office/drawing/2014/main" id="{03D09C70-29C2-4FAA-BD07-07DD453B3003}"/>
+              </a:ext>
+            </a:extLst>
+          </p:cNvPr>
+          <p:cNvSpPr/>
+          <p:nvPr/>
+        </p:nvSpPr>
+        <p:spPr>
+          <a:xfrm>
+            <a:off x="495300" y="596900"/>
+            <a:ext cx="584200" cy="38100"/>
+          </a:xfrm>
+          <a:prstGeom prst="rect">
+            <a:avLst/>
+          </a:prstGeom>
+          <a:solidFill>
+            <a:srgbClr val="126B85"/>
+          </a:solidFill>
+          <a:ln w="9525" cap="flat" cmpd="sng" algn="ctr">
+            <a:noFill/>
+            <a:prstDash val="solid"/>
+          </a:ln>
+        </p:spPr>
+        <p:style>
+          <a:lnRef idx="1">
+            <a:schemeClr val="accent1"/>
+          </a:lnRef>
+          <a:fillRef idx="3">
+            <a:schemeClr val="accent1"/>
+          </a:fillRef>
+          <a:effectRef idx="2">
+            <a:schemeClr val="accent1"/>
+          </a:effectRef>
+          <a:fontRef idx="minor">
+            <a:schemeClr val="lt1"/>
+          </a:fontRef>
+        </p:style>
+        <p:txBody>
+          <a:bodyPr vertOverflow="clip" horzOverflow="clip" rtlCol="0" anchor="t"/>
+          <a:lstStyle/>
+          <a:p>
+            <a:pPr algn="l"/>
+            <a:endParaRPr lang="zh-TW" altLang="en-US"/>
+          </a:p>
+        </p:txBody>
+      </p:sp>
     </p:spTree>
   </p:cSld>
   <p:clrMapOvr>
@@ -20335,7 +21294,7 @@
         </p:nvSpPr>
         <p:spPr>
           <a:xfrm>
-            <a:off x="714375" y="2962275"/>
+            <a:off x="714375" y="3492500"/>
             <a:ext cx="3000375" cy="476250"/>
           </a:xfrm>
           <a:prstGeom prst="rect">
@@ -20383,7 +21342,7 @@
         </p:nvSpPr>
         <p:spPr>
           <a:xfrm>
-            <a:off x="714375" y="3571875"/>
+            <a:off x="714375" y="4279900"/>
             <a:ext cx="3000375" cy="952500"/>
           </a:xfrm>
           <a:prstGeom prst="rect">
@@ -20431,7 +21390,7 @@
         </p:nvSpPr>
         <p:spPr>
           <a:xfrm>
-            <a:off x="4572000" y="2962275"/>
+            <a:off x="4572000" y="3492500"/>
             <a:ext cx="3000375" cy="476250"/>
           </a:xfrm>
           <a:prstGeom prst="rect">
@@ -20479,7 +21438,7 @@
         </p:nvSpPr>
         <p:spPr>
           <a:xfrm>
-            <a:off x="4572000" y="3571875"/>
+            <a:off x="4572000" y="4279900"/>
             <a:ext cx="3000375" cy="952500"/>
           </a:xfrm>
           <a:prstGeom prst="rect">
@@ -20527,7 +21486,7 @@
         </p:nvSpPr>
         <p:spPr>
           <a:xfrm>
-            <a:off x="8429625" y="2962275"/>
+            <a:off x="8429625" y="3492500"/>
             <a:ext cx="3000375" cy="476250"/>
           </a:xfrm>
           <a:prstGeom prst="rect">
@@ -20575,7 +21534,7 @@
         </p:nvSpPr>
         <p:spPr>
           <a:xfrm>
-            <a:off x="8429625" y="3571875"/>
+            <a:off x="8429625" y="4279900"/>
             <a:ext cx="3000375" cy="952500"/>
           </a:xfrm>
           <a:prstGeom prst="rect">
@@ -20623,7 +21582,7 @@
         </p:nvCxnSpPr>
         <p:spPr>
           <a:xfrm>
-            <a:off x="3962399" y="3667125"/>
+            <a:off x="3962399" y="4381500"/>
             <a:ext cx="352425" cy="0"/>
           </a:xfrm>
           <a:prstGeom prst="line">
@@ -20659,7 +21618,7 @@
         </p:nvCxnSpPr>
         <p:spPr>
           <a:xfrm>
-            <a:off x="7820025" y="3667125"/>
+            <a:off x="7820025" y="4381500"/>
             <a:ext cx="352425" cy="0"/>
           </a:xfrm>
           <a:prstGeom prst="line">
@@ -20778,6 +21737,57 @@
               </a:rPr>
               <a:t>08</a:t>
             </a:r>
+          </a:p>
+        </p:txBody>
+      </p:sp>
+      <p:sp>
+        <p:nvSpPr>
+          <p:cNvPr id="13" name="AccentRule">
+            <a:extLst>
+              <a:ext uri="{FF2B5EF4-FFF2-40B4-BE49-F238E27FC236}">
+                <a16:creationId xmlns:a16="http://schemas.microsoft.com/office/drawing/2014/main" id="{67D09822-3EE9-419B-A385-BEF0F77CA927}"/>
+              </a:ext>
+            </a:extLst>
+          </p:cNvPr>
+          <p:cNvSpPr/>
+          <p:nvPr/>
+        </p:nvSpPr>
+        <p:spPr>
+          <a:xfrm>
+            <a:off x="495300" y="596900"/>
+            <a:ext cx="584200" cy="38100"/>
+          </a:xfrm>
+          <a:prstGeom prst="rect">
+            <a:avLst/>
+          </a:prstGeom>
+          <a:solidFill>
+            <a:srgbClr val="126B85"/>
+          </a:solidFill>
+          <a:ln w="9525" cap="flat" cmpd="sng" algn="ctr">
+            <a:noFill/>
+            <a:prstDash val="solid"/>
+          </a:ln>
+        </p:spPr>
+        <p:style>
+          <a:lnRef idx="1">
+            <a:schemeClr val="accent1"/>
+          </a:lnRef>
+          <a:fillRef idx="3">
+            <a:schemeClr val="accent1"/>
+          </a:fillRef>
+          <a:effectRef idx="2">
+            <a:schemeClr val="accent1"/>
+          </a:effectRef>
+          <a:fontRef idx="minor">
+            <a:schemeClr val="lt1"/>
+          </a:fontRef>
+        </p:style>
+        <p:txBody>
+          <a:bodyPr vertOverflow="clip" horzOverflow="clip" rtlCol="0" anchor="t"/>
+          <a:lstStyle/>
+          <a:p>
+            <a:pPr algn="l"/>
+            <a:endParaRPr lang="zh-TW" altLang="en-US"/>
           </a:p>
         </p:txBody>
       </p:sp>
@@ -20958,7 +21968,7 @@
         </p:nvSpPr>
         <p:spPr>
           <a:xfrm>
-            <a:off x="714375" y="2762250"/>
+            <a:off x="714375" y="2700055"/>
             <a:ext cx="3905249" cy="1095375"/>
           </a:xfrm>
           <a:prstGeom prst="rect">
@@ -21079,7 +22089,7 @@
         </p:nvSpPr>
         <p:spPr>
           <a:xfrm>
-            <a:off x="7572375" y="2762250"/>
+            <a:off x="7572375" y="2700055"/>
             <a:ext cx="3905249" cy="1095375"/>
           </a:xfrm>
           <a:prstGeom prst="rect">
@@ -21152,7 +22162,7 @@
         </p:nvCxnSpPr>
         <p:spPr>
           <a:xfrm>
-            <a:off x="4953000" y="2952750"/>
+            <a:off x="4953000" y="2890555"/>
             <a:ext cx="2238375" cy="0"/>
           </a:xfrm>
           <a:prstGeom prst="line">
@@ -21236,8 +22246,8 @@
         </p:nvSpPr>
         <p:spPr>
           <a:xfrm>
-            <a:off x="742950" y="4667250"/>
-            <a:ext cx="10620375" cy="495299"/>
+            <a:off x="742950" y="5265869"/>
+            <a:ext cx="10620375" cy="931730"/>
           </a:xfrm>
           <a:prstGeom prst="rect">
             <a:avLst/>
@@ -21250,16 +22260,18 @@
           </a:bodyPr>
           <a:lstStyle/>
           <a:p>
-            <a:pPr>
-              <a:lnSpc>
-                <a:spcPct val="118000"/>
-              </a:lnSpc>
-              <a:spcBef>
-                <a:spcPts val="0"/>
-              </a:spcBef>
-              <a:spcAft>
-                <a:spcPts val="0"/>
-              </a:spcAft>
+            <a:pPr marL="457200" indent="-457200">
+              <a:lnSpc>
+                <a:spcPct val="118000"/>
+              </a:lnSpc>
+              <a:spcBef>
+                <a:spcPts val="0"/>
+              </a:spcBef>
+              <a:spcAft>
+                <a:spcPts val="0"/>
+              </a:spcAft>
+              <a:buFont typeface="Arial" panose="020B0604020202020204" pitchFamily="34" charset="0"/>
+              <a:buChar char="•"/>
               <a:defRPr sz="2700" b="1">
                 <a:solidFill>
                   <a:srgbClr val="146C68"/>
@@ -21268,58 +22280,37 @@
               </a:defRPr>
             </a:pPr>
             <a:r>
-              <a:rPr>
+              <a:rPr lang="en-US" dirty="0">
+                <a:ea typeface="Microsoft JhengHei"/>
+              </a:rPr>
+              <a:t>Exact match wouldn’t find this pair</a:t>
+            </a:r>
+          </a:p>
+          <a:p>
+            <a:pPr marL="457200" indent="-457200">
+              <a:lnSpc>
+                <a:spcPct val="118000"/>
+              </a:lnSpc>
+              <a:spcBef>
+                <a:spcPts val="0"/>
+              </a:spcBef>
+              <a:spcAft>
+                <a:spcPts val="0"/>
+              </a:spcAft>
+              <a:buFont typeface="Arial" panose="020B0604020202020204" pitchFamily="34" charset="0"/>
+              <a:buChar char="•"/>
+              <a:defRPr sz="2700" b="1">
+                <a:solidFill>
+                  <a:srgbClr val="146C68"/>
+                </a:solidFill>
+                <a:latin typeface="Lato"/>
+              </a:defRPr>
+            </a:pPr>
+            <a:r>
+              <a:rPr dirty="0">
                 <a:ea typeface="Microsoft JhengHei"/>
               </a:rPr>
               <a:t>Longest exact shared sequence: 3 Chinese characters</a:t>
-            </a:r>
-          </a:p>
-        </p:txBody>
-      </p:sp>
-      <p:sp>
-        <p:nvSpPr>
-          <p:cNvPr id="11" name="TextBox 10"/>
-          <p:cNvSpPr txBox="1"/>
-          <p:nvPr/>
-        </p:nvSpPr>
-        <p:spPr>
-          <a:xfrm>
-            <a:off x="742950" y="5248275"/>
-            <a:ext cx="10620375" cy="476250"/>
-          </a:xfrm>
-          <a:prstGeom prst="rect">
-            <a:avLst/>
-          </a:prstGeom>
-          <a:noFill/>
-        </p:spPr>
-        <p:txBody>
-          <a:bodyPr wrap="square" lIns="0" tIns="0" rIns="0" bIns="0">
-            <a:spAutoFit/>
-          </a:bodyPr>
-          <a:lstStyle/>
-          <a:p>
-            <a:pPr>
-              <a:lnSpc>
-                <a:spcPct val="118000"/>
-              </a:lnSpc>
-              <a:spcBef>
-                <a:spcPts val="0"/>
-              </a:spcBef>
-              <a:spcAft>
-                <a:spcPts val="0"/>
-              </a:spcAft>
-              <a:defRPr sz="2200" b="0">
-                <a:solidFill>
-                  <a:srgbClr val="24384A"/>
-                </a:solidFill>
-                <a:latin typeface="Lato"/>
-              </a:defRPr>
-            </a:pPr>
-            <a:r>
-              <a:rPr dirty="0">
-                <a:ea typeface="Microsoft JhengHei"/>
-              </a:rPr>
-              <a:t>Shared wording is checked separately, with positions in both sources.</a:t>
             </a:r>
           </a:p>
         </p:txBody>
@@ -21415,6 +22406,57 @@
               </a:rPr>
               <a:t>09</a:t>
             </a:r>
+          </a:p>
+        </p:txBody>
+      </p:sp>
+      <p:sp>
+        <p:nvSpPr>
+          <p:cNvPr id="14" name="AccentRule">
+            <a:extLst>
+              <a:ext uri="{FF2B5EF4-FFF2-40B4-BE49-F238E27FC236}">
+                <a16:creationId xmlns:a16="http://schemas.microsoft.com/office/drawing/2014/main" id="{E93B9EC2-5CB5-4F4B-A580-FE144B250000}"/>
+              </a:ext>
+            </a:extLst>
+          </p:cNvPr>
+          <p:cNvSpPr/>
+          <p:nvPr/>
+        </p:nvSpPr>
+        <p:spPr>
+          <a:xfrm>
+            <a:off x="495300" y="596900"/>
+            <a:ext cx="584200" cy="38100"/>
+          </a:xfrm>
+          <a:prstGeom prst="rect">
+            <a:avLst/>
+          </a:prstGeom>
+          <a:solidFill>
+            <a:srgbClr val="126B85"/>
+          </a:solidFill>
+          <a:ln w="9525" cap="flat" cmpd="sng" algn="ctr">
+            <a:noFill/>
+            <a:prstDash val="solid"/>
+          </a:ln>
+        </p:spPr>
+        <p:style>
+          <a:lnRef idx="1">
+            <a:schemeClr val="accent1"/>
+          </a:lnRef>
+          <a:fillRef idx="3">
+            <a:schemeClr val="accent1"/>
+          </a:fillRef>
+          <a:effectRef idx="2">
+            <a:schemeClr val="accent1"/>
+          </a:effectRef>
+          <a:fontRef idx="minor">
+            <a:schemeClr val="lt1"/>
+          </a:fontRef>
+        </p:style>
+        <p:txBody>
+          <a:bodyPr vertOverflow="clip" horzOverflow="clip" rtlCol="0" anchor="t"/>
+          <a:lstStyle/>
+          <a:p>
+            <a:pPr algn="l"/>
+            <a:endParaRPr lang="zh-TW" altLang="en-US"/>
           </a:p>
         </p:txBody>
       </p:sp>

--- a/docs/presentation/cohort-pnc-2026-main.pptx
+++ b/docs/presentation/cohort-pnc-2026-main.pptx
@@ -28,6 +28,7 @@
     <p:sldId id="270" r:id="rId19"/>
     <p:sldId id="274" r:id="rId20"/>
     <p:sldId id="275" r:id="rId21"/>
+    <p:sldId id="276" r:id="rId27"/>
   </p:sldIdLst>
   <p:sldSz cx="12192000" cy="6858000"/>
   <p:notesSz cx="6858000" cy="9144000"/>
@@ -16880,7 +16881,7 @@
               <a:spcAft>
                 <a:spcPts val="0"/>
               </a:spcAft>
-              <a:defRPr sz="2700" b="1">
+              <a:defRPr sz="2400" b="1">
                 <a:solidFill>
                   <a:srgbClr val="146C68"/>
                 </a:solidFill>
@@ -16888,10 +16889,7 @@
               </a:defRPr>
             </a:pPr>
             <a:r>
-              <a:rPr>
-                <a:ea typeface="Microsoft JhengHei"/>
-              </a:rPr>
-              <a:t>Useful outputs</a:t>
+              <a:t>What the tools showed</a:t>
             </a:r>
           </a:p>
         </p:txBody>
@@ -16928,7 +16926,7 @@
               <a:spcAft>
                 <a:spcPts val="0"/>
               </a:spcAft>
-              <a:defRPr sz="2700" b="1">
+              <a:defRPr sz="2400" b="1">
                 <a:solidFill>
                   <a:srgbClr val="80511B"/>
                 </a:solidFill>
@@ -16936,10 +16934,7 @@
               </a:defRPr>
             </a:pPr>
             <a:r>
-              <a:rPr>
-                <a:ea typeface="Microsoft JhengHei"/>
-              </a:rPr>
-              <a:t>Observed limits</a:t>
+              <a:t>What we still need to check</a:t>
             </a:r>
           </a:p>
         </p:txBody>
@@ -16976,7 +16971,7 @@
               <a:spcAft>
                 <a:spcPts val="0"/>
               </a:spcAft>
-              <a:defRPr sz="2300" b="0">
+              <a:defRPr sz="2000" b="0">
                 <a:solidFill>
                   <a:srgbClr val="24384A"/>
                 </a:solidFill>
@@ -16984,35 +16979,7 @@
               </a:defRPr>
             </a:pPr>
             <a:r>
-              <a:rPr>
-                <a:ea typeface="Microsoft JhengHei"/>
-              </a:rPr>
-              <a:t>Lotus: a related passage with</a:t>
-            </a:r>
-          </a:p>
-          <a:p>
-            <a:pPr>
-              <a:lnSpc>
-                <a:spcPct val="118000"/>
-              </a:lnSpc>
-              <a:spcBef>
-                <a:spcPts val="0"/>
-              </a:spcBef>
-              <a:spcAft>
-                <a:spcPts val="0"/>
-              </a:spcAft>
-              <a:defRPr sz="2300" b="0">
-                <a:solidFill>
-                  <a:srgbClr val="24384A"/>
-                </a:solidFill>
-                <a:latin typeface="Lato"/>
-              </a:defRPr>
-            </a:pPr>
-            <a:r>
-              <a:rPr>
-                <a:ea typeface="Microsoft JhengHei"/>
-              </a:rPr>
-              <a:t>little exact shared wording.</a:t>
+              <a:t>The Lotus search found a passage in another translation despite little exact shared wording.</a:t>
             </a:r>
           </a:p>
         </p:txBody>
@@ -17049,7 +17016,7 @@
               <a:spcAft>
                 <a:spcPts val="0"/>
               </a:spcAft>
-              <a:defRPr sz="2300" b="0">
+              <a:defRPr sz="2000" b="0">
                 <a:solidFill>
                   <a:srgbClr val="24384A"/>
                 </a:solidFill>
@@ -17057,35 +17024,7 @@
               </a:defRPr>
             </a:pPr>
             <a:r>
-              <a:rPr>
-                <a:ea typeface="Microsoft JhengHei"/>
-              </a:rPr>
-              <a:t>Kumārajīva’s Lotus wrongly ranks</a:t>
-            </a:r>
-          </a:p>
-          <a:p>
-            <a:pPr>
-              <a:lnSpc>
-                <a:spcPct val="118000"/>
-              </a:lnSpc>
-              <a:spcBef>
-                <a:spcPts val="0"/>
-              </a:spcBef>
-              <a:spcAft>
-                <a:spcPts val="0"/>
-              </a:spcAft>
-              <a:defRPr sz="2300" b="0">
-                <a:solidFill>
-                  <a:srgbClr val="24384A"/>
-                </a:solidFill>
-                <a:latin typeface="Lato"/>
-              </a:defRPr>
-            </a:pPr>
-            <a:r>
-              <a:rPr>
-                <a:ea typeface="Microsoft JhengHei"/>
-              </a:rPr>
-              <a:t>Dharmakṣema first in vocabulary.</a:t>
+              <a:t>T0262 Lotus: known translator Kumārajīva 鳩摩羅什; vocabulary ranks Dharmakṣema 曇無讖 first.</a:t>
             </a:r>
           </a:p>
         </p:txBody>
@@ -17122,7 +17061,7 @@
               <a:spcAft>
                 <a:spcPts val="0"/>
               </a:spcAft>
-              <a:defRPr sz="2300" b="0">
+              <a:defRPr sz="2000" b="0">
                 <a:solidFill>
                   <a:srgbClr val="24384A"/>
                 </a:solidFill>
@@ -17130,35 +17069,7 @@
               </a:defRPr>
             </a:pPr>
             <a:r>
-              <a:rPr>
-                <a:ea typeface="Microsoft JhengHei"/>
-              </a:rPr>
-              <a:t>T0603: exclusion exposes the</a:t>
-            </a:r>
-          </a:p>
-          <a:p>
-            <a:pPr>
-              <a:lnSpc>
-                <a:spcPct val="118000"/>
-              </a:lnSpc>
-              <a:spcBef>
-                <a:spcPts val="0"/>
-              </a:spcBef>
-              <a:spcAft>
-                <a:spcPts val="0"/>
-              </a:spcAft>
-              <a:defRPr sz="2300" b="0">
-                <a:solidFill>
-                  <a:srgbClr val="24384A"/>
-                </a:solidFill>
-                <a:latin typeface="Lato"/>
-              </a:defRPr>
-            </a:pPr>
-            <a:r>
-              <a:rPr>
-                <a:ea typeface="Microsoft JhengHei"/>
-              </a:rPr>
-              <a:t>commentary’s effect on the ranking.</a:t>
+              <a:t>Removing T0603’s commentary changes which vocabulary group ranks first.</a:t>
             </a:r>
           </a:p>
         </p:txBody>
@@ -17195,7 +17106,7 @@
               <a:spcAft>
                 <a:spcPts val="0"/>
               </a:spcAft>
-              <a:defRPr sz="2300" b="0">
+              <a:defRPr sz="2000" b="0">
                 <a:solidFill>
                   <a:srgbClr val="24384A"/>
                 </a:solidFill>
@@ -17203,35 +17114,7 @@
               </a:defRPr>
             </a:pPr>
             <a:r>
-              <a:rPr>
-                <a:ea typeface="Microsoft JhengHei"/>
-              </a:rPr>
-              <a:t>One known-answer example</a:t>
-            </a:r>
-          </a:p>
-          <a:p>
-            <a:pPr>
-              <a:lnSpc>
-                <a:spcPct val="118000"/>
-              </a:lnSpc>
-              <a:spcBef>
-                <a:spcPts val="0"/>
-              </a:spcBef>
-              <a:spcAft>
-                <a:spcPts val="0"/>
-              </a:spcAft>
-              <a:defRPr sz="2300" b="0">
-                <a:solidFill>
-                  <a:srgbClr val="24384A"/>
-                </a:solidFill>
-                <a:latin typeface="Lato"/>
-              </a:defRPr>
-            </a:pPr>
-            <a:r>
-              <a:rPr>
-                <a:ea typeface="Microsoft JhengHei"/>
-              </a:rPr>
-              <a:t>cannot validate attribution.</a:t>
+              <a:t>Getting one text right does not show that the method reliably identifies unknown translators.</a:t>
             </a:r>
           </a:p>
         </p:txBody>
@@ -17268,7 +17151,7 @@
               <a:spcAft>
                 <a:spcPts val="0"/>
               </a:spcAft>
-              <a:defRPr sz="2300" b="0">
+              <a:defRPr sz="2000" b="0">
                 <a:solidFill>
                   <a:srgbClr val="24384A"/>
                 </a:solidFill>
@@ -17276,35 +17159,7 @@
               </a:defRPr>
             </a:pPr>
             <a:r>
-              <a:rPr>
-                <a:ea typeface="Microsoft JhengHei"/>
-              </a:rPr>
-              <a:t>Proposals, sources and checks</a:t>
-            </a:r>
-          </a:p>
-          <a:p>
-            <a:pPr>
-              <a:lnSpc>
-                <a:spcPct val="118000"/>
-              </a:lnSpc>
-              <a:spcBef>
-                <a:spcPts val="0"/>
-              </a:spcBef>
-              <a:spcAft>
-                <a:spcPts val="0"/>
-              </a:spcAft>
-              <a:defRPr sz="2300" b="0">
-                <a:solidFill>
-                  <a:srgbClr val="24384A"/>
-                </a:solidFill>
-                <a:latin typeface="Lato"/>
-              </a:defRPr>
-            </a:pPr>
-            <a:r>
-              <a:rPr>
-                <a:ea typeface="Microsoft JhengHei"/>
-              </a:rPr>
-              <a:t>can be inspected together.</a:t>
+              <a:t>The graph brings proposals, cited passages and recorded checks together.</a:t>
             </a:r>
           </a:p>
         </p:txBody>
@@ -17341,7 +17196,7 @@
               <a:spcAft>
                 <a:spcPts val="0"/>
               </a:spcAft>
-              <a:defRPr sz="2300" b="0">
+              <a:defRPr sz="2000" b="0">
                 <a:solidFill>
                   <a:srgbClr val="24384A"/>
                 </a:solidFill>
@@ -17349,35 +17204,7 @@
               </a:defRPr>
             </a:pPr>
             <a:r>
-              <a:rPr>
-                <a:ea typeface="Microsoft JhengHei"/>
-              </a:rPr>
-              <a:t>Weak tests and reviewer errors</a:t>
-            </a:r>
-          </a:p>
-          <a:p>
-            <a:pPr>
-              <a:lnSpc>
-                <a:spcPct val="118000"/>
-              </a:lnSpc>
-              <a:spcBef>
-                <a:spcPts val="0"/>
-              </a:spcBef>
-              <a:spcAft>
-                <a:spcPts val="0"/>
-              </a:spcAft>
-              <a:defRPr sz="2300" b="0">
-                <a:solidFill>
-                  <a:srgbClr val="24384A"/>
-                </a:solidFill>
-                <a:latin typeface="Lato"/>
-              </a:defRPr>
-            </a:pPr>
-            <a:r>
-              <a:rPr>
-                <a:ea typeface="Microsoft JhengHei"/>
-              </a:rPr>
-              <a:t>still require researcher scrutiny.</a:t>
+              <a:t>Researchers still need to assess the interpretation and whether its tests are useful.</a:t>
             </a:r>
           </a:p>
         </p:txBody>
@@ -17524,6 +17351,218 @@
           <a:p>
             <a:pPr algn="l"/>
             <a:endParaRPr lang="zh-TW" altLang="en-US"/>
+          </a:p>
+        </p:txBody>
+      </p:sp>
+    </p:spTree>
+  </p:cSld>
+  <p:clrMapOvr>
+    <a:masterClrMapping/>
+  </p:clrMapOvr>
+</p:sld>
+</file>
+
+<file path=ppt/slides/slide21.xml><?xml version="1.0" encoding="utf-8"?>
+<p:sld xmlns:a="http://schemas.openxmlformats.org/drawingml/2006/main" xmlns:r="http://schemas.openxmlformats.org/officeDocument/2006/relationships" xmlns:p="http://schemas.openxmlformats.org/presentationml/2006/main">
+  <p:cSld>
+    <p:spTree>
+      <p:nvGrpSpPr>
+        <p:cNvPr id="1" name=""/>
+        <p:cNvGrpSpPr/>
+        <p:nvPr/>
+      </p:nvGrpSpPr>
+      <p:grpSpPr>
+        <a:xfrm>
+          <a:off x="0" y="0"/>
+          <a:ext cx="0" cy="0"/>
+          <a:chOff x="0" y="0"/>
+          <a:chExt cx="0" cy="0"/>
+        </a:xfrm>
+      </p:grpSpPr>
+      <p:sp>
+        <p:nvSpPr>
+          <p:cNvPr id="3" name="TextBox 2"/>
+          <p:cNvSpPr txBox="1"/>
+          <p:nvPr/>
+        </p:nvSpPr>
+        <p:spPr>
+          <a:xfrm>
+            <a:off x="952500" y="2381250"/>
+            <a:ext cx="10287000" cy="1143000"/>
+          </a:xfrm>
+          <a:prstGeom prst="rect">
+            <a:avLst/>
+          </a:prstGeom>
+          <a:noFill/>
+        </p:spPr>
+        <p:txBody>
+          <a:bodyPr wrap="square" lIns="0" tIns="0" rIns="0" bIns="0">
+            <a:spAutoFit/>
+          </a:bodyPr>
+          <a:lstStyle/>
+          <a:p>
+            <a:pPr algn="ctr">
+              <a:lnSpc>
+                <a:spcPct val="118000"/>
+              </a:lnSpc>
+              <a:spcBef>
+                <a:spcPts val="0"/>
+              </a:spcBef>
+              <a:spcAft>
+                <a:spcPts val="0"/>
+              </a:spcAft>
+              <a:defRPr sz="5200" b="1">
+                <a:solidFill>
+                  <a:srgbClr val="24384A"/>
+                </a:solidFill>
+                <a:latin typeface="Lato"/>
+              </a:defRPr>
+            </a:pPr>
+            <a:r>
+              <a:rPr>
+                <a:ea typeface="Microsoft JhengHei"/>
+              </a:rPr>
+              <a:t>Thank you</a:t>
+            </a:r>
+          </a:p>
+        </p:txBody>
+      </p:sp>
+      <p:sp>
+        <p:nvSpPr>
+          <p:cNvPr id="4" name="TextBox 3"/>
+          <p:cNvSpPr txBox="1"/>
+          <p:nvPr/>
+        </p:nvSpPr>
+        <p:spPr>
+          <a:xfrm>
+            <a:off x="952500" y="3619500"/>
+            <a:ext cx="10287000" cy="571500"/>
+          </a:xfrm>
+          <a:prstGeom prst="rect">
+            <a:avLst/>
+          </a:prstGeom>
+          <a:noFill/>
+        </p:spPr>
+        <p:txBody>
+          <a:bodyPr wrap="square" lIns="0" tIns="0" rIns="0" bIns="0">
+            <a:spAutoFit/>
+          </a:bodyPr>
+          <a:lstStyle/>
+          <a:p>
+            <a:pPr algn="ctr">
+              <a:lnSpc>
+                <a:spcPct val="118000"/>
+              </a:lnSpc>
+              <a:spcBef>
+                <a:spcPts val="0"/>
+              </a:spcBef>
+              <a:spcAft>
+                <a:spcPts val="0"/>
+              </a:spcAft>
+              <a:defRPr sz="2200" b="1">
+                <a:solidFill>
+                  <a:srgbClr val="146C68"/>
+                </a:solidFill>
+                <a:latin typeface="Lato"/>
+              </a:defRPr>
+            </a:pPr>
+            <a:r>
+              <a:t>Cohort · PNC 2026</a:t>
+            </a:r>
+          </a:p>
+        </p:txBody>
+      </p:sp>
+      <p:sp>
+        <p:nvSpPr>
+          <p:cNvPr id="12" name="Rectangle 11"/>
+          <p:cNvSpPr/>
+          <p:nvPr/>
+        </p:nvSpPr>
+        <p:spPr>
+          <a:xfrm>
+            <a:off x="11334750" y="6429375"/>
+            <a:ext cx="647700" cy="333375"/>
+          </a:xfrm>
+          <a:prstGeom prst="rect">
+            <a:avLst/>
+          </a:prstGeom>
+          <a:solidFill>
+            <a:srgbClr val="24384A"/>
+          </a:solidFill>
+          <a:ln w="12700">
+            <a:solidFill>
+              <a:srgbClr val="24384A"/>
+            </a:solidFill>
+          </a:ln>
+        </p:spPr>
+        <p:style>
+          <a:lnRef idx="1">
+            <a:schemeClr val="accent1"/>
+          </a:lnRef>
+          <a:fillRef idx="3">
+            <a:schemeClr val="accent1"/>
+          </a:fillRef>
+          <a:effectRef idx="2">
+            <a:schemeClr val="accent1"/>
+          </a:effectRef>
+          <a:fontRef idx="minor">
+            <a:schemeClr val="lt1"/>
+          </a:fontRef>
+        </p:style>
+        <p:txBody>
+          <a:bodyPr rtlCol="0" anchor="ctr"/>
+          <a:lstStyle/>
+          <a:p>
+            <a:pPr algn="ctr"/>
+            <a:endParaRPr/>
+          </a:p>
+        </p:txBody>
+      </p:sp>
+      <p:sp>
+        <p:nvSpPr>
+          <p:cNvPr id="13" name="TextBox 12"/>
+          <p:cNvSpPr txBox="1"/>
+          <p:nvPr/>
+        </p:nvSpPr>
+        <p:spPr>
+          <a:xfrm>
+            <a:off x="11477625" y="6477000"/>
+            <a:ext cx="438150" cy="276225"/>
+          </a:xfrm>
+          <a:prstGeom prst="rect">
+            <a:avLst/>
+          </a:prstGeom>
+          <a:noFill/>
+        </p:spPr>
+        <p:txBody>
+          <a:bodyPr wrap="square" lIns="0" tIns="0" rIns="0" bIns="0">
+            <a:spAutoFit/>
+          </a:bodyPr>
+          <a:lstStyle/>
+          <a:p>
+            <a:pPr>
+              <a:lnSpc>
+                <a:spcPct val="118000"/>
+              </a:lnSpc>
+              <a:spcBef>
+                <a:spcPts val="0"/>
+              </a:spcBef>
+              <a:spcAft>
+                <a:spcPts val="0"/>
+              </a:spcAft>
+              <a:defRPr sz="1600" b="1">
+                <a:solidFill>
+                  <a:srgbClr val="FFFFFF"/>
+                </a:solidFill>
+                <a:latin typeface="Lato"/>
+              </a:defRPr>
+            </a:pPr>
+            <a:r>
+              <a:rPr>
+                <a:ea typeface="Microsoft JhengHei"/>
+              </a:rPr>
+              <a:t>21</a:t>
+            </a:r>
           </a:p>
         </p:txBody>
       </p:sp>

--- a/docs/presentation/cohort-pnc-2026-main.pptx
+++ b/docs/presentation/cohort-pnc-2026-main.pptx
@@ -5,7 +5,7 @@
     <p:sldMasterId id="2147483648" r:id="rId1"/>
   </p:sldMasterIdLst>
   <p:notesMasterIdLst>
-    <p:notesMasterId r:id="rId22"/>
+    <p:notesMasterId r:id="rId23"/>
   </p:notesMasterIdLst>
   <p:sldIdLst>
     <p:sldId id="256" r:id="rId2"/>
@@ -28,7 +28,7 @@
     <p:sldId id="270" r:id="rId19"/>
     <p:sldId id="274" r:id="rId20"/>
     <p:sldId id="275" r:id="rId21"/>
-    <p:sldId id="276" r:id="rId27"/>
+    <p:sldId id="276" r:id="rId22"/>
   </p:sldIdLst>
   <p:sldSz cx="12192000" cy="6858000"/>
   <p:notesSz cx="6858000" cy="9144000"/>
@@ -923,35 +923,48 @@
           <a:lstStyle/>
           <a:p>
             <a:r>
+              <a:rPr dirty="0"/>
               <a:t>SAY: Compare a text’s wording with texts labelled by translator.</a:t>
             </a:r>
           </a:p>
           <a:p>
-            <a:endParaRPr/>
-          </a:p>
-          <a:p>
-            <a:r>
-              <a:t>SAY: Read the group names beside A and B. Highlighting is the contribution to their score difference. The strings can occur in both groups. Strong colour is not certainty.</a:t>
-            </a:r>
-          </a:p>
-          <a:p>
-            <a:endParaRPr/>
-          </a:p>
-          <a:p>
-            <a:r>
+            <a:endParaRPr dirty="0"/>
+          </a:p>
+          <a:p>
+            <a:r>
+              <a:rPr dirty="0"/>
+              <a:t>SAY: Read the group names beside A and B. Highlighting is the contribution to their score difference. The strings can occur in both groups. Strong </a:t>
+            </a:r>
+            <a:r>
+              <a:rPr dirty="0" err="1"/>
+              <a:t>colour</a:t>
+            </a:r>
+            <a:r>
+              <a:rPr dirty="0"/>
+              <a:t> is not certainty.</a:t>
+            </a:r>
+          </a:p>
+          <a:p>
+            <a:endParaRPr dirty="0"/>
+          </a:p>
+          <a:p>
+            <a:r>
+              <a:rPr dirty="0"/>
               <a:t>BACKGROUND</a:t>
             </a:r>
           </a:p>
           <a:p>
             <a:r>
+              <a:rPr dirty="0"/>
               <a:t>This compares a text against pooled groups using string counts, not embeddings. Use the live view for exclusions. Source passages are hidden in the screenshot. </a:t>
             </a:r>
           </a:p>
           <a:p>
-            <a:endParaRPr/>
-          </a:p>
-          <a:p>
-            <a:r>
+            <a:endParaRPr dirty="0"/>
+          </a:p>
+          <a:p>
+            <a:r>
+              <a:rPr dirty="0"/>
               <a:t>VISUAL: The screenshot orients the audience; the diagram explains the operation. Read the diagram first. Its arrows show UI workflow, not evidence-graph edge types. In Corpus the two top boxes are alternative search modes; in Vocabulary comparison and Inquiry they are inputs used together.</a:t>
             </a:r>
           </a:p>
@@ -7249,7 +7262,7 @@
         <p:spPr>
           <a:xfrm>
             <a:off x="714375" y="3121025"/>
-            <a:ext cx="2857500" cy="1809750"/>
+            <a:ext cx="2857500" cy="621260"/>
           </a:xfrm>
           <a:prstGeom prst="rect">
             <a:avLst/>
@@ -7280,30 +7293,10 @@
               </a:defRPr>
             </a:pPr>
             <a:r>
-              <a:t>Radich: strings selected for a Dharmarakṣa dictionary.</a:t>
-            </a:r>
-          </a:p>
-          <a:p>
-            <a:pPr>
-              <a:lnSpc>
-                <a:spcPct val="118000"/>
-              </a:lnSpc>
-              <a:spcBef>
-                <a:spcPts val="0"/>
-              </a:spcBef>
-              <a:spcAft>
-                <a:spcPts val="0"/>
-              </a:spcAft>
-              <a:defRPr sz="1800" b="0">
-                <a:solidFill>
-                  <a:srgbClr val="24384A"/>
-                </a:solidFill>
-                <a:latin typeface="Lato"/>
-              </a:defRPr>
-            </a:pPr>
-            <a:r>
-              <a:t>Frequent: common strings in translator-uncertain texts; no group labels used.</a:t>
-            </a:r>
+              <a:rPr lang="en-US" dirty="0"/>
+              <a:t>A list of discriminative strings used to score texts.</a:t>
+            </a:r>
+            <a:endParaRPr dirty="0"/>
           </a:p>
         </p:txBody>
       </p:sp>
@@ -7510,6 +7503,7 @@
               </a:defRPr>
             </a:pPr>
             <a:r>
+              <a:rPr dirty="0"/>
               <a:t>Count the same strings in reference texts with catalogue group labels.</a:t>
             </a:r>
           </a:p>
@@ -7532,6 +7526,7 @@
               </a:defRPr>
             </a:pPr>
             <a:r>
+              <a:rPr dirty="0"/>
               <a:t>Use relative frequencies; exclude the target’s own work.</a:t>
             </a:r>
           </a:p>
@@ -9436,7 +9431,7 @@
               <a:rPr lang="en-US" dirty="0">
                 <a:ea typeface="Microsoft JhengHei"/>
               </a:rPr>
-              <a:t> with large spans of overlap, artificially boosting similarity</a:t>
+              <a:t> with large spans of overlap, artificially boosting similarity.</a:t>
             </a:r>
             <a:endParaRPr dirty="0">
               <a:ea typeface="Microsoft JhengHei"/>
@@ -10685,7 +10680,7 @@
         <p:spPr>
           <a:xfrm>
             <a:off x="495299" y="742950"/>
-            <a:ext cx="11144250" cy="952500"/>
+            <a:ext cx="11144250" cy="523220"/>
           </a:xfrm>
           <a:prstGeom prst="rect">
             <a:avLst/>
@@ -10716,11 +10711,14 @@
               </a:defRPr>
             </a:pPr>
             <a:r>
-              <a:rPr>
-                <a:ea typeface="Microsoft JhengHei"/>
-              </a:rPr>
-              <a:t>From passages to research proposals</a:t>
-            </a:r>
+              <a:rPr lang="en-US" dirty="0">
+                <a:ea typeface="Microsoft JhengHei"/>
+              </a:rPr>
+              <a:t>New research directions</a:t>
+            </a:r>
+            <a:endParaRPr dirty="0">
+              <a:ea typeface="Microsoft JhengHei"/>
+            </a:endParaRPr>
           </a:p>
         </p:txBody>
       </p:sp>
@@ -11401,8 +11399,8 @@
         </p:nvSpPr>
         <p:spPr>
           <a:xfrm>
-            <a:off x="2762250" y="5105400"/>
-            <a:ext cx="8858250" cy="762000"/>
+            <a:off x="1759058" y="5141172"/>
+            <a:ext cx="9861442" cy="376129"/>
           </a:xfrm>
           <a:prstGeom prst="rect">
             <a:avLst/>
@@ -11433,58 +11431,10 @@
               </a:defRPr>
             </a:pPr>
             <a:r>
-              <a:rPr>
+              <a:rPr dirty="0">
                 <a:ea typeface="Microsoft JhengHei"/>
               </a:rPr>
               <a:t>Keeps proposals linked to passages, checks and researcher decisions.</a:t>
-            </a:r>
-          </a:p>
-        </p:txBody>
-      </p:sp>
-      <p:sp>
-        <p:nvSpPr>
-          <p:cNvPr id="18" name="TextBox 17"/>
-          <p:cNvSpPr txBox="1"/>
-          <p:nvPr/>
-        </p:nvSpPr>
-        <p:spPr>
-          <a:xfrm>
-            <a:off x="523874" y="5962650"/>
-            <a:ext cx="11049000" cy="390525"/>
-          </a:xfrm>
-          <a:prstGeom prst="rect">
-            <a:avLst/>
-          </a:prstGeom>
-          <a:noFill/>
-        </p:spPr>
-        <p:txBody>
-          <a:bodyPr wrap="square" lIns="0" tIns="0" rIns="0" bIns="0">
-            <a:spAutoFit/>
-          </a:bodyPr>
-          <a:lstStyle/>
-          <a:p>
-            <a:pPr>
-              <a:lnSpc>
-                <a:spcPct val="118000"/>
-              </a:lnSpc>
-              <a:spcBef>
-                <a:spcPts val="0"/>
-              </a:spcBef>
-              <a:spcAft>
-                <a:spcPts val="0"/>
-              </a:spcAft>
-              <a:defRPr sz="2200" b="0">
-                <a:solidFill>
-                  <a:srgbClr val="526778"/>
-                </a:solidFill>
-                <a:latin typeface="Lato"/>
-              </a:defRPr>
-            </a:pPr>
-            <a:r>
-              <a:rPr>
-                <a:ea typeface="Microsoft JhengHei"/>
-              </a:rPr>
-              <a:t>A citation that resolves can still support a weak interpretation.</a:t>
             </a:r>
           </a:p>
         </p:txBody>
@@ -11750,7 +11700,7 @@
               <a:rPr>
                 <a:ea typeface="Microsoft JhengHei"/>
               </a:rPr>
-              <a:t>Follow links between sources, proposals and decisions.</a:t>
+              <a:t>Graph: connect proposals to sources and checks.</a:t>
             </a:r>
           </a:p>
         </p:txBody>
@@ -12363,7 +12313,7 @@
               </a:defRPr>
             </a:pPr>
             <a:r>
-              <a:rPr>
+              <a:rPr dirty="0">
                 <a:ea typeface="Microsoft JhengHei"/>
               </a:rPr>
               <a:t>Show exploration adds recorded tool activity.</a:t>
@@ -12600,7 +12550,7 @@
         <p:spPr>
           <a:xfrm>
             <a:off x="495299" y="742950"/>
-            <a:ext cx="11144250" cy="1047749"/>
+            <a:ext cx="11144250" cy="523220"/>
           </a:xfrm>
           <a:prstGeom prst="rect">
             <a:avLst/>
@@ -12631,11 +12581,14 @@
               </a:defRPr>
             </a:pPr>
             <a:r>
-              <a:rPr>
-                <a:ea typeface="Microsoft JhengHei"/>
-              </a:rPr>
-              <a:t>Why a query points to a proposal</a:t>
-            </a:r>
+              <a:rPr lang="en-US" dirty="0">
+                <a:ea typeface="Microsoft JhengHei"/>
+              </a:rPr>
+              <a:t>Relationships between nodes</a:t>
+            </a:r>
+            <a:endParaRPr dirty="0">
+              <a:ea typeface="Microsoft JhengHei"/>
+            </a:endParaRPr>
           </a:p>
         </p:txBody>
       </p:sp>
@@ -12694,7 +12647,7 @@
         <p:spPr>
           <a:xfrm>
             <a:off x="714375" y="2257425"/>
-            <a:ext cx="2000250" cy="714375"/>
+            <a:ext cx="2000250" cy="359714"/>
           </a:xfrm>
           <a:prstGeom prst="rect">
             <a:avLst/>
@@ -12707,17 +12660,17 @@
           </a:bodyPr>
           <a:lstStyle/>
           <a:p>
-            <a:pPr>
-              <a:lnSpc>
-                <a:spcPct val="118000"/>
-              </a:lnSpc>
-              <a:spcBef>
-                <a:spcPts val="0"/>
-              </a:spcBef>
-              <a:spcAft>
-                <a:spcPts val="0"/>
-              </a:spcAft>
-              <a:defRPr sz="2200" b="1">
+            <a:pPr algn="ctr">
+              <a:lnSpc>
+                <a:spcPct val="118000"/>
+              </a:lnSpc>
+              <a:spcBef>
+                <a:spcPts val="0"/>
+              </a:spcBef>
+              <a:spcAft>
+                <a:spcPts val="0"/>
+              </a:spcAft>
+              <a:defRPr sz="1900" b="1">
                 <a:solidFill>
                   <a:srgbClr val="24384A"/>
                 </a:solidFill>
@@ -12725,10 +12678,10 @@
               </a:defRPr>
             </a:pPr>
             <a:r>
-              <a:rPr>
-                <a:ea typeface="Microsoft JhengHei"/>
-              </a:rPr>
-              <a:t>Witness</a:t>
+              <a:rPr dirty="0">
+                <a:ea typeface="Microsoft JhengHei"/>
+              </a:rPr>
+              <a:t>Source record</a:t>
             </a:r>
           </a:p>
         </p:txBody>
@@ -12788,7 +12741,7 @@
         <p:spPr>
           <a:xfrm>
             <a:off x="4048124" y="2257425"/>
-            <a:ext cx="2000250" cy="714375"/>
+            <a:ext cx="2000250" cy="359714"/>
           </a:xfrm>
           <a:prstGeom prst="rect">
             <a:avLst/>
@@ -12801,7 +12754,7 @@
           </a:bodyPr>
           <a:lstStyle/>
           <a:p>
-            <a:pPr>
+            <a:pPr algn="ctr">
               <a:lnSpc>
                 <a:spcPct val="118000"/>
               </a:lnSpc>
@@ -12819,7 +12772,7 @@
               </a:defRPr>
             </a:pPr>
             <a:r>
-              <a:rPr>
+              <a:rPr dirty="0">
                 <a:ea typeface="Microsoft JhengHei"/>
               </a:rPr>
               <a:t>Passage</a:t>
@@ -12869,7 +12822,7 @@
           <a:lstStyle/>
           <a:p>
             <a:pPr algn="ctr"/>
-            <a:endParaRPr/>
+            <a:endParaRPr sz="1400"/>
           </a:p>
         </p:txBody>
       </p:sp>
@@ -12881,8 +12834,8 @@
         </p:nvSpPr>
         <p:spPr>
           <a:xfrm>
-            <a:off x="8486775" y="2257425"/>
-            <a:ext cx="1352550" cy="666750"/>
+            <a:off x="8045907" y="2297683"/>
+            <a:ext cx="2373986" cy="277961"/>
           </a:xfrm>
           <a:prstGeom prst="rect">
             <a:avLst/>
@@ -12895,7 +12848,7 @@
           </a:bodyPr>
           <a:lstStyle/>
           <a:p>
-            <a:pPr>
+            <a:pPr algn="ctr">
               <a:lnSpc>
                 <a:spcPct val="118000"/>
               </a:lnSpc>
@@ -12913,32 +12866,19 @@
               </a:defRPr>
             </a:pPr>
             <a:r>
-              <a:rPr>
+              <a:rPr dirty="0">
                 <a:ea typeface="Microsoft JhengHei"/>
               </a:rPr>
               <a:t>Claim /</a:t>
             </a:r>
-          </a:p>
-          <a:p>
-            <a:pPr>
-              <a:lnSpc>
-                <a:spcPct val="118000"/>
-              </a:lnSpc>
-              <a:spcBef>
-                <a:spcPts val="0"/>
-              </a:spcBef>
-              <a:spcAft>
-                <a:spcPts val="0"/>
-              </a:spcAft>
-              <a:defRPr sz="1700" b="1">
-                <a:solidFill>
-                  <a:srgbClr val="24384A"/>
-                </a:solidFill>
-                <a:latin typeface="Lato"/>
-              </a:defRPr>
-            </a:pPr>
-            <a:r>
-              <a:rPr>
+            <a:r>
+              <a:rPr lang="en-US" dirty="0">
+                <a:ea typeface="Microsoft JhengHei"/>
+              </a:rPr>
+              <a:t> </a:t>
+            </a:r>
+            <a:r>
+              <a:rPr dirty="0">
                 <a:ea typeface="Microsoft JhengHei"/>
               </a:rPr>
               <a:t>conjecture</a:t>
@@ -13001,7 +12941,7 @@
         <p:spPr>
           <a:xfrm>
             <a:off x="4048124" y="4381500"/>
-            <a:ext cx="2000250" cy="714375"/>
+            <a:ext cx="2000250" cy="359714"/>
           </a:xfrm>
           <a:prstGeom prst="rect">
             <a:avLst/>
@@ -13014,7 +12954,7 @@
           </a:bodyPr>
           <a:lstStyle/>
           <a:p>
-            <a:pPr>
+            <a:pPr algn="ctr">
               <a:lnSpc>
                 <a:spcPct val="118000"/>
               </a:lnSpc>
@@ -13032,7 +12972,7 @@
               </a:defRPr>
             </a:pPr>
             <a:r>
-              <a:rPr>
+              <a:rPr dirty="0">
                 <a:ea typeface="Microsoft JhengHei"/>
               </a:rPr>
               <a:t>Query</a:t>
@@ -13048,8 +12988,8 @@
         </p:nvSpPr>
         <p:spPr>
           <a:xfrm>
-            <a:off x="8858250" y="4333875"/>
-            <a:ext cx="2000250" cy="1285875"/>
+            <a:off x="7876127" y="4572000"/>
+            <a:ext cx="2535744" cy="2085975"/>
           </a:xfrm>
           <a:prstGeom prst="star5">
             <a:avLst/>
@@ -13086,49 +13026,6 @@
           </a:p>
         </p:txBody>
       </p:sp>
-      <p:sp>
-        <p:nvSpPr>
-          <p:cNvPr id="13" name="TextBox 12"/>
-          <p:cNvSpPr txBox="1"/>
-          <p:nvPr/>
-        </p:nvSpPr>
-        <p:spPr>
-          <a:xfrm>
-            <a:off x="9048750" y="4591050"/>
-            <a:ext cx="1619250" cy="1047749"/>
-          </a:xfrm>
-          <a:prstGeom prst="rect">
-            <a:avLst/>
-          </a:prstGeom>
-          <a:noFill/>
-        </p:spPr>
-        <p:txBody>
-          <a:bodyPr wrap="square" lIns="0" tIns="0" rIns="0" bIns="0">
-            <a:spAutoFit/>
-          </a:bodyPr>
-          <a:lstStyle/>
-          <a:p>
-            <a:pPr>
-              <a:lnSpc>
-                <a:spcPct val="118000"/>
-              </a:lnSpc>
-              <a:spcBef>
-                <a:spcPts val="0"/>
-              </a:spcBef>
-              <a:spcAft>
-                <a:spcPts val="0"/>
-              </a:spcAft>
-              <a:defRPr sz="2200" b="1">
-                <a:solidFill>
-                  <a:srgbClr val="24384A"/>
-                </a:solidFill>
-                <a:latin typeface="Lato"/>
-              </a:defRPr>
-            </a:pPr>
-            <a:endParaRPr/>
-          </a:p>
-        </p:txBody>
-      </p:sp>
       <p:cxnSp>
         <p:nvCxnSpPr>
           <p:cNvPr id="14" name="Connector 13"/>
@@ -13173,7 +13070,7 @@
         </p:nvSpPr>
         <p:spPr>
           <a:xfrm>
-            <a:off x="2959100" y="2076450"/>
+            <a:off x="3003090" y="2122338"/>
             <a:ext cx="889000" cy="314325"/>
           </a:xfrm>
           <a:prstGeom prst="rect">
@@ -13205,7 +13102,7 @@
               </a:defRPr>
             </a:pPr>
             <a:r>
-              <a:rPr>
+              <a:rPr dirty="0">
                 <a:ea typeface="Microsoft JhengHei"/>
               </a:rPr>
               <a:t>contains</a:t>
@@ -13257,8 +13154,8 @@
         </p:nvSpPr>
         <p:spPr>
           <a:xfrm>
-            <a:off x="6486525" y="2076450"/>
-            <a:ext cx="952500" cy="314325"/>
+            <a:off x="6617158" y="2080323"/>
+            <a:ext cx="952500" cy="228909"/>
           </a:xfrm>
           <a:prstGeom prst="rect">
             <a:avLst/>
@@ -13271,7 +13168,7 @@
           </a:bodyPr>
           <a:lstStyle/>
           <a:p>
-            <a:pPr>
+            <a:pPr algn="ctr">
               <a:lnSpc>
                 <a:spcPct val="118000"/>
               </a:lnSpc>
@@ -13289,7 +13186,7 @@
               </a:defRPr>
             </a:pPr>
             <a:r>
-              <a:rPr>
+              <a:rPr dirty="0">
                 <a:ea typeface="Microsoft JhengHei"/>
               </a:rPr>
               <a:t>attests</a:t>
@@ -13300,13 +13197,15 @@
       <p:cxnSp>
         <p:nvCxnSpPr>
           <p:cNvPr id="18" name="Connector 17"/>
-          <p:cNvCxnSpPr/>
+          <p:cNvCxnSpPr>
+            <a:cxnSpLocks/>
+          </p:cNvCxnSpPr>
           <p:nvPr/>
         </p:nvCxnSpPr>
         <p:spPr>
           <a:xfrm flipV="1">
-            <a:off x="6334125" y="3381376"/>
-            <a:ext cx="1524000" cy="1047749"/>
+            <a:off x="6334125" y="3057525"/>
+            <a:ext cx="1857375" cy="1371600"/>
           </a:xfrm>
           <a:prstGeom prst="line">
             <a:avLst/>
@@ -13341,8 +13240,8 @@
         </p:nvSpPr>
         <p:spPr>
           <a:xfrm>
-            <a:off x="6477000" y="4629150"/>
-            <a:ext cx="1905000" cy="333375"/>
+            <a:off x="6962775" y="4024312"/>
+            <a:ext cx="1905000" cy="586635"/>
           </a:xfrm>
           <a:prstGeom prst="rect">
             <a:avLst/>
@@ -13373,46 +13272,20 @@
               </a:defRPr>
             </a:pPr>
             <a:r>
-              <a:rPr>
+              <a:rPr dirty="0">
                 <a:ea typeface="Microsoft JhengHei"/>
               </a:rPr>
               <a:t>searched for</a:t>
             </a:r>
-          </a:p>
-        </p:txBody>
-      </p:sp>
-      <p:sp>
-        <p:nvSpPr>
-          <p:cNvPr id="20" name="TextBox 19"/>
-          <p:cNvSpPr txBox="1"/>
-          <p:nvPr/>
-        </p:nvSpPr>
-        <p:spPr>
-          <a:xfrm>
-            <a:off x="6477000" y="5000625"/>
-            <a:ext cx="1714500" cy="333375"/>
-          </a:xfrm>
-          <a:prstGeom prst="rect">
-            <a:avLst/>
-          </a:prstGeom>
-          <a:noFill/>
-        </p:spPr>
-        <p:txBody>
-          <a:bodyPr wrap="square" lIns="0" tIns="0" rIns="0" bIns="0">
-            <a:spAutoFit/>
-          </a:bodyPr>
-          <a:lstStyle/>
-          <a:p>
-            <a:pPr>
-              <a:lnSpc>
-                <a:spcPct val="118000"/>
-              </a:lnSpc>
-              <a:spcBef>
-                <a:spcPts val="0"/>
-              </a:spcBef>
-              <a:spcAft>
-                <a:spcPts val="0"/>
-              </a:spcAft>
+            <a:endParaRPr lang="en-US" dirty="0">
+              <a:ea typeface="Microsoft JhengHei"/>
+            </a:endParaRPr>
+          </a:p>
+          <a:p>
+            <a:pPr>
+              <a:lnSpc>
+                <a:spcPct val="118000"/>
+              </a:lnSpc>
               <a:defRPr sz="1700" b="0">
                 <a:solidFill>
                   <a:srgbClr val="65439A"/>
@@ -13421,7 +13294,7 @@
               </a:defRPr>
             </a:pPr>
             <a:r>
-              <a:rPr>
+              <a:rPr lang="en-US" altLang="zh-TW" dirty="0">
                 <a:ea typeface="Microsoft JhengHei"/>
               </a:rPr>
               <a:t>or tests</a:t>
@@ -13437,7 +13310,7 @@
         </p:nvCxnSpPr>
         <p:spPr>
           <a:xfrm>
-            <a:off x="9620250" y="3352800"/>
+            <a:off x="9143999" y="3476625"/>
             <a:ext cx="0" cy="904875"/>
           </a:xfrm>
           <a:prstGeom prst="line">
@@ -13473,7 +13346,7 @@
         </p:nvSpPr>
         <p:spPr>
           <a:xfrm>
-            <a:off x="9906000" y="3638550"/>
+            <a:off x="9334500" y="3643312"/>
             <a:ext cx="1524000" cy="333375"/>
           </a:xfrm>
           <a:prstGeom prst="rect">
@@ -13505,7 +13378,7 @@
               </a:defRPr>
             </a:pPr>
             <a:r>
-              <a:rPr>
+              <a:rPr dirty="0">
                 <a:ea typeface="Microsoft JhengHei"/>
               </a:rPr>
               <a:t>addresses</a:t>
@@ -13521,8 +13394,8 @@
         </p:nvSpPr>
         <p:spPr>
           <a:xfrm>
-            <a:off x="8620125" y="5791200"/>
-            <a:ext cx="2857500" cy="419100"/>
+            <a:off x="7715249" y="5440607"/>
+            <a:ext cx="2857500" cy="310662"/>
           </a:xfrm>
           <a:prstGeom prst="rect">
             <a:avLst/>
@@ -13535,17 +13408,17 @@
           </a:bodyPr>
           <a:lstStyle/>
           <a:p>
-            <a:pPr>
-              <a:lnSpc>
-                <a:spcPct val="118000"/>
-              </a:lnSpc>
-              <a:spcBef>
-                <a:spcPts val="0"/>
-              </a:spcBef>
-              <a:spcAft>
-                <a:spcPts val="0"/>
-              </a:spcAft>
-              <a:defRPr sz="1900" b="1">
+            <a:pPr algn="ctr">
+              <a:lnSpc>
+                <a:spcPct val="118000"/>
+              </a:lnSpc>
+              <a:spcBef>
+                <a:spcPts val="0"/>
+              </a:spcBef>
+              <a:spcAft>
+                <a:spcPts val="0"/>
+              </a:spcAft>
+              <a:defRPr sz="1800" b="1">
                 <a:solidFill>
                   <a:srgbClr val="80511B"/>
                 </a:solidFill>
@@ -13553,84 +13426,14 @@
               </a:defRPr>
             </a:pPr>
             <a:r>
-              <a:rPr>
+              <a:rPr lang="en-US" dirty="0">
                 <a:ea typeface="Microsoft JhengHei"/>
               </a:rPr>
               <a:t>Research question</a:t>
             </a:r>
-          </a:p>
-        </p:txBody>
-      </p:sp>
-      <p:sp>
-        <p:nvSpPr>
-          <p:cNvPr id="24" name="TextBox 23"/>
-          <p:cNvSpPr txBox="1"/>
-          <p:nvPr/>
-        </p:nvSpPr>
-        <p:spPr>
-          <a:xfrm>
-            <a:off x="523874" y="5505450"/>
-            <a:ext cx="7524749" cy="714375"/>
-          </a:xfrm>
-          <a:prstGeom prst="rect">
-            <a:avLst/>
-          </a:prstGeom>
-          <a:noFill/>
-        </p:spPr>
-        <p:txBody>
-          <a:bodyPr wrap="square" lIns="0" tIns="0" rIns="0" bIns="0">
-            <a:spAutoFit/>
-          </a:bodyPr>
-          <a:lstStyle/>
-          <a:p>
-            <a:pPr>
-              <a:lnSpc>
-                <a:spcPct val="118000"/>
-              </a:lnSpc>
-              <a:spcBef>
-                <a:spcPts val="0"/>
-              </a:spcBef>
-              <a:spcAft>
-                <a:spcPts val="0"/>
-              </a:spcAft>
-              <a:defRPr sz="2200" b="0">
-                <a:solidFill>
-                  <a:srgbClr val="24384A"/>
-                </a:solidFill>
-                <a:latin typeface="Lato"/>
-              </a:defRPr>
-            </a:pPr>
-            <a:r>
-              <a:rPr>
-                <a:ea typeface="Microsoft JhengHei"/>
-              </a:rPr>
-              <a:t>Arrows show different relationships.</a:t>
-            </a:r>
-          </a:p>
-          <a:p>
-            <a:pPr>
-              <a:lnSpc>
-                <a:spcPct val="118000"/>
-              </a:lnSpc>
-              <a:spcBef>
-                <a:spcPts val="0"/>
-              </a:spcBef>
-              <a:spcAft>
-                <a:spcPts val="0"/>
-              </a:spcAft>
-              <a:defRPr sz="2200" b="0">
-                <a:solidFill>
-                  <a:srgbClr val="24384A"/>
-                </a:solidFill>
-                <a:latin typeface="Lato"/>
-              </a:defRPr>
-            </a:pPr>
-            <a:r>
-              <a:rPr>
-                <a:ea typeface="Microsoft JhengHei"/>
-              </a:rPr>
-              <a:t>A search is not itself a supporting quotation.</a:t>
-            </a:r>
+            <a:endParaRPr dirty="0">
+              <a:ea typeface="Microsoft JhengHei"/>
+            </a:endParaRPr>
           </a:p>
         </p:txBody>
       </p:sp>
@@ -13895,7 +13698,7 @@
               <a:rPr>
                 <a:ea typeface="Microsoft JhengHei"/>
               </a:rPr>
-              <a:t>Why use an evidence graph?</a:t>
+              <a:t>An evidence graph connects proposals to evidence</a:t>
             </a:r>
           </a:p>
         </p:txBody>
@@ -13943,7 +13746,7 @@
               <a:rPr>
                 <a:ea typeface="Microsoft JhengHei"/>
               </a:rPr>
-              <a:t>Trace a proposal</a:t>
+              <a:t>Inspect a proposal</a:t>
             </a:r>
           </a:p>
         </p:txBody>
@@ -13980,7 +13783,7 @@
               <a:spcAft>
                 <a:spcPts val="0"/>
               </a:spcAft>
-              <a:defRPr sz="2400" b="0">
+              <a:defRPr sz="2000" b="0">
                 <a:solidFill>
                   <a:srgbClr val="24384A"/>
                 </a:solidFill>
@@ -13991,7 +13794,7 @@
               <a:rPr>
                 <a:ea typeface="Microsoft JhengHei"/>
               </a:rPr>
-              <a:t>Follow its citations to passages and source records.</a:t>
+              <a:t>Follow a claim or conjecture to its cited passages and source texts. A link does not make the proposal true.</a:t>
             </a:r>
           </a:p>
         </p:txBody>
@@ -14039,7 +13842,7 @@
               <a:rPr>
                 <a:ea typeface="Microsoft JhengHei"/>
               </a:rPr>
-              <a:t>Inspect dependencies</a:t>
+              <a:t>Inspect text relationships</a:t>
             </a:r>
           </a:p>
         </p:txBody>
@@ -14076,7 +13879,7 @@
               <a:spcAft>
                 <a:spcPts val="0"/>
               </a:spcAft>
-              <a:defRPr sz="2400" b="0">
+              <a:defRPr sz="2000" b="0">
                 <a:solidFill>
                   <a:srgbClr val="24384A"/>
                 </a:solidFill>
@@ -14084,10 +13887,10 @@
               </a:defRPr>
             </a:pPr>
             <a:r>
-              <a:rPr>
-                <a:ea typeface="Microsoft JhengHei"/>
-              </a:rPr>
-              <a:t>See recorded quotation, parallel and descent links.</a:t>
+              <a:rPr dirty="0">
+                <a:ea typeface="Microsoft JhengHei"/>
+              </a:rPr>
+              <a:t>Quotation: reproduced wording. Parallel: corresponding passages. Descent: one text or version proposed to derive from another.</a:t>
             </a:r>
           </a:p>
         </p:txBody>
@@ -14101,7 +13904,7 @@
         <p:spPr>
           <a:xfrm>
             <a:off x="523874" y="4000500"/>
-            <a:ext cx="3190875" cy="752475"/>
+            <a:ext cx="3190875" cy="862737"/>
           </a:xfrm>
           <a:prstGeom prst="rect">
             <a:avLst/>
@@ -14132,11 +13935,14 @@
               </a:defRPr>
             </a:pPr>
             <a:r>
-              <a:rPr>
-                <a:ea typeface="Microsoft JhengHei"/>
-              </a:rPr>
-              <a:t>Keep the history</a:t>
-            </a:r>
+              <a:rPr lang="en-US" dirty="0">
+                <a:ea typeface="Microsoft JhengHei"/>
+              </a:rPr>
+              <a:t>Review the record</a:t>
+            </a:r>
+            <a:endParaRPr dirty="0">
+              <a:ea typeface="Microsoft JhengHei"/>
+            </a:endParaRPr>
           </a:p>
         </p:txBody>
       </p:sp>
@@ -14172,7 +13978,7 @@
               <a:spcAft>
                 <a:spcPts val="0"/>
               </a:spcAft>
-              <a:defRPr sz="2400" b="0">
+              <a:defRPr sz="2000" b="0">
                 <a:solidFill>
                   <a:srgbClr val="24384A"/>
                 </a:solidFill>
@@ -14180,10 +13986,10 @@
               </a:defRPr>
             </a:pPr>
             <a:r>
-              <a:rPr>
-                <a:ea typeface="Microsoft JhengHei"/>
-              </a:rPr>
-              <a:t>Who proposed it, what was checked, what the researcher decided.</a:t>
+              <a:rPr dirty="0">
+                <a:ea typeface="Microsoft JhengHei"/>
+              </a:rPr>
+              <a:t>See who proposed it, which citations were checked, and whether the researcher accepted or rejected it.</a:t>
             </a:r>
           </a:p>
         </p:txBody>
@@ -14276,7 +14082,7 @@
               </a:defRPr>
             </a:pPr>
             <a:r>
-              <a:rPr>
+              <a:rPr dirty="0">
                 <a:ea typeface="Microsoft JhengHei"/>
               </a:rPr>
               <a:t>Suggest a quotation or parallel to investigate, with passages to check.</a:t>
@@ -14850,7 +14656,7 @@
               </a:defRPr>
             </a:pPr>
             <a:r>
-              <a:rPr>
+              <a:rPr dirty="0">
                 <a:ea typeface="Microsoft JhengHei"/>
               </a:rPr>
               <a:t>Open a saved proposal</a:t>
@@ -15016,7 +14822,7 @@
               </a:defRPr>
             </a:pPr>
             <a:r>
-              <a:rPr>
+              <a:rPr dirty="0">
                 <a:ea typeface="Microsoft JhengHei"/>
               </a:rPr>
               <a:t>Cited passages</a:t>
@@ -16793,7 +16599,7 @@
               </a:defRPr>
             </a:pPr>
             <a:r>
-              <a:rPr>
+              <a:rPr dirty="0">
                 <a:ea typeface="Microsoft JhengHei"/>
               </a:rPr>
               <a:t>Results and limits</a:t>
@@ -16841,7 +16647,7 @@
               </a:defRPr>
             </a:pPr>
             <a:r>
-              <a:rPr>
+              <a:rPr dirty="0">
                 <a:ea typeface="Microsoft JhengHei"/>
               </a:rPr>
               <a:t>Results and limits</a:t>
@@ -16858,7 +16664,7 @@
         <p:spPr>
           <a:xfrm>
             <a:off x="523874" y="1943100"/>
-            <a:ext cx="5286375" cy="485775"/>
+            <a:ext cx="5286375" cy="392415"/>
           </a:xfrm>
           <a:prstGeom prst="rect">
             <a:avLst/>
@@ -16889,8 +16695,14 @@
               </a:defRPr>
             </a:pPr>
             <a:r>
-              <a:t>What the tools showed</a:t>
-            </a:r>
+              <a:rPr dirty="0"/>
+              <a:t>What the tools </a:t>
+            </a:r>
+            <a:r>
+              <a:rPr lang="en-US" dirty="0"/>
+              <a:t>managed</a:t>
+            </a:r>
+            <a:endParaRPr dirty="0"/>
           </a:p>
         </p:txBody>
       </p:sp>
@@ -16903,7 +16715,7 @@
         <p:spPr>
           <a:xfrm>
             <a:off x="6524625" y="1943100"/>
-            <a:ext cx="5143500" cy="485775"/>
+            <a:ext cx="5143500" cy="392415"/>
           </a:xfrm>
           <a:prstGeom prst="rect">
             <a:avLst/>
@@ -16934,8 +16746,10 @@
               </a:defRPr>
             </a:pPr>
             <a:r>
-              <a:t>What we still need to check</a:t>
-            </a:r>
+              <a:rPr lang="en-US" dirty="0"/>
+              <a:t>Issues and reminders</a:t>
+            </a:r>
+            <a:endParaRPr dirty="0"/>
           </a:p>
         </p:txBody>
       </p:sp>
@@ -17024,7 +16838,40 @@
               </a:defRPr>
             </a:pPr>
             <a:r>
-              <a:t>T0262 Lotus: known translator Kumārajīva 鳩摩羅什; vocabulary ranks Dharmakṣema 曇無讖 first.</a:t>
+              <a:rPr dirty="0"/>
+              <a:t>T0262 Lotus: known translator </a:t>
+            </a:r>
+            <a:r>
+              <a:rPr dirty="0" err="1"/>
+              <a:t>Kumārajīva</a:t>
+            </a:r>
+            <a:r>
+              <a:rPr dirty="0"/>
+              <a:t> </a:t>
+            </a:r>
+            <a:r>
+              <a:rPr dirty="0" err="1"/>
+              <a:t>鳩摩羅什</a:t>
+            </a:r>
+            <a:r>
+              <a:rPr dirty="0"/>
+              <a:t>; vocabulary ranks </a:t>
+            </a:r>
+            <a:r>
+              <a:rPr dirty="0" err="1"/>
+              <a:t>Dharmakṣema</a:t>
+            </a:r>
+            <a:r>
+              <a:rPr dirty="0"/>
+              <a:t> </a:t>
+            </a:r>
+            <a:r>
+              <a:rPr dirty="0" err="1"/>
+              <a:t>曇無讖</a:t>
+            </a:r>
+            <a:r>
+              <a:rPr dirty="0"/>
+              <a:t> first.</a:t>
             </a:r>
           </a:p>
         </p:txBody>
@@ -17159,6 +17006,7 @@
               </a:defRPr>
             </a:pPr>
             <a:r>
+              <a:rPr dirty="0"/>
               <a:t>The graph brings proposals, cited passages and recorded checks together.</a:t>
             </a:r>
           </a:p>
@@ -19941,7 +19789,7 @@
               <a:rPr lang="en-US" dirty="0">
                 <a:ea typeface="Microsoft JhengHei"/>
               </a:rPr>
-              <a:t>Using known  </a:t>
+              <a:t>Using known questions lets us know how the tool performs </a:t>
             </a:r>
             <a:endParaRPr dirty="0">
               <a:ea typeface="Microsoft JhengHei"/>

--- a/docs/presentation/cohort-pnc-2026-main.pptx
+++ b/docs/presentation/cohort-pnc-2026-main.pptx
@@ -1056,7 +1056,7 @@
           </a:p>
           <a:p>
             <a:r>
-              <a:t>This calculation illustrates a historical-dependence problem: the later commentary contains wording from the earlier text, but belongs to another reference group. Excluding it makes An Shigao the top-ranked group, matching the accepted attribution, by a small uncalibrated margin. It is one known-answer check, not evidence of reliable attribution on unknown texts.</a:t>
+              <a:t>This calculation illustrates a historical-dependence problem: the later commentary contains wording from the earlier text, but belongs to another reference group. Excluding it makes An Shigao 安世高 the top-ranked group, matching the accepted attribution, by a small uncalibrated margin. It is one known-answer check, not evidence of reliable attribution on unknown texts.</a:t>
             </a:r>
           </a:p>
           <a:p>
@@ -1064,7 +1064,7 @@
           </a:p>
           <a:p>
             <a:r>
-              <a:t>T1694 is assigned to the mixed pre-Dharmarakṣa group. Its shared wording contributes to that group’s profile. Removing it changes the reference profile, not T0603. An Shigao worked in the second century CE; Dharmarakṣa later, in the late third and early fourth centuries. “Before Dharmarakṣa” is a catalogue category, not his own work.</a:t>
+              <a:t>T1694 is assigned to the mixed pre-Dharmarakṣa 竺法護 group. Its shared wording contributes to that group’s profile. Removing it changes the reference profile, not T0603. An Shigao 安世高 worked in the second century CE; Dharmarakṣa 竺法護 later, in the late third and early fourth centuries. “Before Dharmarakṣa 竺法護” is a catalogue category, not his own work.</a:t>
             </a:r>
           </a:p>
           <a:p>
@@ -1119,7 +1119,7 @@
           </a:p>
           <a:p>
             <a:r>
-              <a:t>T1694 contributes to the mixed group in the first row. “Other material before Dharmarakṣa” is a catalogue category for early material, not one competing translator. Excluding the commentary changes the leader and greatly reduces the lead.</a:t>
+              <a:t>T1694 contributes to the mixed group in the first row. “Other material before Dharmarakṣa 竺法護” is a catalogue category for early material, not one competing translator. Excluding the commentary changes the leader and greatly reduces the lead.</a:t>
             </a:r>
           </a:p>
           <a:p>
@@ -1143,7 +1143,7 @@
           </a:p>
           <a:p>
             <a:r>
-              <a:t>Do not translate 0.096 into a probability or call it a statistically established tie. An Shigao’s new first place does not establish his authorship. The comparison does not determine which text borrowed from which.</a:t>
+              <a:t>Do not translate 0.096 into a probability or call it a statistically established tie. An Shigao 安世高’s new first place does not establish his authorship. The comparison does not determine which text borrowed from which.</a:t>
             </a:r>
           </a:p>
           <a:p>
@@ -1159,7 +1159,7 @@
           </a:p>
           <a:p>
             <a:r>
-              <a:t>An Shigao worked in the second century CE. Dharmarakṣa worked in the late third and early fourth centuries. The pre-Dharmarakṣa group is an inherited catalogue category; T1694 belongs to it in the supplied data. This label does not settle the debated date or authorship of the commentary. Explain the chronological ordering without attempting to date every group.</a:t>
+              <a:t>An Shigao 安世高 worked in the second century CE. Dharmarakṣa 竺法護 worked in the late third and early fourth centuries. The pre-Dharmarakṣa 竺法護 group is an inherited catalogue category; T1694 belongs to it in the supplied data. This label does not settle the debated date or authorship of the commentary. Explain the chronological ordering without attempting to date every group.</a:t>
             </a:r>
           </a:p>
         </p:txBody>
@@ -2358,7 +2358,7 @@
           </a:p>
           <a:p>
             <a:r>
-              <a:t>Radich supplied the research corpus derived from CBETA, its working catalogue labels, and the short-string list assembled for Dharmarakṣa vocabulary research. Cohort computes profiles, rankings, alignments and embedding retrieval results. Do not attribute those computed results to him.</a:t>
+              <a:t>Radich supplied the research corpus derived from CBETA, its working catalogue labels, and the short-string list assembled for Dharmarakṣa 竺法護 vocabulary research. Cohort computes profiles, rankings, alignments and embedding retrieval results. Do not attribute those computed results to him.</a:t>
             </a:r>
           </a:p>
         </p:txBody>
@@ -2462,7 +2462,7 @@
           </a:p>
           <a:p>
             <a:r>
-              <a:t>The first count concerns T0263-rest and T0262-exDevadatta, not every passage in complete editions. Nearest means first under vector similarity among indexed other works. This is an illustrative case selected after inspecting outputs, not a retrieval accuracy benchmark. Vocabulary excludes the target’s entire Taishō work, but other dependence and genre effects remain. Reverse control: T0262-exDevadatta ranks with Dharmakṣema under both vocabularies, not its catalogue label Kumārajīva. Mention that failure verbally: agreement for one example does not validate attribution. Measurements: scripts/check_method_examples.py; docs/presentation/method-examples.json.</a:t>
+              <a:t>The first count concerns T0263-rest and T0262-exDevadatta, not every passage in complete editions. Nearest means first under vector similarity among indexed other works. This is an illustrative case selected after inspecting outputs, not a retrieval accuracy benchmark. Vocabulary excludes the target’s entire Taishō work, but other dependence and genre effects remain. Reverse control: T0262-exDevadatta ranks with Dharmakṣema 曇無讖 under both vocabularies, not its catalogue label Kumārajīva 鳩摩羅什. Mention that failure verbally: agreement for one example does not validate attribution. Measurements: scripts/check_method_examples.py; docs/presentation/method-examples.json.</a:t>
             </a:r>
           </a:p>
           <a:p>
@@ -2857,7 +2857,7 @@
           </a:p>
           <a:p>
             <a:r>
-              <a:t>T0603 is traditionally associated with An Shigao. We are checking a known case, not attributing an unknown text. Dates and the commentary relationship come from scholarship.</a:t>
+              <a:t>T0603 is traditionally associated with An Shigao 安世高. We are checking a known case, not attributing an unknown text. Dates and the commentary relationship come from scholarship.</a:t>
             </a:r>
           </a:p>
         </p:txBody>
@@ -3523,7 +3523,7 @@
             </a:r>
             <a:r>
               <a:rPr dirty="0" err="1"/>
-              <a:t>Dharmakṣema</a:t>
+              <a:t>Dharmakṣema 曇無讖</a:t>
             </a:r>
             <a:r>
               <a:rPr dirty="0"/>
@@ -3531,7 +3531,7 @@
             </a:r>
             <a:r>
               <a:rPr dirty="0" err="1"/>
-              <a:t>Kumārajīva</a:t>
+              <a:t>Kumārajīva 鳩摩羅什</a:t>
             </a:r>
             <a:r>
               <a:rPr dirty="0"/>
@@ -16384,7 +16384,7 @@
               <a:rPr>
                 <a:ea typeface="Microsoft JhengHei"/>
               </a:rPr>
-              <a:t>Dharmarakṣa research</a:t>
+              <a:t>Dharmarakṣa 竺法護 research</a:t>
             </a:r>
           </a:p>
         </p:txBody>
@@ -21890,7 +21890,7 @@
               <a:rPr>
                 <a:ea typeface="Microsoft JhengHei"/>
               </a:rPr>
-              <a:t>Dharmarakṣa · T0263-rest</a:t>
+              <a:t>Dharmarakṣa 竺法護 · T0263-rest</a:t>
             </a:r>
           </a:p>
           <a:p>
@@ -22011,7 +22011,7 @@
               <a:rPr>
                 <a:ea typeface="Microsoft JhengHei"/>
               </a:rPr>
-              <a:t>Kumārajīva · T0262-exDevadatta</a:t>
+              <a:t>Kumārajīva 鳩摩羅什 · T0262-exDevadatta</a:t>
             </a:r>
           </a:p>
           <a:p>
